--- a/lending-due-diligence-app/docs/Pega-to-PowerPlatform-Migration-PoC.pptx
+++ b/lending-due-diligence-app/docs/Pega-to-PowerPlatform-Migration-PoC.pptx
@@ -830,7 +830,7 @@
           <a:lstStyle/>
           <a:p>
             <a:r>
-              <a:t>This slide pre-empts the obvious challenge - 'could better tooling have extracted more?' The answer is no, and the file sizes are cited as evidence.</a:t>
+              <a:t>This slide originally claimed the rule bodies could not be decoded outside a Pega instance, repeating the extraction tool's own documentation. That was wrong, and testing it changed the recommendation: there are no guards to recover, so the engine's re-visit cap is permanent design rather than a stopgap.</a:t>
             </a:r>
           </a:p>
         </p:txBody>
@@ -4653,7 +4653,7 @@
                 </a:solidFill>
                 <a:latin typeface="Segoe UI"/>
               </a:rPr>
-              <a:t>Rule logic is not portable</a:t>
+              <a:t>Rule bodies are recoverable - but only if you know the encoding</a:t>
             </a:r>
           </a:p>
           <a:p>
@@ -4672,7 +4672,7 @@
                 </a:solidFill>
                 <a:latin typeface="Segoe UI"/>
               </a:rPr>
-              <a:t>•  Rule bodies ship as proprietary binaries. The export contains rules.jar at 22.9 MB, holding instances_*.bin members up to 26.6 MB, which cannot be decoded outside a Pega instance.</a:t>
+              <a:t>•  Rule bodies ship inside rules.jar as a Java-serialised stream. An ASCII scan finds nothing, so the format is widely assumed opaque. The payload strings are UTF-16BE; decoding them makes every rule body readable.</a:t>
             </a:r>
           </a:p>
           <a:p>
@@ -4691,7 +4691,7 @@
                 </a:solidFill>
                 <a:latin typeface="Segoe UI"/>
               </a:rPr>
-              <a:t>Conditional routing is invisible</a:t>
+              <a:t>Conditional routing genuinely does not exist</a:t>
             </a:r>
           </a:p>
           <a:p>
@@ -4710,7 +4710,7 @@
                 </a:solidFill>
                 <a:latin typeface="Segoe UI"/>
               </a:rPr>
-              <a:t>•  The when conditions that guard stage transitions live inside compiled flow rules. They are absent from every exportable artefact - export, application document and the DX API alike.</a:t>
+              <a:t>•  Having extracted the flow bodies, all 264 connector transitions are unconditional - 225 Always, 32 Action, 7 Else. Not one is when-guarded.</a:t>
             </a:r>
           </a:p>
           <a:p>
@@ -4729,7 +4729,7 @@
                 </a:solidFill>
                 <a:latin typeface="Segoe UI"/>
               </a:rPr>
-              <a:t>Behaviour is locked to the engine</a:t>
+              <a:t>Behaviour is still locked to the engine</a:t>
             </a:r>
           </a:p>
           <a:p>
@@ -4916,7 +4916,7 @@
                 </a:solidFill>
                 <a:latin typeface="Segoe UI"/>
               </a:rPr>
-              <a:t>These are platform constraints, not gaps in the migration tooling. Any migration approach faces them identically.</a:t>
+              <a:t>The routing finding is a defect in the source application, not a migration gap - those flows really would loop.</a:t>
             </a:r>
           </a:p>
         </p:txBody>
@@ -9939,13 +9939,13 @@
                     <a:lstStyle/>
                     <a:p>
                       <a:r>
-                        <a:rPr sz="1150" b="0">
-                          <a:solidFill>
-                            <a:srgbClr val="3C3C3C"/>
-                          </a:solidFill>
-                          <a:latin typeface="Segoe UI"/>
-                        </a:rPr>
-                        <a:t>Inventory only</a:t>
+                        <a:rPr sz="1150" b="1">
+                          <a:solidFill>
+                            <a:srgbClr val="1A1A1A"/>
+                          </a:solidFill>
+                          <a:latin typeface="Segoe UI"/>
+                        </a:rPr>
+                        <a:t>Bodies extracted</a:t>
                       </a:r>
                     </a:p>
                   </a:txBody>
@@ -9967,7 +9967,7 @@
                           </a:solidFill>
                           <a:latin typeface="Segoe UI"/>
                         </a:rPr>
-                        <a:t>Bodies not decodable</a:t>
+                        <a:t>0 conditional transitions</a:t>
                       </a:r>
                     </a:p>
                   </a:txBody>
@@ -13494,7 +13494,7 @@
                           </a:solidFill>
                           <a:latin typeface="Segoe UI"/>
                         </a:rPr>
-                        <a:t>Flow when conditions can be recovered from Dev Studio or business workshops</a:t>
+                        <a:t>Rework conditions can be agreed with the business</a:t>
                       </a:r>
                     </a:p>
                   </a:txBody>
@@ -13516,7 +13516,7 @@
                           </a:solidFill>
                           <a:latin typeface="Segoe UI"/>
                         </a:rPr>
-                        <a:t>Guards remain inferred - the main open risk</a:t>
+                        <a:t>Extraction proved none exist in Pega to recover</a:t>
                       </a:r>
                     </a:p>
                   </a:txBody>
@@ -18720,7 +18720,7 @@
                           </a:solidFill>
                           <a:latin typeface="Segoe UI"/>
                         </a:rPr>
-                        <a:t>Transform rules compile into the proprietary binary</a:t>
+                        <a:t>Transform bodies are engine-executed with no exported representation</a:t>
                       </a:r>
                     </a:p>
                   </a:txBody>
@@ -18856,7 +18856,7 @@
                           </a:solidFill>
                           <a:latin typeface="Segoe UI"/>
                         </a:rPr>
-                        <a:t>when conditions live inside compiled flow rules</a:t>
+                        <a:t>Extraction shows Pega has no conditional transitions at all</a:t>
                       </a:r>
                     </a:p>
                   </a:txBody>
@@ -20164,13 +20164,13 @@
                     <a:lstStyle/>
                     <a:p>
                       <a:r>
-                        <a:rPr sz="1150" b="0">
-                          <a:solidFill>
-                            <a:srgbClr val="3C3C3C"/>
-                          </a:solidFill>
-                          <a:latin typeface="Segoe UI"/>
-                        </a:rPr>
-                        <a:t>Improve with Dev Studio extraction</a:t>
+                        <a:rPr sz="1150" b="1">
+                          <a:solidFill>
+                            <a:srgbClr val="1A1A1A"/>
+                          </a:solidFill>
+                          <a:latin typeface="Segoe UI"/>
+                        </a:rPr>
+                        <a:t>Flow-rule extractor built and reusable</a:t>
                       </a:r>
                     </a:p>
                   </a:txBody>
@@ -24368,7 +24368,7 @@
                           </a:solidFill>
                           <a:latin typeface="Segoe UI"/>
                         </a:rPr>
-                        <a:t>Dev Studio extraction of 35 flow rules, or business workshops</a:t>
+                        <a:t>Extraction done - now a business decision on rework conditions</a:t>
                       </a:r>
                     </a:p>
                   </a:txBody>
@@ -25555,7 +25555,7 @@
                           </a:solidFill>
                           <a:latin typeface="Segoe UI"/>
                         </a:rPr>
-                        <a:t>Guard and flow logic recovery</a:t>
+                        <a:t>Rework-condition workshops</a:t>
                       </a:r>
                     </a:p>
                   </a:txBody>
@@ -25577,7 +25577,7 @@
                           </a:solidFill>
                           <a:latin typeface="Segoe UI"/>
                         </a:rPr>
-                        <a:t>35 flow rules, workshops</a:t>
+                        <a:t>Business decision, not extraction</a:t>
                       </a:r>
                     </a:p>
                   </a:txBody>
@@ -25599,7 +25599,7 @@
                           </a:solidFill>
                           <a:latin typeface="Segoe UI"/>
                         </a:rPr>
-                        <a:t>10 - 15</a:t>
+                        <a:t>4 - 6</a:t>
                       </a:r>
                     </a:p>
                   </a:txBody>
@@ -26279,7 +26279,7 @@
                           </a:solidFill>
                           <a:latin typeface="Segoe UI"/>
                         </a:rPr>
-                        <a:t>93 - 141</a:t>
+                        <a:t>87 - 132</a:t>
                       </a:r>
                     </a:p>
                   </a:txBody>
@@ -27430,7 +27430,7 @@
                           </a:solidFill>
                           <a:latin typeface="Segoe UI"/>
                         </a:rPr>
-                        <a:t>Book Dev Studio access and SME time before Phase 1 starts</a:t>
+                        <a:t>Book SME time before Phase 1 starts</a:t>
                       </a:r>
                     </a:p>
                   </a:txBody>
@@ -27980,7 +27980,7 @@
                           </a:solidFill>
                           <a:latin typeface="Segoe UI"/>
                         </a:rPr>
-                        <a:t>Pega Dev Studio access</a:t>
+                        <a:t>Business SME workshops</a:t>
                       </a:r>
                     </a:p>
                   </a:txBody>
@@ -28002,7 +28002,7 @@
                           </a:solidFill>
                           <a:latin typeface="Segoe UI"/>
                         </a:rPr>
-                        <a:t>Extracting the 35 flow rule bodies</a:t>
+                        <a:t>Agreeing the rework conditions</a:t>
                       </a:r>
                     </a:p>
                   </a:txBody>
@@ -28024,7 +28024,7 @@
                           </a:solidFill>
                           <a:latin typeface="Segoe UI"/>
                         </a:rPr>
-                        <a:t>Before Phase 1</a:t>
+                        <a:t>Phase 1 weeks 1 to 2</a:t>
                       </a:r>
                     </a:p>
                   </a:txBody>
@@ -28046,7 +28046,7 @@
                           </a:solidFill>
                           <a:latin typeface="Segoe UI"/>
                         </a:rPr>
-                        <a:t>Pega platform team</a:t>
+                        <a:t>Business</a:t>
                       </a:r>
                     </a:p>
                   </a:txBody>
@@ -29325,7 +29325,7 @@
                 </a:solidFill>
                 <a:latin typeface="Segoe UI"/>
               </a:rPr>
-              <a:t>•  Secure Pega Dev Studio access and business SME time before Phase 1 starts. These are the two hard dependencies, and both sit outside the delivery team.</a:t>
+              <a:t>•  Secure business SME time before Phase 1 starts. Flow-rule extraction is solved; what remains needs business input, not platform access.</a:t>
             </a:r>
           </a:p>
         </p:txBody>
@@ -36448,7 +36448,7 @@
                 </a:solidFill>
                 <a:latin typeface="Segoe UI"/>
               </a:rPr>
-              <a:t>•  Replace with the real when conditions from Dev Studio. Because guards are Dataverse rows, this is a data edit with no code change or redeploy.</a:t>
+              <a:t>•  Extraction proved Pega has no conditional transitions, so these encode a business decision rather than a recovered rule. Confirm with SMEs; because guards are Dataverse rows it is a data edit, no redeploy.</a:t>
             </a:r>
           </a:p>
         </p:txBody>

--- a/lending-due-diligence-app/docs/Pega-to-PowerPlatform-Migration-PoC.pptx
+++ b/lending-due-diligence-app/docs/Pega-to-PowerPlatform-Migration-PoC.pptx
@@ -20757,7 +20757,7 @@
                           </a:solidFill>
                           <a:latin typeface="Segoe UI"/>
                         </a:rPr>
-                        <a:t>Transform bodies are engine-executed with no exported representation</a:t>
+                        <a:t>No transform rules authored in this export - nothing to port</a:t>
                       </a:r>
                     </a:p>
                   </a:txBody>
@@ -28781,7 +28781,7 @@
                           </a:solidFill>
                           <a:latin typeface="Segoe UI"/>
                         </a:rPr>
-                        <a:t>Data transform logic unavailable</a:t>
+                        <a:t>Data transforms unauthored in source</a:t>
                       </a:r>
                     </a:p>
                   </a:txBody>
@@ -28797,13 +28797,13 @@
                     <a:lstStyle/>
                     <a:p>
                       <a:r>
-                        <a:rPr sz="1150" b="1">
-                          <a:solidFill>
-                            <a:srgbClr val="1A1A1A"/>
-                          </a:solidFill>
-                          <a:latin typeface="Segoe UI"/>
-                        </a:rPr>
-                        <a:t>High</a:t>
+                        <a:rPr sz="1150" b="0">
+                          <a:solidFill>
+                            <a:srgbClr val="3C3C3C"/>
+                          </a:solidFill>
+                          <a:latin typeface="Segoe UI"/>
+                        </a:rPr>
+                        <a:t>Medium</a:t>
                       </a:r>
                     </a:p>
                   </a:txBody>
@@ -28825,7 +28825,7 @@
                           </a:solidFill>
                           <a:latin typeface="Segoe UI"/>
                         </a:rPr>
-                        <a:t>Business analysis of 20 transform steps to restate the rules</a:t>
+                        <a:t>0 transform rules exist behind the 20 steps - business decides what they should do</a:t>
                       </a:r>
                     </a:p>
                   </a:txBody>
@@ -29966,7 +29966,7 @@
                           </a:solidFill>
                           <a:latin typeface="Segoe UI"/>
                         </a:rPr>
-                        <a:t>20 transform steps</a:t>
+                        <a:t>20 steps, no source logic to port</a:t>
                       </a:r>
                     </a:p>
                   </a:txBody>
@@ -29988,7 +29988,7 @@
                           </a:solidFill>
                           <a:latin typeface="Segoe UI"/>
                         </a:rPr>
-                        <a:t>15 - 20</a:t>
+                        <a:t>10 - 15</a:t>
                       </a:r>
                     </a:p>
                   </a:txBody>
@@ -30600,7 +30600,7 @@
                           </a:solidFill>
                           <a:latin typeface="Segoe UI"/>
                         </a:rPr>
-                        <a:t>87 - 132</a:t>
+                        <a:t>82 - 127</a:t>
                       </a:r>
                     </a:p>
                   </a:txBody>

--- a/lending-due-diligence-app/docs/Pega-to-PowerPlatform-Migration-PoC.pptx
+++ b/lending-due-diligence-app/docs/Pega-to-PowerPlatform-Migration-PoC.pptx
@@ -8915,13 +8915,13 @@
                     <a:lstStyle/>
                     <a:p>
                       <a:r>
-                        <a:rPr sz="1150" b="0">
-                          <a:solidFill>
-                            <a:srgbClr val="3C3C3C"/>
-                          </a:solidFill>
-                          <a:latin typeface="Segoe UI"/>
-                        </a:rPr>
-                        <a:t>Out of scope</a:t>
+                        <a:rPr sz="1150" b="1">
+                          <a:solidFill>
+                            <a:srgbClr val="1A1A1A"/>
+                          </a:solidFill>
+                          <a:latin typeface="Segoe UI"/>
+                        </a:rPr>
+                        <a:t>All auto-generated - nothing to port</a:t>
                       </a:r>
                     </a:p>
                   </a:txBody>
@@ -20645,7 +20645,7 @@
                           </a:solidFill>
                           <a:latin typeface="Segoe UI"/>
                         </a:rPr>
-                        <a:t>Notification content</a:t>
+                        <a:t>Notification recipients</a:t>
                       </a:r>
                     </a:p>
                   </a:txBody>
@@ -20667,7 +20667,7 @@
                           </a:solidFill>
                           <a:latin typeface="Segoe UI"/>
                         </a:rPr>
-                        <a:t>17 steps / 27 rules</a:t>
+                        <a:t>17 steps</a:t>
                       </a:r>
                     </a:p>
                   </a:txBody>
@@ -20689,7 +20689,7 @@
                           </a:solidFill>
                           <a:latin typeface="Segoe UI"/>
                         </a:rPr>
-                        <a:t>Correspondence bodies are engine-held with no export representation</a:t>
+                        <a:t>Subject and body recovered from the export; recipients are not in the rule</a:t>
                       </a:r>
                     </a:p>
                   </a:txBody>
@@ -28713,7 +28713,7 @@
                           </a:solidFill>
                           <a:latin typeface="Segoe UI"/>
                         </a:rPr>
-                        <a:t>Notification content unavailable</a:t>
+                        <a:t>Notification recipients undefined</a:t>
                       </a:r>
                     </a:p>
                   </a:txBody>
@@ -28729,35 +28729,35 @@
                     <a:lstStyle/>
                     <a:p>
                       <a:r>
+                        <a:rPr sz="1150" b="1">
+                          <a:solidFill>
+                            <a:srgbClr val="1A1A1A"/>
+                          </a:solidFill>
+                          <a:latin typeface="Segoe UI"/>
+                        </a:rPr>
+                        <a:t>Low</a:t>
+                      </a:r>
+                    </a:p>
+                  </a:txBody>
+                  <a:tcPr anchor="ctr" marL="91440" marT="18288" marB="18288">
+                    <a:solidFill>
+                      <a:srgbClr val="F4F5F7"/>
+                    </a:solidFill>
+                  </a:tcPr>
+                </a:tc>
+                <a:tc>
+                  <a:txBody>
+                    <a:bodyPr wrap="square"/>
+                    <a:lstStyle/>
+                    <a:p>
+                      <a:r>
                         <a:rPr sz="1150" b="0">
                           <a:solidFill>
                             <a:srgbClr val="3C3C3C"/>
                           </a:solidFill>
                           <a:latin typeface="Segoe UI"/>
                         </a:rPr>
-                        <a:t>Medium</a:t>
-                      </a:r>
-                    </a:p>
-                  </a:txBody>
-                  <a:tcPr anchor="ctr" marL="91440" marT="18288" marB="18288">
-                    <a:solidFill>
-                      <a:srgbClr val="F4F5F7"/>
-                    </a:solidFill>
-                  </a:tcPr>
-                </a:tc>
-                <a:tc>
-                  <a:txBody>
-                    <a:bodyPr wrap="square"/>
-                    <a:lstStyle/>
-                    <a:p>
-                      <a:r>
-                        <a:rPr sz="1150" b="0">
-                          <a:solidFill>
-                            <a:srgbClr val="3C3C3C"/>
-                          </a:solidFill>
-                          <a:latin typeface="Segoe UI"/>
-                        </a:rPr>
-                        <a:t>Business review of 27 correspondence rules; re-author as templates</a:t>
+                        <a:t>Wording fully recovered - only the recipient list needs deciding</a:t>
                       </a:r>
                     </a:p>
                   </a:txBody>
@@ -29121,7 +29121,7 @@
                           </a:solidFill>
                           <a:latin typeface="Segoe UI"/>
                         </a:rPr>
-                        <a:t>Reporting not addressed</a:t>
+                        <a:t>Reporting</a:t>
                       </a:r>
                     </a:p>
                   </a:txBody>
@@ -29137,35 +29137,35 @@
                     <a:lstStyle/>
                     <a:p>
                       <a:r>
+                        <a:rPr sz="1150" b="1">
+                          <a:solidFill>
+                            <a:srgbClr val="1A1A1A"/>
+                          </a:solidFill>
+                          <a:latin typeface="Segoe UI"/>
+                        </a:rPr>
+                        <a:t>None</a:t>
+                      </a:r>
+                    </a:p>
+                  </a:txBody>
+                  <a:tcPr anchor="ctr" marL="91440" marT="18288" marB="18288">
+                    <a:solidFill>
+                      <a:srgbClr val="F4F5F7"/>
+                    </a:solidFill>
+                  </a:tcPr>
+                </a:tc>
+                <a:tc>
+                  <a:txBody>
+                    <a:bodyPr wrap="square"/>
+                    <a:lstStyle/>
+                    <a:p>
+                      <a:r>
                         <a:rPr sz="1150" b="0">
                           <a:solidFill>
                             <a:srgbClr val="3C3C3C"/>
                           </a:solidFill>
                           <a:latin typeface="Segoe UI"/>
                         </a:rPr>
-                        <a:t>Low</a:t>
-                      </a:r>
-                    </a:p>
-                  </a:txBody>
-                  <a:tcPr anchor="ctr" marL="91440" marT="18288" marB="18288">
-                    <a:solidFill>
-                      <a:srgbClr val="F4F5F7"/>
-                    </a:solidFill>
-                  </a:tcPr>
-                </a:tc>
-                <a:tc>
-                  <a:txBody>
-                    <a:bodyPr wrap="square"/>
-                    <a:lstStyle/>
-                    <a:p>
-                      <a:r>
-                        <a:rPr sz="1150" b="0">
-                          <a:solidFill>
-                            <a:srgbClr val="3C3C3C"/>
-                          </a:solidFill>
-                          <a:latin typeface="Segoe UI"/>
-                        </a:rPr>
-                        <a:t>Assess 30 report definitions for Power BI equivalents</a:t>
+                        <a:t>All 30 report definitions are auto-generated scaffolding - nothing to port</a:t>
                       </a:r>
                     </a:p>
                   </a:txBody>
@@ -30012,7 +30012,7 @@
                           </a:solidFill>
                           <a:latin typeface="Segoe UI"/>
                         </a:rPr>
-                        <a:t>Notification implementation</a:t>
+                        <a:t>Notification delivery</a:t>
                       </a:r>
                     </a:p>
                   </a:txBody>
@@ -30034,7 +30034,7 @@
                           </a:solidFill>
                           <a:latin typeface="Segoe UI"/>
                         </a:rPr>
-                        <a:t>17 steps / 27 rules</a:t>
+                        <a:t>Wording recovered; wire send + recipients</a:t>
                       </a:r>
                     </a:p>
                   </a:txBody>
@@ -30056,7 +30056,7 @@
                           </a:solidFill>
                           <a:latin typeface="Segoe UI"/>
                         </a:rPr>
-                        <a:t>8 - 12</a:t>
+                        <a:t>5 - 8</a:t>
                       </a:r>
                     </a:p>
                   </a:txBody>
@@ -30600,7 +30600,7 @@
                           </a:solidFill>
                           <a:latin typeface="Segoe UI"/>
                         </a:rPr>
-                        <a:t>82 - 127</a:t>
+                        <a:t>79 - 123</a:t>
                       </a:r>
                     </a:p>
                   </a:txBody>

--- a/lending-due-diligence-app/docs/Pega-to-PowerPlatform-Migration-PoC.pptx
+++ b/lending-due-diligence-app/docs/Pega-to-PowerPlatform-Migration-PoC.pptx
@@ -694,7 +694,7 @@
           <a:lstStyle/>
           <a:p>
             <a:r>
-              <a:t>This is the practical answer to 'we have no time for requirements'. You are not asking them to specify an application. You are showing them one that already runs and asking them to confirm 41 specific points, each anchored to a named step they recognise.</a:t>
+              <a:t>This is the practical answer to 'we have no time for requirements'. You are not asking them to specify an application. Two of the five rows have collapsed to nothing since the artefacts were mined properly, and the rest are specific questions against named steps.</a:t>
             </a:r>
           </a:p>
         </p:txBody>
@@ -19843,8 +19843,8 @@
                 </a:solidFill>
                 <a:latin typeface="Segoe UI"/>
               </a:rPr>
-              <a:t>of 80 steps need
-manual implementation</a:t>
+              <a:t>of 80 steps still
+need implementation</a:t>
             </a:r>
           </a:p>
         </p:txBody>
@@ -19974,7 +19974,7 @@
                 </a:solidFill>
                 <a:latin typeface="Segoe UI"/>
               </a:rPr>
-              <a:t>17</a:t>
+              <a:t>27</a:t>
             </a:r>
           </a:p>
         </p:txBody>
@@ -20016,8 +20016,8 @@
                 </a:solidFill>
                 <a:latin typeface="Segoe UI"/>
               </a:rPr>
-              <a:t>Notification
-steps</a:t>
+              <a:t>Notification messages
+fully recovered</a:t>
             </a:r>
           </a:p>
         </p:txBody>
@@ -20189,8 +20189,8 @@
                 </a:solidFill>
                 <a:latin typeface="Segoe UI"/>
               </a:rPr>
-              <a:t>Data transform
-steps</a:t>
+              <a:t>Transforms with no
+authored logic</a:t>
             </a:r>
           </a:p>
         </p:txBody>
@@ -20362,8 +20362,8 @@
                 </a:solidFill>
                 <a:latin typeface="Segoe UI"/>
               </a:rPr>
-              <a:t>Document generation
-steps</a:t>
+              <a:t>Document templates
+not exposed</a:t>
             </a:r>
           </a:p>
         </p:txBody>
@@ -20621,7 +20621,7 @@
                           </a:solidFill>
                           <a:latin typeface="Segoe UI"/>
                         </a:rPr>
-                        <a:t>Why it cannot be automated</a:t>
+                        <a:t>What the artefacts already give us</a:t>
                       </a:r>
                     </a:p>
                   </a:txBody>
@@ -20645,7 +20645,7 @@
                           </a:solidFill>
                           <a:latin typeface="Segoe UI"/>
                         </a:rPr>
-                        <a:t>Notification recipients</a:t>
+                        <a:t>Notification delivery</a:t>
                       </a:r>
                     </a:p>
                   </a:txBody>
@@ -20683,13 +20683,13 @@
                     <a:lstStyle/>
                     <a:p>
                       <a:r>
-                        <a:rPr sz="1150" b="0">
-                          <a:solidFill>
-                            <a:srgbClr val="3C3C3C"/>
-                          </a:solidFill>
-                          <a:latin typeface="Segoe UI"/>
-                        </a:rPr>
-                        <a:t>Subject and body recovered from the export; recipients are not in the rule</a:t>
+                        <a:rPr sz="1150" b="1">
+                          <a:solidFill>
+                            <a:srgbClr val="1A1A1A"/>
+                          </a:solidFill>
+                          <a:latin typeface="Segoe UI"/>
+                        </a:rPr>
+                        <a:t>Subject and body recovered 27/27 - only recipients need deciding</a:t>
                       </a:r>
                     </a:p>
                   </a:txBody>
@@ -20713,7 +20713,7 @@
                           </a:solidFill>
                           <a:latin typeface="Segoe UI"/>
                         </a:rPr>
-                        <a:t>Data transform logic</a:t>
+                        <a:t>Data transform behaviour</a:t>
                       </a:r>
                     </a:p>
                   </a:txBody>
@@ -20751,13 +20751,13 @@
                     <a:lstStyle/>
                     <a:p>
                       <a:r>
-                        <a:rPr sz="1150" b="0">
-                          <a:solidFill>
-                            <a:srgbClr val="3C3C3C"/>
-                          </a:solidFill>
-                          <a:latin typeface="Segoe UI"/>
-                        </a:rPr>
-                        <a:t>No transform rules authored in this export - nothing to port</a:t>
+                        <a:rPr sz="1150" b="1">
+                          <a:solidFill>
+                            <a:srgbClr val="1A1A1A"/>
+                          </a:solidFill>
+                          <a:latin typeface="Segoe UI"/>
+                        </a:rPr>
+                        <a:t>No transform rules authored in the source - nothing to port</a:t>
                       </a:r>
                     </a:p>
                   </a:txBody>
@@ -20825,7 +20825,7 @@
                           </a:solidFill>
                           <a:latin typeface="Segoe UI"/>
                         </a:rPr>
-                        <a:t>Templates and merge logic are not exposed</a:t>
+                        <a:t>Step name and position; templates are not exposed</a:t>
                       </a:r>
                     </a:p>
                   </a:txBody>
@@ -20893,7 +20893,7 @@
                           </a:solidFill>
                           <a:latin typeface="Segoe UI"/>
                         </a:rPr>
-                        <a:t>Extraction shows Pega has no conditional transitions at all</a:t>
+                        <a:t>Decision branch routing extracted; the rework condition is a business call</a:t>
                       </a:r>
                     </a:p>
                   </a:txBody>
@@ -20961,7 +20961,7 @@
                           </a:solidFill>
                           <a:latin typeface="Segoe UI"/>
                         </a:rPr>
-                        <a:t>Pega and Dataverse security models differ structurally</a:t>
+                        <a:t>Roles and workbaskets imported; the Dataverse mapping is design work</a:t>
                       </a:r>
                     </a:p>
                   </a:txBody>
@@ -21101,7 +21101,7 @@
                 </a:solidFill>
                 <a:latin typeface="Segoe UI"/>
               </a:rPr>
-              <a:t>This 51% is the number to plan against. It is not a tooling shortfall - no migration approach can extract what the platform does not expose.</a:t>
+              <a:t>41 steps still need building - but none of them needs discovering. Every one is named, located, and in the notification case fully written.</a:t>
             </a:r>
           </a:p>
         </p:txBody>
@@ -22763,7 +22763,7 @@
         </p:nvGraphicFramePr>
         <p:xfrm>
           <a:off x="566928" y="2834640"/>
-          <a:ext cx="11064240" cy="2542032"/>
+          <a:ext cx="11064240" cy="3090672"/>
         </p:xfrm>
         <a:graphic>
           <a:graphicData uri="http://schemas.openxmlformats.org/drawingml/2006/table">
@@ -22993,7 +22993,7 @@
                           </a:solidFill>
                           <a:latin typeface="Segoe UI"/>
                         </a:rPr>
-                        <a:t>User interface</a:t>
+                        <a:t>Routing logic</a:t>
                       </a:r>
                     </a:p>
                   </a:txBody>
@@ -23015,7 +23015,7 @@
                           </a:solidFill>
                           <a:latin typeface="Segoe UI"/>
                         </a:rPr>
-                        <a:t>24 screens, 59 fields, plus screenshots</a:t>
+                        <a:t>264 transitions, 26 validated decision branches</a:t>
                       </a:r>
                     </a:p>
                   </a:txBody>
@@ -23061,7 +23061,7 @@
                           </a:solidFill>
                           <a:latin typeface="Segoe UI"/>
                         </a:rPr>
-                        <a:t>Data model</a:t>
+                        <a:t>User interface</a:t>
                       </a:r>
                     </a:p>
                   </a:txBody>
@@ -23083,7 +23083,7 @@
                           </a:solidFill>
                           <a:latin typeface="Segoe UI"/>
                         </a:rPr>
-                        <a:t>10 data objects, 334 properties</a:t>
+                        <a:t>24 screens, 59 fields, plus screenshots</a:t>
                       </a:r>
                     </a:p>
                   </a:txBody>
@@ -23129,7 +23129,7 @@
                           </a:solidFill>
                           <a:latin typeface="Segoe UI"/>
                         </a:rPr>
-                        <a:t>Reference data</a:t>
+                        <a:t>Data model</a:t>
                       </a:r>
                     </a:p>
                   </a:txBody>
@@ -23151,7 +23151,7 @@
                           </a:solidFill>
                           <a:latin typeface="Segoe UI"/>
                         </a:rPr>
-                        <a:t>26 choice sets, 107 values</a:t>
+                        <a:t>10 data objects, 334 properties</a:t>
                       </a:r>
                     </a:p>
                   </a:txBody>
@@ -23197,7 +23197,7 @@
                           </a:solidFill>
                           <a:latin typeface="Segoe UI"/>
                         </a:rPr>
-                        <a:t>Security model</a:t>
+                        <a:t>Reference data</a:t>
                       </a:r>
                     </a:p>
                   </a:txBody>
@@ -23219,7 +23219,7 @@
                           </a:solidFill>
                           <a:latin typeface="Segoe UI"/>
                         </a:rPr>
-                        <a:t>19 roles, 30 grants, 18 workbaskets</a:t>
+                        <a:t>26 choice sets, 107 values</a:t>
                       </a:r>
                     </a:p>
                   </a:txBody>
@@ -23265,7 +23265,7 @@
                           </a:solidFill>
                           <a:latin typeface="Segoe UI"/>
                         </a:rPr>
-                        <a:t>Routing logic</a:t>
+                        <a:t>Security model</a:t>
                       </a:r>
                     </a:p>
                   </a:txBody>
@@ -23287,7 +23287,7 @@
                           </a:solidFill>
                           <a:latin typeface="Segoe UI"/>
                         </a:rPr>
-                        <a:t>264 connector transitions</a:t>
+                        <a:t>19 roles, 30 grants, 18 workbaskets</a:t>
                       </a:r>
                     </a:p>
                   </a:txBody>
@@ -23333,6 +23333,142 @@
                           </a:solidFill>
                           <a:latin typeface="Segoe UI"/>
                         </a:rPr>
+                        <a:t>Notification wording</a:t>
+                      </a:r>
+                    </a:p>
+                  </a:txBody>
+                  <a:tcPr anchor="ctr" marL="91440" marT="18288" marB="18288">
+                    <a:solidFill>
+                      <a:srgbClr val="F4F5F7"/>
+                    </a:solidFill>
+                  </a:tcPr>
+                </a:tc>
+                <a:tc>
+                  <a:txBody>
+                    <a:bodyPr wrap="square"/>
+                    <a:lstStyle/>
+                    <a:p>
+                      <a:r>
+                        <a:rPr sz="1150" b="0">
+                          <a:solidFill>
+                            <a:srgbClr val="3C3C3C"/>
+                          </a:solidFill>
+                          <a:latin typeface="Segoe UI"/>
+                        </a:rPr>
+                        <a:t>27 subjects and 27 email bodies</a:t>
+                      </a:r>
+                    </a:p>
+                  </a:txBody>
+                  <a:tcPr anchor="ctr" marL="91440" marT="18288" marB="18288">
+                    <a:solidFill>
+                      <a:srgbClr val="F4F5F7"/>
+                    </a:solidFill>
+                  </a:tcPr>
+                </a:tc>
+                <a:tc>
+                  <a:txBody>
+                    <a:bodyPr wrap="square"/>
+                    <a:lstStyle/>
+                    <a:p>
+                      <a:r>
+                        <a:rPr sz="1150" b="1">
+                          <a:solidFill>
+                            <a:srgbClr val="1A1A1A"/>
+                          </a:solidFill>
+                          <a:latin typeface="Segoe UI"/>
+                        </a:rPr>
+                        <a:t>None</a:t>
+                      </a:r>
+                    </a:p>
+                  </a:txBody>
+                  <a:tcPr anchor="ctr" marL="91440" marT="18288" marB="18288">
+                    <a:solidFill>
+                      <a:srgbClr val="F4F5F7"/>
+                    </a:solidFill>
+                  </a:tcPr>
+                </a:tc>
+              </a:tr>
+              <a:tr h="274320">
+                <a:tc>
+                  <a:txBody>
+                    <a:bodyPr wrap="square"/>
+                    <a:lstStyle/>
+                    <a:p>
+                      <a:r>
+                        <a:rPr sz="1150" b="1">
+                          <a:solidFill>
+                            <a:srgbClr val="1A1A1A"/>
+                          </a:solidFill>
+                          <a:latin typeface="Segoe UI"/>
+                        </a:rPr>
+                        <a:t>Reporting</a:t>
+                      </a:r>
+                    </a:p>
+                  </a:txBody>
+                  <a:tcPr anchor="ctr" marL="91440" marT="18288" marB="18288">
+                    <a:solidFill>
+                      <a:srgbClr val="FFFFFF"/>
+                    </a:solidFill>
+                  </a:tcPr>
+                </a:tc>
+                <a:tc>
+                  <a:txBody>
+                    <a:bodyPr wrap="square"/>
+                    <a:lstStyle/>
+                    <a:p>
+                      <a:r>
+                        <a:rPr sz="1150" b="0">
+                          <a:solidFill>
+                            <a:srgbClr val="3C3C3C"/>
+                          </a:solidFill>
+                          <a:latin typeface="Segoe UI"/>
+                        </a:rPr>
+                        <a:t>30 definitions - all auto-generated scaffolding</a:t>
+                      </a:r>
+                    </a:p>
+                  </a:txBody>
+                  <a:tcPr anchor="ctr" marL="91440" marT="18288" marB="18288">
+                    <a:solidFill>
+                      <a:srgbClr val="FFFFFF"/>
+                    </a:solidFill>
+                  </a:tcPr>
+                </a:tc>
+                <a:tc>
+                  <a:txBody>
+                    <a:bodyPr wrap="square"/>
+                    <a:lstStyle/>
+                    <a:p>
+                      <a:r>
+                        <a:rPr sz="1150" b="1">
+                          <a:solidFill>
+                            <a:srgbClr val="1A1A1A"/>
+                          </a:solidFill>
+                          <a:latin typeface="Segoe UI"/>
+                        </a:rPr>
+                        <a:t>None - nothing to port</a:t>
+                      </a:r>
+                    </a:p>
+                  </a:txBody>
+                  <a:tcPr anchor="ctr" marL="91440" marT="18288" marB="18288">
+                    <a:solidFill>
+                      <a:srgbClr val="FFFFFF"/>
+                    </a:solidFill>
+                  </a:tcPr>
+                </a:tc>
+              </a:tr>
+              <a:tr h="274320">
+                <a:tc>
+                  <a:txBody>
+                    <a:bodyPr wrap="square"/>
+                    <a:lstStyle/>
+                    <a:p>
+                      <a:r>
+                        <a:rPr sz="1150" b="1">
+                          <a:solidFill>
+                            <a:srgbClr val="1A1A1A"/>
+                          </a:solidFill>
+                          <a:latin typeface="Segoe UI"/>
+                        </a:rPr>
                         <a:t>Step behaviour</a:t>
                       </a:r>
                     </a:p>
@@ -23355,7 +23491,7 @@
                           </a:solidFill>
                           <a:latin typeface="Segoe UI"/>
                         </a:rPr>
-                        <a:t>41 steps named and located, bodies not exported</a:t>
+                        <a:t>20 transforms and 4 documents, named and located</a:t>
                       </a:r>
                     </a:p>
                   </a:txBody>
@@ -23400,7 +23536,7 @@
         </p:nvSpPr>
         <p:spPr>
           <a:xfrm>
-            <a:off x="566928" y="5650992"/>
+            <a:off x="566928" y="6016752"/>
             <a:ext cx="11064240" cy="658368"/>
           </a:xfrm>
           <a:prstGeom prst="rect">
@@ -23444,7 +23580,7 @@
         </p:nvSpPr>
         <p:spPr>
           <a:xfrm>
-            <a:off x="566928" y="5650992"/>
+            <a:off x="566928" y="6016752"/>
             <a:ext cx="54864" cy="658368"/>
           </a:xfrm>
           <a:prstGeom prst="rect">
@@ -23488,7 +23624,7 @@
         </p:nvSpPr>
         <p:spPr>
           <a:xfrm>
-            <a:off x="786384" y="5742431"/>
+            <a:off x="786384" y="6108192"/>
             <a:ext cx="10652760" cy="493776"/>
           </a:xfrm>
           <a:prstGeom prst="rect">
@@ -23747,7 +23883,7 @@
                 </a:solidFill>
                 <a:latin typeface="Segoe UI"/>
               </a:rPr>
-              <a:t>The 41 steps are not unknowns</a:t>
+              <a:t>What is left is small, named and located</a:t>
             </a:r>
           </a:p>
           <a:p>
@@ -23766,7 +23902,7 @@
                 </a:solidFill>
                 <a:latin typeface="Segoe UI"/>
               </a:rPr>
-              <a:t>•  For every one of them the artefacts already give the case type, the stage, the position in the sequence, the step name and the step type. What is missing is only the body - the wording of a notification, the field derivation inside a transform.</a:t>
+              <a:t>•  Notification wording is fully recovered, reports need no migration and the transform steps have no authored logic to reconstruct. What remains is a short list of specific decisions, each anchored to a step the business already recognises.</a:t>
             </a:r>
           </a:p>
         </p:txBody>
@@ -23781,7 +23917,7 @@
         </p:nvGraphicFramePr>
         <p:xfrm>
           <a:off x="566928" y="2788920"/>
-          <a:ext cx="11064240" cy="1444752"/>
+          <a:ext cx="11064240" cy="1719072"/>
         </p:xfrm>
         <a:graphic>
           <a:graphicData uri="http://schemas.openxmlformats.org/drawingml/2006/table">
@@ -23852,7 +23988,7 @@
                           </a:solidFill>
                           <a:latin typeface="Segoe UI"/>
                         </a:rPr>
-                        <a:t>What notifications does this process send, to whom, and when?</a:t>
+                        <a:t>What notifications does this process send, and what do they say?</a:t>
                       </a:r>
                     </a:p>
                   </a:txBody>
@@ -23874,7 +24010,7 @@
                           </a:solidFill>
                           <a:latin typeface="Segoe UI"/>
                         </a:rPr>
-                        <a:t>Compliance Monitoring / Remediation / 'Notify Stakeholders' - confirm the wording</a:t>
+                        <a:t>Nothing to ask - 27 subjects and bodies recovered. Only: who receives them?</a:t>
                       </a:r>
                     </a:p>
                   </a:txBody>
@@ -23920,7 +24056,7 @@
                           </a:solidFill>
                           <a:latin typeface="Segoe UI"/>
                         </a:rPr>
-                        <a:t>Escalation Management / Case Routing / 'Assign Case Owner' - confirm the derivation</a:t>
+                        <a:t>Escalation Management / Case Routing / 'Assign Case Owner' - no logic exists in Pega; what should it do?</a:t>
                       </a:r>
                     </a:p>
                   </a:txBody>
@@ -24019,6 +24155,52 @@
                   <a:tcPr anchor="ctr" marL="91440" marT="18288" marB="18288">
                     <a:solidFill>
                       <a:srgbClr val="F4F5F7"/>
+                    </a:solidFill>
+                  </a:tcPr>
+                </a:tc>
+              </a:tr>
+              <a:tr h="274320">
+                <a:tc>
+                  <a:txBody>
+                    <a:bodyPr wrap="square"/>
+                    <a:lstStyle/>
+                    <a:p>
+                      <a:r>
+                        <a:rPr sz="1150" b="0">
+                          <a:solidFill>
+                            <a:srgbClr val="3C3C3C"/>
+                          </a:solidFill>
+                          <a:latin typeface="Segoe UI"/>
+                        </a:rPr>
+                        <a:t>What reports does the business need?</a:t>
+                      </a:r>
+                    </a:p>
+                  </a:txBody>
+                  <a:tcPr anchor="ctr" marL="91440" marT="18288" marB="18288">
+                    <a:solidFill>
+                      <a:srgbClr val="FFFFFF"/>
+                    </a:solidFill>
+                  </a:tcPr>
+                </a:tc>
+                <a:tc>
+                  <a:txBody>
+                    <a:bodyPr wrap="square"/>
+                    <a:lstStyle/>
+                    <a:p>
+                      <a:r>
+                        <a:rPr sz="1150" b="1">
+                          <a:solidFill>
+                            <a:srgbClr val="1A1A1A"/>
+                          </a:solidFill>
+                          <a:latin typeface="Segoe UI"/>
+                        </a:rPr>
+                        <a:t>Nothing to ask - all 30 are platform scaffolding, not business reports</a:t>
+                      </a:r>
+                    </a:p>
+                  </a:txBody>
+                  <a:tcPr anchor="ctr" marL="91440" marT="18288" marB="18288">
+                    <a:solidFill>
+                      <a:srgbClr val="FFFFFF"/>
                     </a:solidFill>
                   </a:tcPr>
                 </a:tc>
@@ -24035,7 +24217,7 @@
         </p:nvSpPr>
         <p:spPr>
           <a:xfrm>
-            <a:off x="566928" y="4692396"/>
+            <a:off x="566928" y="5151120"/>
             <a:ext cx="11064240" cy="658368"/>
           </a:xfrm>
           <a:prstGeom prst="rect">
@@ -24079,7 +24261,7 @@
         </p:nvSpPr>
         <p:spPr>
           <a:xfrm>
-            <a:off x="566928" y="4692396"/>
+            <a:off x="566928" y="5151120"/>
             <a:ext cx="54864" cy="658368"/>
           </a:xfrm>
           <a:prstGeom prst="rect">
@@ -24123,7 +24305,7 @@
         </p:nvSpPr>
         <p:spPr>
           <a:xfrm>
-            <a:off x="786384" y="4783836"/>
+            <a:off x="786384" y="5242559"/>
             <a:ext cx="10652760" cy="493776"/>
           </a:xfrm>
           <a:prstGeom prst="rect">
@@ -33491,7 +33673,7 @@
                           </a:solidFill>
                           <a:latin typeface="Segoe UI"/>
                         </a:rPr>
-                        <a:t>Business SME workshops</a:t>
+                        <a:t>Business SME sessions</a:t>
                       </a:r>
                     </a:p>
                   </a:txBody>
@@ -33513,7 +33695,7 @@
                           </a:solidFill>
                           <a:latin typeface="Segoe UI"/>
                         </a:rPr>
-                        <a:t>Agreeing the rework conditions</a:t>
+                        <a:t>4 rework conditions, 20 transform behaviours, notification recipients</a:t>
                       </a:r>
                     </a:p>
                   </a:txBody>
@@ -33693,7 +33875,7 @@
                           </a:solidFill>
                           <a:latin typeface="Segoe UI"/>
                         </a:rPr>
-                        <a:t>Confirming 41 pre-located step bodies - confirmation, not discovery</a:t>
+                        <a:t>A short list of named decisions - notification wording and reports need no input at all</a:t>
                       </a:r>
                     </a:p>
                   </a:txBody>
@@ -34120,7 +34302,7 @@
         </p:nvSpPr>
         <p:spPr>
           <a:xfrm>
-            <a:off x="566928" y="4280915"/>
+            <a:off x="566928" y="4465320"/>
             <a:ext cx="11064240" cy="658368"/>
           </a:xfrm>
           <a:prstGeom prst="rect">
@@ -34164,7 +34346,7 @@
         </p:nvSpPr>
         <p:spPr>
           <a:xfrm>
-            <a:off x="566928" y="4280915"/>
+            <a:off x="566928" y="4465320"/>
             <a:ext cx="54864" cy="658368"/>
           </a:xfrm>
           <a:prstGeom prst="rect">
@@ -34208,7 +34390,7 @@
         </p:nvSpPr>
         <p:spPr>
           <a:xfrm>
-            <a:off x="786384" y="4372355"/>
+            <a:off x="786384" y="4556759"/>
             <a:ext cx="10652760" cy="493776"/>
           </a:xfrm>
           <a:prstGeom prst="rect">
@@ -34966,7 +35148,7 @@
                 </a:solidFill>
                 <a:latin typeface="Segoe UI"/>
               </a:rPr>
-              <a:t>Recommended next action: a two-week inception to recover the 35 flow rule bodies and confirm the security model. That retires the highest risk before committing to the full build.</a:t>
+              <a:t>Recommended next action: a one-week inception to settle the security model and the short list of open business decisions. Flow rules, decision routing and notification wording are already recovered.</a:t>
             </a:r>
           </a:p>
         </p:txBody>
@@ -35330,7 +35512,7 @@
                           </a:solidFill>
                           <a:latin typeface="Segoe UI"/>
                         </a:rPr>
-                        <a:t>Run artefact extraction; time-boxed SME confirmation; provision environments</a:t>
+                        <a:t>Artefact extraction (done); short SME confirmation; provision environments</a:t>
                       </a:r>
                     </a:p>
                   </a:txBody>
@@ -35352,7 +35534,7 @@
                           </a:solidFill>
                           <a:latin typeface="Segoe UI"/>
                         </a:rPr>
-                        <a:t>41 step bodies confirmed; roles designed</a:t>
+                        <a:t>Open decisions confirmed; roles designed</a:t>
                       </a:r>
                     </a:p>
                   </a:txBody>

--- a/lending-due-diligence-app/docs/Pega-to-PowerPlatform-Migration-PoC.pptx
+++ b/lending-due-diligence-app/docs/Pega-to-PowerPlatform-Migration-PoC.pptx
@@ -764,7 +764,7 @@
           <a:lstStyle/>
           <a:p>
             <a:r>
-              <a:t>Lead with the fact that this is a completed implementation. The five KPIs are all measured, not estimated. The 51% figure is the honest counterweight to the 100% - be upfront about it, then immediately qualify it: those 41 steps are named and located, so they are a confirmation exercise, not a discovery exercise.</a:t>
+              <a:t>Lead with the fact that this is a completed implementation. The five KPIs are all measured, not estimated. Be precise about the two different numbers: 41 of 80 step bodies (51%) still need building, which is the effort story; but only 24 of 80 (30%) need business input, because the 17 notification steps had their wording recovered in full from the export.</a:t>
             </a:r>
           </a:p>
         </p:txBody>
@@ -14826,7 +14826,7 @@
                 </a:solidFill>
                 <a:latin typeface="Segoe UI"/>
               </a:rPr>
-              <a:t>•  Automated verification harness (49 checks)</a:t>
+              <a:t>•  Automated verification harness (58 checks)</a:t>
             </a:r>
           </a:p>
           <a:p>
@@ -24857,7 +24857,7 @@
                           </a:solidFill>
                           <a:latin typeface="Segoe UI"/>
                         </a:rPr>
-                        <a:t>Built - 49 checks</a:t>
+                        <a:t>Built - 58 checks</a:t>
                       </a:r>
                     </a:p>
                   </a:txBody>
@@ -31761,7 +31761,7 @@
                 </a:solidFill>
                 <a:latin typeface="Segoe UI"/>
               </a:rPr>
-              <a:t>49/49</a:t>
+              <a:t>58/58</a:t>
             </a:r>
           </a:p>
         </p:txBody>
@@ -32107,7 +32107,7 @@
                 </a:solidFill>
                 <a:latin typeface="Segoe UI"/>
               </a:rPr>
-              <a:t>~51%</a:t>
+              <a:t>24 of 80</a:t>
             </a:r>
           </a:p>
         </p:txBody>
@@ -32150,7 +32150,7 @@
                 <a:latin typeface="Segoe UI"/>
               </a:rPr>
               <a:t>Step bodies needing
-confirmation</a:t>
+business input</a:t>
             </a:r>
           </a:p>
         </p:txBody>
@@ -32287,7 +32287,7 @@
                 </a:solidFill>
                 <a:latin typeface="Segoe UI"/>
               </a:rPr>
-              <a:t>•  Process structure migrates almost entirely through automation. Process behaviour - notifications, data transforms, document generation - does not, because Pega does not expose it. But every one of those steps is recovered by name and position, so the residual business conversation is confirmation rather than discovery.</a:t>
+              <a:t>•  Process structure migrates almost entirely through automation. Process behaviour - notifications, data transforms, document generation - does not. But 41 steps still needing implementation is not the same as 41 unknowns: notification wording is fully recovered, so only 24 steps require any business input at all.</a:t>
             </a:r>
           </a:p>
         </p:txBody>
@@ -42375,7 +42375,7 @@
                           </a:solidFill>
                           <a:latin typeface="Segoe UI"/>
                         </a:rPr>
-                        <a:t>Live end-to-end verification, 49 checks</a:t>
+                        <a:t>Live end-to-end verification, 58 checks</a:t>
                       </a:r>
                     </a:p>
                   </a:txBody>
@@ -43818,7 +43818,7 @@
                 </a:solidFill>
                 <a:latin typeface="Segoe UI"/>
               </a:rPr>
-              <a:t>5 case types  ·  39 stages  ·  80 steps  ·  49/49 verification checks  ·  0 business workshops</a:t>
+              <a:t>5 case types  ·  39 stages  ·  80 steps  ·  58/58 verification checks  ·  0 business workshops</a:t>
             </a:r>
           </a:p>
         </p:txBody>

--- a/lending-due-diligence-app/docs/Pega-to-PowerPlatform-Migration-PoC.pptx
+++ b/lending-due-diligence-app/docs/Pega-to-PowerPlatform-Migration-PoC.pptx
@@ -25883,7 +25883,7 @@
                 </a:solidFill>
                 <a:latin typeface="Segoe UI"/>
               </a:rPr>
-              <a:t>49</a:t>
+              <a:t>58</a:t>
             </a:r>
           </a:p>
         </p:txBody>

--- a/lending-due-diligence-app/docs/Pega-to-PowerPlatform-Migration-PoC.pptx
+++ b/lending-due-diligence-app/docs/Pega-to-PowerPlatform-Migration-PoC.pptx
@@ -8899,7 +8899,7 @@
                           </a:solidFill>
                           <a:latin typeface="Segoe UI"/>
                         </a:rPr>
-                        <a:t>Power BI over Dataverse</a:t>
+                        <a:t>Insights screen + Power BI</a:t>
                       </a:r>
                     </a:p>
                   </a:txBody>
@@ -8921,7 +8921,7 @@
                           </a:solidFill>
                           <a:latin typeface="Segoe UI"/>
                         </a:rPr>
-                        <a:t>All auto-generated - nothing to port</a:t>
+                        <a:t>No logic to port; capability built</a:t>
                       </a:r>
                     </a:p>
                   </a:txBody>
@@ -23445,7 +23445,7 @@
                           </a:solidFill>
                           <a:latin typeface="Segoe UI"/>
                         </a:rPr>
-                        <a:t>None - nothing to port</a:t>
+                        <a:t>None - capability rebuilt natively</a:t>
                       </a:r>
                     </a:p>
                   </a:txBody>
@@ -24194,7 +24194,7 @@
                           </a:solidFill>
                           <a:latin typeface="Segoe UI"/>
                         </a:rPr>
-                        <a:t>Nothing to ask - all 30 are platform scaffolding, not business reports</a:t>
+                        <a:t>Nothing to ask - all 30 are platform scaffolding; the equivalent views are built</a:t>
                       </a:r>
                     </a:p>
                   </a:txBody>
@@ -29325,7 +29325,7 @@
                           </a:solidFill>
                           <a:latin typeface="Segoe UI"/>
                         </a:rPr>
-                        <a:t>None</a:t>
+                        <a:t>Low</a:t>
                       </a:r>
                     </a:p>
                   </a:txBody>
@@ -29347,7 +29347,7 @@
                           </a:solidFill>
                           <a:latin typeface="Segoe UI"/>
                         </a:rPr>
-                        <a:t>All 30 report definitions are auto-generated scaffolding - nothing to port</a:t>
+                        <a:t>No report logic to port; the in-app summary and data browser are built</a:t>
                       </a:r>
                     </a:p>
                   </a:txBody>

--- a/lending-due-diligence-app/docs/Pega-to-PowerPlatform-Migration-PoC.pptx
+++ b/lending-due-diligence-app/docs/Pega-to-PowerPlatform-Migration-PoC.pptx
@@ -8559,7 +8559,7 @@
                           </a:solidFill>
                           <a:latin typeface="Segoe UI"/>
                         </a:rPr>
-                        <a:t>Power Automate / Office 365 Outlook connector</a:t>
+                        <a:t>Outbox table + Power Automate flow</a:t>
                       </a:r>
                     </a:p>
                   </a:txBody>
@@ -8575,13 +8575,13 @@
                     <a:lstStyle/>
                     <a:p>
                       <a:r>
-                        <a:rPr sz="1150" b="0">
-                          <a:solidFill>
-                            <a:srgbClr val="3C3C3C"/>
-                          </a:solidFill>
-                          <a:latin typeface="Segoe UI"/>
-                        </a:rPr>
-                        <a:t>Audited, not sent</a:t>
+                        <a:rPr sz="1150" b="1">
+                          <a:solidFill>
+                            <a:srgbClr val="1A1A1A"/>
+                          </a:solidFill>
+                          <a:latin typeface="Segoe UI"/>
+                        </a:rPr>
+                        <a:t>Queued by the app; flow sends</a:t>
                       </a:r>
                     </a:p>
                   </a:txBody>
@@ -20689,7 +20689,7 @@
                           </a:solidFill>
                           <a:latin typeface="Segoe UI"/>
                         </a:rPr>
-                        <a:t>Subject and body recovered 27/27 - only recipients need deciding</a:t>
+                        <a:t>Content recovered 27/27 and outbox built - only recipients need deciding</a:t>
                       </a:r>
                     </a:p>
                   </a:txBody>
@@ -30216,7 +30216,7 @@
                           </a:solidFill>
                           <a:latin typeface="Segoe UI"/>
                         </a:rPr>
-                        <a:t>Wording recovered; wire send + recipients</a:t>
+                        <a:t>Outbox built; one flow + recipient mapping</a:t>
                       </a:r>
                     </a:p>
                   </a:txBody>
@@ -30238,7 +30238,7 @@
                           </a:solidFill>
                           <a:latin typeface="Segoe UI"/>
                         </a:rPr>
-                        <a:t>5 - 8</a:t>
+                        <a:t>3 - 5</a:t>
                       </a:r>
                     </a:p>
                   </a:txBody>
@@ -30782,7 +30782,7 @@
                           </a:solidFill>
                           <a:latin typeface="Segoe UI"/>
                         </a:rPr>
-                        <a:t>79 - 123</a:t>
+                        <a:t>77 - 120</a:t>
                       </a:r>
                     </a:p>
                   </a:txBody>

--- a/lending-due-diligence-app/docs/Pega-to-PowerPlatform-Migration-PoC.pptx
+++ b/lending-due-diligence-app/docs/Pega-to-PowerPlatform-Migration-PoC.pptx
@@ -4390,7 +4390,7 @@
             <a:avLst/>
           </a:prstGeom>
           <a:solidFill>
-            <a:srgbClr val="C8102E"/>
+            <a:srgbClr val="C41F3E"/>
           </a:solidFill>
           <a:ln>
             <a:noFill/>
@@ -4434,7 +4434,7 @@
             <a:avLst/>
           </a:prstGeom>
           <a:solidFill>
-            <a:srgbClr val="006D77"/>
+            <a:srgbClr val="005377"/>
           </a:solidFill>
           <a:ln>
             <a:noFill/>
@@ -4496,7 +4496,7 @@
             <a:r>
               <a:rPr sz="1300" b="1" i="0">
                 <a:solidFill>
-                  <a:srgbClr val="006D77"/>
+                  <a:srgbClr val="007BA4"/>
                 </a:solidFill>
                 <a:latin typeface="Segoe UI"/>
               </a:rPr>
@@ -4557,7 +4557,7 @@
             <a:r>
               <a:rPr sz="4400" b="1" i="0">
                 <a:solidFill>
-                  <a:srgbClr val="C8102E"/>
+                  <a:srgbClr val="C41F3E"/>
                 </a:solidFill>
                 <a:latin typeface="Segoe UI"/>
               </a:rPr>
@@ -4581,7 +4581,7 @@
             <a:avLst/>
           </a:prstGeom>
           <a:solidFill>
-            <a:srgbClr val="006D77"/>
+            <a:srgbClr val="007BA4"/>
           </a:solidFill>
           <a:ln>
             <a:noFill/>
@@ -4788,7 +4788,7 @@
             <a:avLst/>
           </a:prstGeom>
           <a:solidFill>
-            <a:srgbClr val="C8102E"/>
+            <a:srgbClr val="C41F3E"/>
           </a:solidFill>
           <a:ln>
             <a:noFill/>
@@ -4850,7 +4850,7 @@
             <a:r>
               <a:rPr sz="1050" b="1" i="0">
                 <a:solidFill>
-                  <a:srgbClr val="006D77"/>
+                  <a:srgbClr val="007BA4"/>
                 </a:solidFill>
                 <a:latin typeface="Segoe UI"/>
               </a:rPr>
@@ -4944,7 +4944,7 @@
                   </a:txBody>
                   <a:tcPr anchor="ctr" marL="91440">
                     <a:solidFill>
-                      <a:srgbClr val="006D77"/>
+                      <a:srgbClr val="007BA4"/>
                     </a:solidFill>
                   </a:tcPr>
                 </a:tc>
@@ -4966,7 +4966,7 @@
                   </a:txBody>
                   <a:tcPr anchor="ctr" marL="91440">
                     <a:solidFill>
-                      <a:srgbClr val="006D77"/>
+                      <a:srgbClr val="007BA4"/>
                     </a:solidFill>
                   </a:tcPr>
                 </a:tc>
@@ -4988,7 +4988,7 @@
                   </a:txBody>
                   <a:tcPr anchor="ctr" marL="91440">
                     <a:solidFill>
-                      <a:srgbClr val="006D77"/>
+                      <a:srgbClr val="007BA4"/>
                     </a:solidFill>
                   </a:tcPr>
                 </a:tc>
@@ -5010,7 +5010,7 @@
                   </a:txBody>
                   <a:tcPr anchor="ctr" marL="91440">
                     <a:solidFill>
-                      <a:srgbClr val="006D77"/>
+                      <a:srgbClr val="007BA4"/>
                     </a:solidFill>
                   </a:tcPr>
                 </a:tc>
@@ -5754,7 +5754,7 @@
             <a:avLst/>
           </a:prstGeom>
           <a:solidFill>
-            <a:srgbClr val="C8102E"/>
+            <a:srgbClr val="C41F3E"/>
           </a:solidFill>
           <a:ln>
             <a:noFill/>
@@ -5816,7 +5816,7 @@
             <a:r>
               <a:rPr sz="1050" b="1" i="0">
                 <a:solidFill>
-                  <a:srgbClr val="006D77"/>
+                  <a:srgbClr val="007BA4"/>
                 </a:solidFill>
                 <a:latin typeface="Segoe UI"/>
               </a:rPr>
@@ -6247,7 +6247,7 @@
             <a:avLst/>
           </a:prstGeom>
           <a:solidFill>
-            <a:srgbClr val="006D77"/>
+            <a:srgbClr val="005377"/>
           </a:solidFill>
           <a:ln>
             <a:noFill/>
@@ -6291,7 +6291,7 @@
             <a:avLst/>
           </a:prstGeom>
           <a:solidFill>
-            <a:srgbClr val="C8102E"/>
+            <a:srgbClr val="C41F3E"/>
           </a:solidFill>
           <a:ln>
             <a:noFill/>
@@ -6353,7 +6353,7 @@
             <a:r>
               <a:rPr sz="6400" b="1" i="0">
                 <a:solidFill>
-                  <a:srgbClr val="7FC4CB"/>
+                  <a:srgbClr val="A0D3E8"/>
                 </a:solidFill>
                 <a:latin typeface="Segoe UI"/>
               </a:rPr>
@@ -6437,7 +6437,7 @@
             <a:r>
               <a:rPr sz="1450" b="0" i="0">
                 <a:solidFill>
-                  <a:srgbClr val="D6ECEE"/>
+                  <a:srgbClr val="D3EDEE"/>
                 </a:solidFill>
                 <a:latin typeface="Segoe UI"/>
               </a:rPr>
@@ -6521,7 +6521,7 @@
             <a:avLst/>
           </a:prstGeom>
           <a:solidFill>
-            <a:srgbClr val="C8102E"/>
+            <a:srgbClr val="C41F3E"/>
           </a:solidFill>
           <a:ln>
             <a:noFill/>
@@ -6583,7 +6583,7 @@
             <a:r>
               <a:rPr sz="1050" b="1" i="0">
                 <a:solidFill>
-                  <a:srgbClr val="006D77"/>
+                  <a:srgbClr val="007BA4"/>
                 </a:solidFill>
                 <a:latin typeface="Segoe UI"/>
               </a:rPr>
@@ -6737,7 +6737,7 @@
                   </a:txBody>
                   <a:tcPr anchor="ctr" marL="91440">
                     <a:solidFill>
-                      <a:srgbClr val="006D77"/>
+                      <a:srgbClr val="007BA4"/>
                     </a:solidFill>
                   </a:tcPr>
                 </a:tc>
@@ -6759,7 +6759,7 @@
                   </a:txBody>
                   <a:tcPr anchor="ctr" marL="91440">
                     <a:solidFill>
-                      <a:srgbClr val="006D77"/>
+                      <a:srgbClr val="007BA4"/>
                     </a:solidFill>
                   </a:tcPr>
                 </a:tc>
@@ -6781,7 +6781,7 @@
                   </a:txBody>
                   <a:tcPr anchor="ctr" marL="91440">
                     <a:solidFill>
-                      <a:srgbClr val="006D77"/>
+                      <a:srgbClr val="007BA4"/>
                     </a:solidFill>
                   </a:tcPr>
                 </a:tc>
@@ -7257,7 +7257,7 @@
             <a:avLst/>
           </a:prstGeom>
           <a:solidFill>
-            <a:srgbClr val="006D77"/>
+            <a:srgbClr val="007BA4"/>
           </a:solidFill>
           <a:ln>
             <a:noFill/>
@@ -7403,7 +7403,7 @@
             <a:avLst/>
           </a:prstGeom>
           <a:solidFill>
-            <a:srgbClr val="C8102E"/>
+            <a:srgbClr val="C41F3E"/>
           </a:solidFill>
           <a:ln>
             <a:noFill/>
@@ -7465,7 +7465,7 @@
             <a:r>
               <a:rPr sz="1050" b="1" i="0">
                 <a:solidFill>
-                  <a:srgbClr val="006D77"/>
+                  <a:srgbClr val="007BA4"/>
                 </a:solidFill>
                 <a:latin typeface="Segoe UI"/>
               </a:rPr>
@@ -7558,7 +7558,7 @@
                   </a:txBody>
                   <a:tcPr anchor="ctr" marL="91440">
                     <a:solidFill>
-                      <a:srgbClr val="006D77"/>
+                      <a:srgbClr val="007BA4"/>
                     </a:solidFill>
                   </a:tcPr>
                 </a:tc>
@@ -7580,7 +7580,7 @@
                   </a:txBody>
                   <a:tcPr anchor="ctr" marL="91440">
                     <a:solidFill>
-                      <a:srgbClr val="006D77"/>
+                      <a:srgbClr val="007BA4"/>
                     </a:solidFill>
                   </a:tcPr>
                 </a:tc>
@@ -7602,7 +7602,7 @@
                   </a:txBody>
                   <a:tcPr anchor="ctr" marL="91440">
                     <a:solidFill>
-                      <a:srgbClr val="006D77"/>
+                      <a:srgbClr val="007BA4"/>
                     </a:solidFill>
                   </a:tcPr>
                 </a:tc>
@@ -8041,7 +8041,7 @@
             <a:avLst/>
           </a:prstGeom>
           <a:solidFill>
-            <a:srgbClr val="006D77"/>
+            <a:srgbClr val="007BA4"/>
           </a:solidFill>
           <a:ln>
             <a:noFill/>
@@ -8187,7 +8187,7 @@
             <a:avLst/>
           </a:prstGeom>
           <a:solidFill>
-            <a:srgbClr val="C8102E"/>
+            <a:srgbClr val="C41F3E"/>
           </a:solidFill>
           <a:ln>
             <a:noFill/>
@@ -8249,7 +8249,7 @@
             <a:r>
               <a:rPr sz="1050" b="1" i="0">
                 <a:solidFill>
-                  <a:srgbClr val="006D77"/>
+                  <a:srgbClr val="007BA4"/>
                 </a:solidFill>
                 <a:latin typeface="Segoe UI"/>
               </a:rPr>
@@ -8342,7 +8342,7 @@
                   </a:txBody>
                   <a:tcPr anchor="ctr" marL="91440">
                     <a:solidFill>
-                      <a:srgbClr val="006D77"/>
+                      <a:srgbClr val="007BA4"/>
                     </a:solidFill>
                   </a:tcPr>
                 </a:tc>
@@ -8364,7 +8364,7 @@
                   </a:txBody>
                   <a:tcPr anchor="ctr" marL="91440">
                     <a:solidFill>
-                      <a:srgbClr val="006D77"/>
+                      <a:srgbClr val="007BA4"/>
                     </a:solidFill>
                   </a:tcPr>
                 </a:tc>
@@ -8386,7 +8386,7 @@
                   </a:txBody>
                   <a:tcPr anchor="ctr" marL="91440">
                     <a:solidFill>
-                      <a:srgbClr val="006D77"/>
+                      <a:srgbClr val="007BA4"/>
                     </a:solidFill>
                   </a:tcPr>
                 </a:tc>
@@ -9066,7 +9066,7 @@
             <a:avLst/>
           </a:prstGeom>
           <a:solidFill>
-            <a:srgbClr val="006D77"/>
+            <a:srgbClr val="007BA4"/>
           </a:solidFill>
           <a:ln>
             <a:noFill/>
@@ -9212,7 +9212,7 @@
             <a:avLst/>
           </a:prstGeom>
           <a:solidFill>
-            <a:srgbClr val="006D77"/>
+            <a:srgbClr val="005377"/>
           </a:solidFill>
           <a:ln>
             <a:noFill/>
@@ -9256,7 +9256,7 @@
             <a:avLst/>
           </a:prstGeom>
           <a:solidFill>
-            <a:srgbClr val="C8102E"/>
+            <a:srgbClr val="C41F3E"/>
           </a:solidFill>
           <a:ln>
             <a:noFill/>
@@ -9318,7 +9318,7 @@
             <a:r>
               <a:rPr sz="6400" b="1" i="0">
                 <a:solidFill>
-                  <a:srgbClr val="7FC4CB"/>
+                  <a:srgbClr val="A0D3E8"/>
                 </a:solidFill>
                 <a:latin typeface="Segoe UI"/>
               </a:rPr>
@@ -9402,7 +9402,7 @@
             <a:r>
               <a:rPr sz="1450" b="0" i="0">
                 <a:solidFill>
-                  <a:srgbClr val="D6ECEE"/>
+                  <a:srgbClr val="D3EDEE"/>
                 </a:solidFill>
                 <a:latin typeface="Segoe UI"/>
               </a:rPr>
@@ -9486,7 +9486,7 @@
             <a:avLst/>
           </a:prstGeom>
           <a:solidFill>
-            <a:srgbClr val="C8102E"/>
+            <a:srgbClr val="C41F3E"/>
           </a:solidFill>
           <a:ln>
             <a:noFill/>
@@ -9548,7 +9548,7 @@
             <a:r>
               <a:rPr sz="1050" b="1" i="0">
                 <a:solidFill>
-                  <a:srgbClr val="006D77"/>
+                  <a:srgbClr val="007BA4"/>
                 </a:solidFill>
                 <a:latin typeface="Segoe UI"/>
               </a:rPr>
@@ -9703,7 +9703,7 @@
                   </a:txBody>
                   <a:tcPr anchor="ctr" marL="91440">
                     <a:solidFill>
-                      <a:srgbClr val="006D77"/>
+                      <a:srgbClr val="007BA4"/>
                     </a:solidFill>
                   </a:tcPr>
                 </a:tc>
@@ -9725,7 +9725,7 @@
                   </a:txBody>
                   <a:tcPr anchor="ctr" marL="91440">
                     <a:solidFill>
-                      <a:srgbClr val="006D77"/>
+                      <a:srgbClr val="007BA4"/>
                     </a:solidFill>
                   </a:tcPr>
                 </a:tc>
@@ -9747,7 +9747,7 @@
                   </a:txBody>
                   <a:tcPr anchor="ctr" marL="91440">
                     <a:solidFill>
-                      <a:srgbClr val="006D77"/>
+                      <a:srgbClr val="007BA4"/>
                     </a:solidFill>
                   </a:tcPr>
                 </a:tc>
@@ -9769,7 +9769,7 @@
                   </a:txBody>
                   <a:tcPr anchor="ctr" marL="91440">
                     <a:solidFill>
-                      <a:srgbClr val="006D77"/>
+                      <a:srgbClr val="007BA4"/>
                     </a:solidFill>
                   </a:tcPr>
                 </a:tc>
@@ -10197,7 +10197,7 @@
             <a:avLst/>
           </a:prstGeom>
           <a:solidFill>
-            <a:srgbClr val="006D77"/>
+            <a:srgbClr val="007BA4"/>
           </a:solidFill>
           <a:ln>
             <a:noFill/>
@@ -10343,7 +10343,7 @@
             <a:avLst/>
           </a:prstGeom>
           <a:solidFill>
-            <a:srgbClr val="C8102E"/>
+            <a:srgbClr val="C41F3E"/>
           </a:solidFill>
           <a:ln>
             <a:noFill/>
@@ -10405,7 +10405,7 @@
             <a:r>
               <a:rPr sz="1050" b="1" i="0">
                 <a:solidFill>
-                  <a:srgbClr val="006D77"/>
+                  <a:srgbClr val="007BA4"/>
                 </a:solidFill>
                 <a:latin typeface="Segoe UI"/>
               </a:rPr>
@@ -10540,7 +10540,7 @@
                   </a:txBody>
                   <a:tcPr anchor="ctr" marL="91440">
                     <a:solidFill>
-                      <a:srgbClr val="006D77"/>
+                      <a:srgbClr val="007BA4"/>
                     </a:solidFill>
                   </a:tcPr>
                 </a:tc>
@@ -10562,7 +10562,7 @@
                   </a:txBody>
                   <a:tcPr anchor="ctr" marL="91440">
                     <a:solidFill>
-                      <a:srgbClr val="006D77"/>
+                      <a:srgbClr val="007BA4"/>
                     </a:solidFill>
                   </a:tcPr>
                 </a:tc>
@@ -10584,7 +10584,7 @@
                   </a:txBody>
                   <a:tcPr anchor="ctr" marL="91440">
                     <a:solidFill>
-                      <a:srgbClr val="006D77"/>
+                      <a:srgbClr val="007BA4"/>
                     </a:solidFill>
                   </a:tcPr>
                 </a:tc>
@@ -11139,7 +11139,7 @@
             <a:avLst/>
           </a:prstGeom>
           <a:solidFill>
-            <a:srgbClr val="C8102E"/>
+            <a:srgbClr val="C41F3E"/>
           </a:solidFill>
           <a:ln>
             <a:noFill/>
@@ -11201,7 +11201,7 @@
             <a:r>
               <a:rPr sz="1050" b="1" i="0">
                 <a:solidFill>
-                  <a:srgbClr val="006D77"/>
+                  <a:srgbClr val="007BA4"/>
                 </a:solidFill>
                 <a:latin typeface="Segoe UI"/>
               </a:rPr>
@@ -11295,7 +11295,7 @@
                   </a:txBody>
                   <a:tcPr anchor="ctr" marL="91440">
                     <a:solidFill>
-                      <a:srgbClr val="006D77"/>
+                      <a:srgbClr val="007BA4"/>
                     </a:solidFill>
                   </a:tcPr>
                 </a:tc>
@@ -11317,7 +11317,7 @@
                   </a:txBody>
                   <a:tcPr anchor="ctr" marL="91440">
                     <a:solidFill>
-                      <a:srgbClr val="006D77"/>
+                      <a:srgbClr val="007BA4"/>
                     </a:solidFill>
                   </a:tcPr>
                 </a:tc>
@@ -11339,7 +11339,7 @@
                   </a:txBody>
                   <a:tcPr anchor="ctr" marL="91440">
                     <a:solidFill>
-                      <a:srgbClr val="006D77"/>
+                      <a:srgbClr val="007BA4"/>
                     </a:solidFill>
                   </a:tcPr>
                 </a:tc>
@@ -11361,7 +11361,7 @@
                   </a:txBody>
                   <a:tcPr anchor="ctr" marL="91440">
                     <a:solidFill>
-                      <a:srgbClr val="006D77"/>
+                      <a:srgbClr val="007BA4"/>
                     </a:solidFill>
                   </a:tcPr>
                 </a:tc>
@@ -12329,7 +12329,7 @@
             <a:avLst/>
           </a:prstGeom>
           <a:solidFill>
-            <a:srgbClr val="006D77"/>
+            <a:srgbClr val="007BA4"/>
           </a:solidFill>
           <a:ln>
             <a:noFill/>
@@ -12475,7 +12475,7 @@
             <a:avLst/>
           </a:prstGeom>
           <a:solidFill>
-            <a:srgbClr val="C8102E"/>
+            <a:srgbClr val="C41F3E"/>
           </a:solidFill>
           <a:ln>
             <a:noFill/>
@@ -12860,7 +12860,7 @@
             <a:avLst/>
           </a:prstGeom>
           <a:solidFill>
-            <a:srgbClr val="006D77"/>
+            <a:srgbClr val="007BA4"/>
           </a:solidFill>
           <a:ln>
             <a:noFill/>
@@ -13006,7 +13006,7 @@
             <a:avLst/>
           </a:prstGeom>
           <a:solidFill>
-            <a:srgbClr val="C8102E"/>
+            <a:srgbClr val="C41F3E"/>
           </a:solidFill>
           <a:ln>
             <a:noFill/>
@@ -13068,7 +13068,7 @@
             <a:r>
               <a:rPr sz="1050" b="1" i="0">
                 <a:solidFill>
-                  <a:srgbClr val="006D77"/>
+                  <a:srgbClr val="007BA4"/>
                 </a:solidFill>
                 <a:latin typeface="Segoe UI"/>
               </a:rPr>
@@ -13161,7 +13161,7 @@
                   </a:txBody>
                   <a:tcPr anchor="ctr" marL="91440">
                     <a:solidFill>
-                      <a:srgbClr val="006D77"/>
+                      <a:srgbClr val="007BA4"/>
                     </a:solidFill>
                   </a:tcPr>
                 </a:tc>
@@ -13183,7 +13183,7 @@
                   </a:txBody>
                   <a:tcPr anchor="ctr" marL="91440">
                     <a:solidFill>
-                      <a:srgbClr val="006D77"/>
+                      <a:srgbClr val="007BA4"/>
                     </a:solidFill>
                   </a:tcPr>
                 </a:tc>
@@ -13205,7 +13205,7 @@
                   </a:txBody>
                   <a:tcPr anchor="ctr" marL="91440">
                     <a:solidFill>
-                      <a:srgbClr val="006D77"/>
+                      <a:srgbClr val="007BA4"/>
                     </a:solidFill>
                   </a:tcPr>
                 </a:tc>
@@ -14235,7 +14235,7 @@
             <a:avLst/>
           </a:prstGeom>
           <a:solidFill>
-            <a:srgbClr val="006D77"/>
+            <a:srgbClr val="005377"/>
           </a:solidFill>
           <a:ln>
             <a:noFill/>
@@ -14279,7 +14279,7 @@
             <a:avLst/>
           </a:prstGeom>
           <a:solidFill>
-            <a:srgbClr val="C8102E"/>
+            <a:srgbClr val="C41F3E"/>
           </a:solidFill>
           <a:ln>
             <a:noFill/>
@@ -14341,7 +14341,7 @@
             <a:r>
               <a:rPr sz="6400" b="1" i="0">
                 <a:solidFill>
-                  <a:srgbClr val="7FC4CB"/>
+                  <a:srgbClr val="A0D3E8"/>
                 </a:solidFill>
                 <a:latin typeface="Segoe UI"/>
               </a:rPr>
@@ -14425,7 +14425,7 @@
             <a:r>
               <a:rPr sz="1450" b="0" i="0">
                 <a:solidFill>
-                  <a:srgbClr val="D6ECEE"/>
+                  <a:srgbClr val="D3EDEE"/>
                 </a:solidFill>
                 <a:latin typeface="Segoe UI"/>
               </a:rPr>
@@ -14509,7 +14509,7 @@
             <a:avLst/>
           </a:prstGeom>
           <a:solidFill>
-            <a:srgbClr val="C8102E"/>
+            <a:srgbClr val="C41F3E"/>
           </a:solidFill>
           <a:ln>
             <a:noFill/>
@@ -14571,7 +14571,7 @@
             <a:r>
               <a:rPr sz="1050" b="1" i="0">
                 <a:solidFill>
-                  <a:srgbClr val="006D77"/>
+                  <a:srgbClr val="007BA4"/>
                 </a:solidFill>
                 <a:latin typeface="Segoe UI"/>
               </a:rPr>
@@ -15295,7 +15295,7 @@
             <a:avLst/>
           </a:prstGeom>
           <a:solidFill>
-            <a:srgbClr val="C8102E"/>
+            <a:srgbClr val="C41F3E"/>
           </a:solidFill>
           <a:ln>
             <a:noFill/>
@@ -15357,7 +15357,7 @@
             <a:r>
               <a:rPr sz="1050" b="1" i="0">
                 <a:solidFill>
-                  <a:srgbClr val="006D77"/>
+                  <a:srgbClr val="007BA4"/>
                 </a:solidFill>
                 <a:latin typeface="Segoe UI"/>
               </a:rPr>
@@ -15450,7 +15450,7 @@
                   </a:txBody>
                   <a:tcPr anchor="ctr" marL="91440">
                     <a:solidFill>
-                      <a:srgbClr val="006D77"/>
+                      <a:srgbClr val="007BA4"/>
                     </a:solidFill>
                   </a:tcPr>
                 </a:tc>
@@ -15472,7 +15472,7 @@
                   </a:txBody>
                   <a:tcPr anchor="ctr" marL="91440">
                     <a:solidFill>
-                      <a:srgbClr val="006D77"/>
+                      <a:srgbClr val="007BA4"/>
                     </a:solidFill>
                   </a:tcPr>
                 </a:tc>
@@ -15494,7 +15494,7 @@
                   </a:txBody>
                   <a:tcPr anchor="ctr" marL="91440">
                     <a:solidFill>
-                      <a:srgbClr val="006D77"/>
+                      <a:srgbClr val="007BA4"/>
                     </a:solidFill>
                   </a:tcPr>
                 </a:tc>
@@ -16116,7 +16116,7 @@
             <a:avLst/>
           </a:prstGeom>
           <a:solidFill>
-            <a:srgbClr val="006D77"/>
+            <a:srgbClr val="005377"/>
           </a:solidFill>
           <a:ln>
             <a:noFill/>
@@ -16160,7 +16160,7 @@
             <a:avLst/>
           </a:prstGeom>
           <a:solidFill>
-            <a:srgbClr val="C8102E"/>
+            <a:srgbClr val="C41F3E"/>
           </a:solidFill>
           <a:ln>
             <a:noFill/>
@@ -16222,7 +16222,7 @@
             <a:r>
               <a:rPr sz="6400" b="1" i="0">
                 <a:solidFill>
-                  <a:srgbClr val="7FC4CB"/>
+                  <a:srgbClr val="A0D3E8"/>
                 </a:solidFill>
                 <a:latin typeface="Segoe UI"/>
               </a:rPr>
@@ -16306,7 +16306,7 @@
             <a:r>
               <a:rPr sz="1450" b="0" i="0">
                 <a:solidFill>
-                  <a:srgbClr val="D6ECEE"/>
+                  <a:srgbClr val="D3EDEE"/>
                 </a:solidFill>
                 <a:latin typeface="Segoe UI"/>
               </a:rPr>
@@ -16390,7 +16390,7 @@
             <a:avLst/>
           </a:prstGeom>
           <a:solidFill>
-            <a:srgbClr val="C8102E"/>
+            <a:srgbClr val="C41F3E"/>
           </a:solidFill>
           <a:ln>
             <a:noFill/>
@@ -16452,7 +16452,7 @@
             <a:r>
               <a:rPr sz="1050" b="1" i="0">
                 <a:solidFill>
-                  <a:srgbClr val="006D77"/>
+                  <a:srgbClr val="007BA4"/>
                 </a:solidFill>
                 <a:latin typeface="Segoe UI"/>
               </a:rPr>
@@ -16545,7 +16545,7 @@
                   </a:txBody>
                   <a:tcPr anchor="ctr" marL="91440">
                     <a:solidFill>
-                      <a:srgbClr val="006D77"/>
+                      <a:srgbClr val="007BA4"/>
                     </a:solidFill>
                   </a:tcPr>
                 </a:tc>
@@ -16567,7 +16567,7 @@
                   </a:txBody>
                   <a:tcPr anchor="ctr" marL="91440">
                     <a:solidFill>
-                      <a:srgbClr val="006D77"/>
+                      <a:srgbClr val="007BA4"/>
                     </a:solidFill>
                   </a:tcPr>
                 </a:tc>
@@ -16589,7 +16589,7 @@
                   </a:txBody>
                   <a:tcPr anchor="ctr" marL="91440">
                     <a:solidFill>
-                      <a:srgbClr val="006D77"/>
+                      <a:srgbClr val="007BA4"/>
                     </a:solidFill>
                   </a:tcPr>
                 </a:tc>
@@ -17201,7 +17201,7 @@
             <a:avLst/>
           </a:prstGeom>
           <a:solidFill>
-            <a:srgbClr val="006D77"/>
+            <a:srgbClr val="007BA4"/>
           </a:solidFill>
           <a:ln>
             <a:noFill/>
@@ -17347,7 +17347,7 @@
             <a:avLst/>
           </a:prstGeom>
           <a:solidFill>
-            <a:srgbClr val="C8102E"/>
+            <a:srgbClr val="C41F3E"/>
           </a:solidFill>
           <a:ln>
             <a:noFill/>
@@ -17409,7 +17409,7 @@
             <a:r>
               <a:rPr sz="1050" b="1" i="0">
                 <a:solidFill>
-                  <a:srgbClr val="006D77"/>
+                  <a:srgbClr val="007BA4"/>
                 </a:solidFill>
                 <a:latin typeface="Segoe UI"/>
               </a:rPr>
@@ -17502,7 +17502,7 @@
                   </a:txBody>
                   <a:tcPr anchor="ctr" marL="91440">
                     <a:solidFill>
-                      <a:srgbClr val="006D77"/>
+                      <a:srgbClr val="007BA4"/>
                     </a:solidFill>
                   </a:tcPr>
                 </a:tc>
@@ -17524,7 +17524,7 @@
                   </a:txBody>
                   <a:tcPr anchor="ctr" marL="91440">
                     <a:solidFill>
-                      <a:srgbClr val="006D77"/>
+                      <a:srgbClr val="007BA4"/>
                     </a:solidFill>
                   </a:tcPr>
                 </a:tc>
@@ -17546,7 +17546,7 @@
                   </a:txBody>
                   <a:tcPr anchor="ctr" marL="91440">
                     <a:solidFill>
-                      <a:srgbClr val="006D77"/>
+                      <a:srgbClr val="007BA4"/>
                     </a:solidFill>
                   </a:tcPr>
                 </a:tc>
@@ -18158,7 +18158,7 @@
             <a:avLst/>
           </a:prstGeom>
           <a:solidFill>
-            <a:srgbClr val="006D77"/>
+            <a:srgbClr val="007BA4"/>
           </a:solidFill>
           <a:ln>
             <a:noFill/>
@@ -18304,7 +18304,7 @@
             <a:avLst/>
           </a:prstGeom>
           <a:solidFill>
-            <a:srgbClr val="006D77"/>
+            <a:srgbClr val="005377"/>
           </a:solidFill>
           <a:ln>
             <a:noFill/>
@@ -18348,7 +18348,7 @@
             <a:avLst/>
           </a:prstGeom>
           <a:solidFill>
-            <a:srgbClr val="C8102E"/>
+            <a:srgbClr val="C41F3E"/>
           </a:solidFill>
           <a:ln>
             <a:noFill/>
@@ -18410,7 +18410,7 @@
             <a:r>
               <a:rPr sz="6400" b="1" i="0">
                 <a:solidFill>
-                  <a:srgbClr val="7FC4CB"/>
+                  <a:srgbClr val="A0D3E8"/>
                 </a:solidFill>
                 <a:latin typeface="Segoe UI"/>
               </a:rPr>
@@ -18494,7 +18494,7 @@
             <a:r>
               <a:rPr sz="1450" b="0" i="0">
                 <a:solidFill>
-                  <a:srgbClr val="D6ECEE"/>
+                  <a:srgbClr val="D3EDEE"/>
                 </a:solidFill>
                 <a:latin typeface="Segoe UI"/>
               </a:rPr>
@@ -18578,7 +18578,7 @@
             <a:avLst/>
           </a:prstGeom>
           <a:solidFill>
-            <a:srgbClr val="C8102E"/>
+            <a:srgbClr val="C41F3E"/>
           </a:solidFill>
           <a:ln>
             <a:noFill/>
@@ -18640,7 +18640,7 @@
             <a:r>
               <a:rPr sz="1050" b="1" i="0">
                 <a:solidFill>
-                  <a:srgbClr val="006D77"/>
+                  <a:srgbClr val="007BA4"/>
                 </a:solidFill>
                 <a:latin typeface="Segoe UI"/>
               </a:rPr>
@@ -18733,7 +18733,7 @@
                   </a:txBody>
                   <a:tcPr anchor="ctr" marL="91440">
                     <a:solidFill>
-                      <a:srgbClr val="006D77"/>
+                      <a:srgbClr val="007BA4"/>
                     </a:solidFill>
                   </a:tcPr>
                 </a:tc>
@@ -18755,7 +18755,7 @@
                   </a:txBody>
                   <a:tcPr anchor="ctr" marL="91440">
                     <a:solidFill>
-                      <a:srgbClr val="006D77"/>
+                      <a:srgbClr val="007BA4"/>
                     </a:solidFill>
                   </a:tcPr>
                 </a:tc>
@@ -18777,7 +18777,7 @@
                   </a:txBody>
                   <a:tcPr anchor="ctr" marL="91440">
                     <a:solidFill>
-                      <a:srgbClr val="006D77"/>
+                      <a:srgbClr val="007BA4"/>
                     </a:solidFill>
                   </a:tcPr>
                 </a:tc>
@@ -19634,7 +19634,7 @@
             <a:avLst/>
           </a:prstGeom>
           <a:solidFill>
-            <a:srgbClr val="C8102E"/>
+            <a:srgbClr val="C41F3E"/>
           </a:solidFill>
           <a:ln>
             <a:noFill/>
@@ -19696,7 +19696,7 @@
             <a:r>
               <a:rPr sz="1050" b="1" i="0">
                 <a:solidFill>
-                  <a:srgbClr val="006D77"/>
+                  <a:srgbClr val="007BA4"/>
                 </a:solidFill>
                 <a:latin typeface="Segoe UI"/>
               </a:rPr>
@@ -19806,7 +19806,7 @@
             <a:avLst/>
           </a:prstGeom>
           <a:solidFill>
-            <a:srgbClr val="006D77"/>
+            <a:srgbClr val="007BA4"/>
           </a:solidFill>
           <a:ln>
             <a:noFill/>
@@ -19868,7 +19868,7 @@
             <a:r>
               <a:rPr sz="3000" b="1" i="0">
                 <a:solidFill>
-                  <a:srgbClr val="006D77"/>
+                  <a:srgbClr val="007BA4"/>
                 </a:solidFill>
                 <a:latin typeface="Segoe UI"/>
               </a:rPr>
@@ -19979,7 +19979,7 @@
             <a:avLst/>
           </a:prstGeom>
           <a:solidFill>
-            <a:srgbClr val="006D77"/>
+            <a:srgbClr val="007BA4"/>
           </a:solidFill>
           <a:ln>
             <a:noFill/>
@@ -20041,7 +20041,7 @@
             <a:r>
               <a:rPr sz="3000" b="1" i="0">
                 <a:solidFill>
-                  <a:srgbClr val="006D77"/>
+                  <a:srgbClr val="007BA4"/>
                 </a:solidFill>
                 <a:latin typeface="Segoe UI"/>
               </a:rPr>
@@ -20152,7 +20152,7 @@
             <a:avLst/>
           </a:prstGeom>
           <a:solidFill>
-            <a:srgbClr val="006D77"/>
+            <a:srgbClr val="007BA4"/>
           </a:solidFill>
           <a:ln>
             <a:noFill/>
@@ -20214,7 +20214,7 @@
             <a:r>
               <a:rPr sz="3000" b="1" i="0">
                 <a:solidFill>
-                  <a:srgbClr val="006D77"/>
+                  <a:srgbClr val="007BA4"/>
                 </a:solidFill>
                 <a:latin typeface="Segoe UI"/>
               </a:rPr>
@@ -20325,7 +20325,7 @@
             <a:avLst/>
           </a:prstGeom>
           <a:solidFill>
-            <a:srgbClr val="006D77"/>
+            <a:srgbClr val="007BA4"/>
           </a:solidFill>
           <a:ln>
             <a:noFill/>
@@ -20387,7 +20387,7 @@
             <a:r>
               <a:rPr sz="3000" b="1" i="0">
                 <a:solidFill>
-                  <a:srgbClr val="006D77"/>
+                  <a:srgbClr val="007BA4"/>
                 </a:solidFill>
                 <a:latin typeface="Segoe UI"/>
               </a:rPr>
@@ -20498,7 +20498,7 @@
             <a:avLst/>
           </a:prstGeom>
           <a:solidFill>
-            <a:srgbClr val="006D77"/>
+            <a:srgbClr val="007BA4"/>
           </a:solidFill>
           <a:ln>
             <a:noFill/>
@@ -20560,7 +20560,7 @@
             <a:r>
               <a:rPr sz="3000" b="1" i="0">
                 <a:solidFill>
-                  <a:srgbClr val="006D77"/>
+                  <a:srgbClr val="007BA4"/>
                 </a:solidFill>
                 <a:latin typeface="Segoe UI"/>
               </a:rPr>
@@ -20654,7 +20654,7 @@
                   </a:txBody>
                   <a:tcPr anchor="ctr" marL="91440">
                     <a:solidFill>
-                      <a:srgbClr val="006D77"/>
+                      <a:srgbClr val="007BA4"/>
                     </a:solidFill>
                   </a:tcPr>
                 </a:tc>
@@ -20676,7 +20676,7 @@
                   </a:txBody>
                   <a:tcPr anchor="ctr" marL="91440">
                     <a:solidFill>
-                      <a:srgbClr val="006D77"/>
+                      <a:srgbClr val="007BA4"/>
                     </a:solidFill>
                   </a:tcPr>
                 </a:tc>
@@ -20698,7 +20698,7 @@
                   </a:txBody>
                   <a:tcPr anchor="ctr" marL="91440">
                     <a:solidFill>
-                      <a:srgbClr val="006D77"/>
+                      <a:srgbClr val="007BA4"/>
                     </a:solidFill>
                   </a:tcPr>
                 </a:tc>
@@ -21252,7 +21252,7 @@
             <a:avLst/>
           </a:prstGeom>
           <a:solidFill>
-            <a:srgbClr val="006D77"/>
+            <a:srgbClr val="005377"/>
           </a:solidFill>
           <a:ln>
             <a:noFill/>
@@ -21296,7 +21296,7 @@
             <a:avLst/>
           </a:prstGeom>
           <a:solidFill>
-            <a:srgbClr val="C8102E"/>
+            <a:srgbClr val="C41F3E"/>
           </a:solidFill>
           <a:ln>
             <a:noFill/>
@@ -21358,7 +21358,7 @@
             <a:r>
               <a:rPr sz="6400" b="1" i="0">
                 <a:solidFill>
-                  <a:srgbClr val="7FC4CB"/>
+                  <a:srgbClr val="A0D3E8"/>
                 </a:solidFill>
                 <a:latin typeface="Segoe UI"/>
               </a:rPr>
@@ -21442,7 +21442,7 @@
             <a:r>
               <a:rPr sz="1450" b="0" i="0">
                 <a:solidFill>
-                  <a:srgbClr val="D6ECEE"/>
+                  <a:srgbClr val="D3EDEE"/>
                 </a:solidFill>
                 <a:latin typeface="Segoe UI"/>
               </a:rPr>
@@ -21526,7 +21526,7 @@
             <a:avLst/>
           </a:prstGeom>
           <a:solidFill>
-            <a:srgbClr val="C8102E"/>
+            <a:srgbClr val="C41F3E"/>
           </a:solidFill>
           <a:ln>
             <a:noFill/>
@@ -21588,7 +21588,7 @@
             <a:r>
               <a:rPr sz="1050" b="1" i="0">
                 <a:solidFill>
-                  <a:srgbClr val="006D77"/>
+                  <a:srgbClr val="007BA4"/>
                 </a:solidFill>
                 <a:latin typeface="Segoe UI"/>
               </a:rPr>
@@ -22019,7 +22019,7 @@
             <a:avLst/>
           </a:prstGeom>
           <a:solidFill>
-            <a:srgbClr val="C8102E"/>
+            <a:srgbClr val="C41F3E"/>
           </a:solidFill>
           <a:ln>
             <a:noFill/>
@@ -22081,7 +22081,7 @@
             <a:r>
               <a:rPr sz="1050" b="1" i="0">
                 <a:solidFill>
-                  <a:srgbClr val="006D77"/>
+                  <a:srgbClr val="007BA4"/>
                 </a:solidFill>
                 <a:latin typeface="Segoe UI"/>
               </a:rPr>
@@ -22191,7 +22191,7 @@
             <a:avLst/>
           </a:prstGeom>
           <a:solidFill>
-            <a:srgbClr val="006D77"/>
+            <a:srgbClr val="007BA4"/>
           </a:solidFill>
           <a:ln>
             <a:noFill/>
@@ -22253,7 +22253,7 @@
             <a:r>
               <a:rPr sz="3000" b="1" i="0">
                 <a:solidFill>
-                  <a:srgbClr val="006D77"/>
+                  <a:srgbClr val="007BA4"/>
                 </a:solidFill>
                 <a:latin typeface="Segoe UI"/>
               </a:rPr>
@@ -22364,7 +22364,7 @@
             <a:avLst/>
           </a:prstGeom>
           <a:solidFill>
-            <a:srgbClr val="006D77"/>
+            <a:srgbClr val="007BA4"/>
           </a:solidFill>
           <a:ln>
             <a:noFill/>
@@ -22426,7 +22426,7 @@
             <a:r>
               <a:rPr sz="3000" b="1" i="0">
                 <a:solidFill>
-                  <a:srgbClr val="006D77"/>
+                  <a:srgbClr val="007BA4"/>
                 </a:solidFill>
                 <a:latin typeface="Segoe UI"/>
               </a:rPr>
@@ -22537,7 +22537,7 @@
             <a:avLst/>
           </a:prstGeom>
           <a:solidFill>
-            <a:srgbClr val="006D77"/>
+            <a:srgbClr val="007BA4"/>
           </a:solidFill>
           <a:ln>
             <a:noFill/>
@@ -22599,7 +22599,7 @@
             <a:r>
               <a:rPr sz="3000" b="1" i="0">
                 <a:solidFill>
-                  <a:srgbClr val="006D77"/>
+                  <a:srgbClr val="007BA4"/>
                 </a:solidFill>
                 <a:latin typeface="Segoe UI"/>
               </a:rPr>
@@ -22710,7 +22710,7 @@
             <a:avLst/>
           </a:prstGeom>
           <a:solidFill>
-            <a:srgbClr val="006D77"/>
+            <a:srgbClr val="007BA4"/>
           </a:solidFill>
           <a:ln>
             <a:noFill/>
@@ -22772,7 +22772,7 @@
             <a:r>
               <a:rPr sz="3000" b="1" i="0">
                 <a:solidFill>
-                  <a:srgbClr val="006D77"/>
+                  <a:srgbClr val="007BA4"/>
                 </a:solidFill>
                 <a:latin typeface="Segoe UI"/>
               </a:rPr>
@@ -22866,7 +22866,7 @@
                   </a:txBody>
                   <a:tcPr anchor="ctr" marL="91440">
                     <a:solidFill>
-                      <a:srgbClr val="006D77"/>
+                      <a:srgbClr val="007BA4"/>
                     </a:solidFill>
                   </a:tcPr>
                 </a:tc>
@@ -22888,7 +22888,7 @@
                   </a:txBody>
                   <a:tcPr anchor="ctr" marL="91440">
                     <a:solidFill>
-                      <a:srgbClr val="006D77"/>
+                      <a:srgbClr val="007BA4"/>
                     </a:solidFill>
                   </a:tcPr>
                 </a:tc>
@@ -22910,7 +22910,7 @@
                   </a:txBody>
                   <a:tcPr anchor="ctr" marL="91440">
                     <a:solidFill>
-                      <a:srgbClr val="006D77"/>
+                      <a:srgbClr val="007BA4"/>
                     </a:solidFill>
                   </a:tcPr>
                 </a:tc>
@@ -23658,7 +23658,7 @@
             <a:avLst/>
           </a:prstGeom>
           <a:solidFill>
-            <a:srgbClr val="006D77"/>
+            <a:srgbClr val="007BA4"/>
           </a:solidFill>
           <a:ln>
             <a:noFill/>
@@ -23804,7 +23804,7 @@
             <a:avLst/>
           </a:prstGeom>
           <a:solidFill>
-            <a:srgbClr val="C8102E"/>
+            <a:srgbClr val="C41F3E"/>
           </a:solidFill>
           <a:ln>
             <a:noFill/>
@@ -23866,7 +23866,7 @@
             <a:r>
               <a:rPr sz="1050" b="1" i="0">
                 <a:solidFill>
-                  <a:srgbClr val="006D77"/>
+                  <a:srgbClr val="007BA4"/>
                 </a:solidFill>
                 <a:latin typeface="Segoe UI"/>
               </a:rPr>
@@ -24019,7 +24019,7 @@
                   </a:txBody>
                   <a:tcPr anchor="ctr" marL="91440">
                     <a:solidFill>
-                      <a:srgbClr val="006D77"/>
+                      <a:srgbClr val="007BA4"/>
                     </a:solidFill>
                   </a:tcPr>
                 </a:tc>
@@ -24041,7 +24041,7 @@
                   </a:txBody>
                   <a:tcPr anchor="ctr" marL="91440">
                     <a:solidFill>
-                      <a:srgbClr val="006D77"/>
+                      <a:srgbClr val="007BA4"/>
                     </a:solidFill>
                   </a:tcPr>
                 </a:tc>
@@ -24485,7 +24485,7 @@
             <a:avLst/>
           </a:prstGeom>
           <a:solidFill>
-            <a:srgbClr val="C8102E"/>
+            <a:srgbClr val="C41F3E"/>
           </a:solidFill>
           <a:ln>
             <a:noFill/>
@@ -24547,7 +24547,7 @@
             <a:r>
               <a:rPr sz="1050" b="1" i="0">
                 <a:solidFill>
-                  <a:srgbClr val="006D77"/>
+                  <a:srgbClr val="007BA4"/>
                 </a:solidFill>
                 <a:latin typeface="Segoe UI"/>
               </a:rPr>
@@ -24700,7 +24700,7 @@
                   </a:txBody>
                   <a:tcPr anchor="ctr" marL="91440">
                     <a:solidFill>
-                      <a:srgbClr val="006D77"/>
+                      <a:srgbClr val="007BA4"/>
                     </a:solidFill>
                   </a:tcPr>
                 </a:tc>
@@ -24722,7 +24722,7 @@
                   </a:txBody>
                   <a:tcPr anchor="ctr" marL="91440">
                     <a:solidFill>
-                      <a:srgbClr val="006D77"/>
+                      <a:srgbClr val="007BA4"/>
                     </a:solidFill>
                   </a:tcPr>
                 </a:tc>
@@ -25120,7 +25120,7 @@
             <a:avLst/>
           </a:prstGeom>
           <a:solidFill>
-            <a:srgbClr val="C8102E"/>
+            <a:srgbClr val="C41F3E"/>
           </a:solidFill>
           <a:ln>
             <a:noFill/>
@@ -25182,7 +25182,7 @@
             <a:r>
               <a:rPr sz="1050" b="1" i="0">
                 <a:solidFill>
-                  <a:srgbClr val="006D77"/>
+                  <a:srgbClr val="007BA4"/>
                 </a:solidFill>
                 <a:latin typeface="Segoe UI"/>
               </a:rPr>
@@ -25275,7 +25275,7 @@
                   </a:txBody>
                   <a:tcPr anchor="ctr" marL="91440">
                     <a:solidFill>
-                      <a:srgbClr val="006D77"/>
+                      <a:srgbClr val="007BA4"/>
                     </a:solidFill>
                   </a:tcPr>
                 </a:tc>
@@ -25297,7 +25297,7 @@
                   </a:txBody>
                   <a:tcPr anchor="ctr" marL="91440">
                     <a:solidFill>
-                      <a:srgbClr val="006D77"/>
+                      <a:srgbClr val="007BA4"/>
                     </a:solidFill>
                   </a:tcPr>
                 </a:tc>
@@ -25319,7 +25319,7 @@
                   </a:txBody>
                   <a:tcPr anchor="ctr" marL="91440">
                     <a:solidFill>
-                      <a:srgbClr val="006D77"/>
+                      <a:srgbClr val="007BA4"/>
                     </a:solidFill>
                   </a:tcPr>
                 </a:tc>
@@ -26077,7 +26077,7 @@
             <a:avLst/>
           </a:prstGeom>
           <a:solidFill>
-            <a:srgbClr val="006D77"/>
+            <a:srgbClr val="005377"/>
           </a:solidFill>
           <a:ln>
             <a:noFill/>
@@ -26121,7 +26121,7 @@
             <a:avLst/>
           </a:prstGeom>
           <a:solidFill>
-            <a:srgbClr val="C8102E"/>
+            <a:srgbClr val="C41F3E"/>
           </a:solidFill>
           <a:ln>
             <a:noFill/>
@@ -26183,7 +26183,7 @@
             <a:r>
               <a:rPr sz="6400" b="1" i="0">
                 <a:solidFill>
-                  <a:srgbClr val="7FC4CB"/>
+                  <a:srgbClr val="A0D3E8"/>
                 </a:solidFill>
                 <a:latin typeface="Segoe UI"/>
               </a:rPr>
@@ -26267,7 +26267,7 @@
             <a:r>
               <a:rPr sz="1450" b="0" i="0">
                 <a:solidFill>
-                  <a:srgbClr val="D6ECEE"/>
+                  <a:srgbClr val="D3EDEE"/>
                 </a:solidFill>
                 <a:latin typeface="Segoe UI"/>
               </a:rPr>
@@ -26351,7 +26351,7 @@
             <a:avLst/>
           </a:prstGeom>
           <a:solidFill>
-            <a:srgbClr val="C8102E"/>
+            <a:srgbClr val="C41F3E"/>
           </a:solidFill>
           <a:ln>
             <a:noFill/>
@@ -26413,7 +26413,7 @@
             <a:r>
               <a:rPr sz="1050" b="1" i="0">
                 <a:solidFill>
-                  <a:srgbClr val="006D77"/>
+                  <a:srgbClr val="007BA4"/>
                 </a:solidFill>
                 <a:latin typeface="Segoe UI"/>
               </a:rPr>
@@ -26523,7 +26523,7 @@
             <a:avLst/>
           </a:prstGeom>
           <a:solidFill>
-            <a:srgbClr val="006D77"/>
+            <a:srgbClr val="007BA4"/>
           </a:solidFill>
           <a:ln>
             <a:noFill/>
@@ -26585,7 +26585,7 @@
             <a:r>
               <a:rPr sz="3000" b="1" i="0">
                 <a:solidFill>
-                  <a:srgbClr val="006D77"/>
+                  <a:srgbClr val="007BA4"/>
                 </a:solidFill>
                 <a:latin typeface="Segoe UI"/>
               </a:rPr>
@@ -26695,7 +26695,7 @@
             <a:avLst/>
           </a:prstGeom>
           <a:solidFill>
-            <a:srgbClr val="006D77"/>
+            <a:srgbClr val="007BA4"/>
           </a:solidFill>
           <a:ln>
             <a:noFill/>
@@ -26757,7 +26757,7 @@
             <a:r>
               <a:rPr sz="3000" b="1" i="0">
                 <a:solidFill>
-                  <a:srgbClr val="006D77"/>
+                  <a:srgbClr val="007BA4"/>
                 </a:solidFill>
                 <a:latin typeface="Segoe UI"/>
               </a:rPr>
@@ -26867,7 +26867,7 @@
             <a:avLst/>
           </a:prstGeom>
           <a:solidFill>
-            <a:srgbClr val="006D77"/>
+            <a:srgbClr val="007BA4"/>
           </a:solidFill>
           <a:ln>
             <a:noFill/>
@@ -26929,7 +26929,7 @@
             <a:r>
               <a:rPr sz="3000" b="1" i="0">
                 <a:solidFill>
-                  <a:srgbClr val="006D77"/>
+                  <a:srgbClr val="007BA4"/>
                 </a:solidFill>
                 <a:latin typeface="Segoe UI"/>
               </a:rPr>
@@ -27039,7 +27039,7 @@
             <a:avLst/>
           </a:prstGeom>
           <a:solidFill>
-            <a:srgbClr val="006D77"/>
+            <a:srgbClr val="007BA4"/>
           </a:solidFill>
           <a:ln>
             <a:noFill/>
@@ -27101,7 +27101,7 @@
             <a:r>
               <a:rPr sz="3000" b="1" i="0">
                 <a:solidFill>
-                  <a:srgbClr val="006D77"/>
+                  <a:srgbClr val="007BA4"/>
                 </a:solidFill>
                 <a:latin typeface="Segoe UI"/>
               </a:rPr>
@@ -27198,7 +27198,7 @@
                   </a:txBody>
                   <a:tcPr anchor="ctr" marL="91440">
                     <a:solidFill>
-                      <a:srgbClr val="006D77"/>
+                      <a:srgbClr val="007BA4"/>
                     </a:solidFill>
                   </a:tcPr>
                 </a:tc>
@@ -27220,7 +27220,7 @@
                   </a:txBody>
                   <a:tcPr anchor="ctr" marL="91440">
                     <a:solidFill>
-                      <a:srgbClr val="006D77"/>
+                      <a:srgbClr val="007BA4"/>
                     </a:solidFill>
                   </a:tcPr>
                 </a:tc>
@@ -27242,7 +27242,7 @@
                   </a:txBody>
                   <a:tcPr anchor="ctr" marL="91440">
                     <a:solidFill>
-                      <a:srgbClr val="006D77"/>
+                      <a:srgbClr val="007BA4"/>
                     </a:solidFill>
                   </a:tcPr>
                 </a:tc>
@@ -27264,7 +27264,7 @@
                   </a:txBody>
                   <a:tcPr anchor="ctr" marL="91440">
                     <a:solidFill>
-                      <a:srgbClr val="006D77"/>
+                      <a:srgbClr val="007BA4"/>
                     </a:solidFill>
                   </a:tcPr>
                 </a:tc>
@@ -27286,7 +27286,7 @@
                   </a:txBody>
                   <a:tcPr anchor="ctr" marL="91440">
                     <a:solidFill>
-                      <a:srgbClr val="006D77"/>
+                      <a:srgbClr val="007BA4"/>
                     </a:solidFill>
                   </a:tcPr>
                 </a:tc>
@@ -27308,7 +27308,7 @@
                   </a:txBody>
                   <a:tcPr anchor="ctr" marL="91440">
                     <a:solidFill>
-                      <a:srgbClr val="006D77"/>
+                      <a:srgbClr val="007BA4"/>
                     </a:solidFill>
                   </a:tcPr>
                 </a:tc>
@@ -27330,7 +27330,7 @@
                   </a:txBody>
                   <a:tcPr anchor="ctr" marL="91440">
                     <a:solidFill>
-                      <a:srgbClr val="006D77"/>
+                      <a:srgbClr val="007BA4"/>
                     </a:solidFill>
                   </a:tcPr>
                 </a:tc>
@@ -28220,7 +28220,7 @@
             <a:avLst/>
           </a:prstGeom>
           <a:solidFill>
-            <a:srgbClr val="006D77"/>
+            <a:srgbClr val="007BA4"/>
           </a:solidFill>
           <a:ln>
             <a:noFill/>
@@ -28366,7 +28366,7 @@
             <a:avLst/>
           </a:prstGeom>
           <a:solidFill>
-            <a:srgbClr val="C8102E"/>
+            <a:srgbClr val="C41F3E"/>
           </a:solidFill>
           <a:ln>
             <a:noFill/>
@@ -28428,7 +28428,7 @@
             <a:r>
               <a:rPr sz="1050" b="1" i="0">
                 <a:solidFill>
-                  <a:srgbClr val="006D77"/>
+                  <a:srgbClr val="007BA4"/>
                 </a:solidFill>
                 <a:latin typeface="Segoe UI"/>
               </a:rPr>
@@ -28521,7 +28521,7 @@
                   </a:txBody>
                   <a:tcPr anchor="ctr" marL="91440">
                     <a:solidFill>
-                      <a:srgbClr val="006D77"/>
+                      <a:srgbClr val="007BA4"/>
                     </a:solidFill>
                   </a:tcPr>
                 </a:tc>
@@ -28543,7 +28543,7 @@
                   </a:txBody>
                   <a:tcPr anchor="ctr" marL="91440">
                     <a:solidFill>
-                      <a:srgbClr val="006D77"/>
+                      <a:srgbClr val="007BA4"/>
                     </a:solidFill>
                   </a:tcPr>
                 </a:tc>
@@ -28565,7 +28565,7 @@
                   </a:txBody>
                   <a:tcPr anchor="ctr" marL="91440">
                     <a:solidFill>
-                      <a:srgbClr val="006D77"/>
+                      <a:srgbClr val="007BA4"/>
                     </a:solidFill>
                   </a:tcPr>
                 </a:tc>
@@ -29316,7 +29316,7 @@
             <a:avLst/>
           </a:prstGeom>
           <a:solidFill>
-            <a:srgbClr val="C8102E"/>
+            <a:srgbClr val="C41F3E"/>
           </a:solidFill>
           <a:ln>
             <a:noFill/>
@@ -29378,7 +29378,7 @@
             <a:r>
               <a:rPr sz="1050" b="1" i="0">
                 <a:solidFill>
-                  <a:srgbClr val="006D77"/>
+                  <a:srgbClr val="007BA4"/>
                 </a:solidFill>
                 <a:latin typeface="Segoe UI"/>
               </a:rPr>
@@ -29471,7 +29471,7 @@
                   </a:txBody>
                   <a:tcPr anchor="ctr" marL="91440">
                     <a:solidFill>
-                      <a:srgbClr val="006D77"/>
+                      <a:srgbClr val="007BA4"/>
                     </a:solidFill>
                   </a:tcPr>
                 </a:tc>
@@ -29493,7 +29493,7 @@
                   </a:txBody>
                   <a:tcPr anchor="ctr" marL="91440">
                     <a:solidFill>
-                      <a:srgbClr val="006D77"/>
+                      <a:srgbClr val="007BA4"/>
                     </a:solidFill>
                   </a:tcPr>
                 </a:tc>
@@ -29515,7 +29515,7 @@
                   </a:txBody>
                   <a:tcPr anchor="ctr" marL="91440">
                     <a:solidFill>
-                      <a:srgbClr val="006D77"/>
+                      <a:srgbClr val="007BA4"/>
                     </a:solidFill>
                   </a:tcPr>
                 </a:tc>
@@ -30273,7 +30273,7 @@
             <a:avLst/>
           </a:prstGeom>
           <a:solidFill>
-            <a:srgbClr val="006D77"/>
+            <a:srgbClr val="005377"/>
           </a:solidFill>
           <a:ln>
             <a:noFill/>
@@ -30317,7 +30317,7 @@
             <a:avLst/>
           </a:prstGeom>
           <a:solidFill>
-            <a:srgbClr val="C8102E"/>
+            <a:srgbClr val="C41F3E"/>
           </a:solidFill>
           <a:ln>
             <a:noFill/>
@@ -30379,7 +30379,7 @@
             <a:r>
               <a:rPr sz="6400" b="1" i="0">
                 <a:solidFill>
-                  <a:srgbClr val="7FC4CB"/>
+                  <a:srgbClr val="A0D3E8"/>
                 </a:solidFill>
                 <a:latin typeface="Segoe UI"/>
               </a:rPr>
@@ -30463,7 +30463,7 @@
             <a:r>
               <a:rPr sz="1450" b="0" i="0">
                 <a:solidFill>
-                  <a:srgbClr val="D6ECEE"/>
+                  <a:srgbClr val="D3EDEE"/>
                 </a:solidFill>
                 <a:latin typeface="Segoe UI"/>
               </a:rPr>
@@ -30547,7 +30547,7 @@
             <a:avLst/>
           </a:prstGeom>
           <a:solidFill>
-            <a:srgbClr val="C8102E"/>
+            <a:srgbClr val="C41F3E"/>
           </a:solidFill>
           <a:ln>
             <a:noFill/>
@@ -30609,7 +30609,7 @@
             <a:r>
               <a:rPr sz="1050" b="1" i="0">
                 <a:solidFill>
-                  <a:srgbClr val="006D77"/>
+                  <a:srgbClr val="007BA4"/>
                 </a:solidFill>
                 <a:latin typeface="Segoe UI"/>
               </a:rPr>
@@ -30719,7 +30719,7 @@
             <a:avLst/>
           </a:prstGeom>
           <a:solidFill>
-            <a:srgbClr val="006D77"/>
+            <a:srgbClr val="007BA4"/>
           </a:solidFill>
           <a:ln>
             <a:noFill/>
@@ -30781,7 +30781,7 @@
             <a:r>
               <a:rPr sz="3000" b="1" i="0">
                 <a:solidFill>
-                  <a:srgbClr val="006D77"/>
+                  <a:srgbClr val="007BA4"/>
                 </a:solidFill>
                 <a:latin typeface="Segoe UI"/>
               </a:rPr>
@@ -30892,7 +30892,7 @@
             <a:avLst/>
           </a:prstGeom>
           <a:solidFill>
-            <a:srgbClr val="006D77"/>
+            <a:srgbClr val="007BA4"/>
           </a:solidFill>
           <a:ln>
             <a:noFill/>
@@ -30954,7 +30954,7 @@
             <a:r>
               <a:rPr sz="3000" b="1" i="0">
                 <a:solidFill>
-                  <a:srgbClr val="006D77"/>
+                  <a:srgbClr val="007BA4"/>
                 </a:solidFill>
                 <a:latin typeface="Segoe UI"/>
               </a:rPr>
@@ -31065,7 +31065,7 @@
             <a:avLst/>
           </a:prstGeom>
           <a:solidFill>
-            <a:srgbClr val="006D77"/>
+            <a:srgbClr val="007BA4"/>
           </a:solidFill>
           <a:ln>
             <a:noFill/>
@@ -31127,7 +31127,7 @@
             <a:r>
               <a:rPr sz="3000" b="1" i="0">
                 <a:solidFill>
-                  <a:srgbClr val="006D77"/>
+                  <a:srgbClr val="007BA4"/>
                 </a:solidFill>
                 <a:latin typeface="Segoe UI"/>
               </a:rPr>
@@ -31238,7 +31238,7 @@
             <a:avLst/>
           </a:prstGeom>
           <a:solidFill>
-            <a:srgbClr val="006D77"/>
+            <a:srgbClr val="007BA4"/>
           </a:solidFill>
           <a:ln>
             <a:noFill/>
@@ -31300,7 +31300,7 @@
             <a:r>
               <a:rPr sz="3000" b="1" i="0">
                 <a:solidFill>
-                  <a:srgbClr val="006D77"/>
+                  <a:srgbClr val="007BA4"/>
                 </a:solidFill>
                 <a:latin typeface="Segoe UI"/>
               </a:rPr>
@@ -31411,7 +31411,7 @@
             <a:avLst/>
           </a:prstGeom>
           <a:solidFill>
-            <a:srgbClr val="006D77"/>
+            <a:srgbClr val="007BA4"/>
           </a:solidFill>
           <a:ln>
             <a:noFill/>
@@ -31473,7 +31473,7 @@
             <a:r>
               <a:rPr sz="3000" b="1" i="0">
                 <a:solidFill>
-                  <a:srgbClr val="006D77"/>
+                  <a:srgbClr val="007BA4"/>
                 </a:solidFill>
                 <a:latin typeface="Segoe UI"/>
               </a:rPr>
@@ -31737,7 +31737,7 @@
             <a:avLst/>
           </a:prstGeom>
           <a:solidFill>
-            <a:srgbClr val="C8102E"/>
+            <a:srgbClr val="C41F3E"/>
           </a:solidFill>
           <a:ln>
             <a:noFill/>
@@ -31799,7 +31799,7 @@
             <a:r>
               <a:rPr sz="1050" b="1" i="0">
                 <a:solidFill>
-                  <a:srgbClr val="006D77"/>
+                  <a:srgbClr val="007BA4"/>
                 </a:solidFill>
                 <a:latin typeface="Segoe UI"/>
               </a:rPr>
@@ -31892,7 +31892,7 @@
                   </a:txBody>
                   <a:tcPr anchor="ctr" marL="91440">
                     <a:solidFill>
-                      <a:srgbClr val="006D77"/>
+                      <a:srgbClr val="007BA4"/>
                     </a:solidFill>
                   </a:tcPr>
                 </a:tc>
@@ -31914,7 +31914,7 @@
                   </a:txBody>
                   <a:tcPr anchor="ctr" marL="91440">
                     <a:solidFill>
-                      <a:srgbClr val="006D77"/>
+                      <a:srgbClr val="007BA4"/>
                     </a:solidFill>
                   </a:tcPr>
                 </a:tc>
@@ -31936,7 +31936,7 @@
                   </a:txBody>
                   <a:tcPr anchor="ctr" marL="91440">
                     <a:solidFill>
-                      <a:srgbClr val="006D77"/>
+                      <a:srgbClr val="007BA4"/>
                     </a:solidFill>
                   </a:tcPr>
                 </a:tc>
@@ -32927,7 +32927,7 @@
             <a:avLst/>
           </a:prstGeom>
           <a:solidFill>
-            <a:srgbClr val="006D77"/>
+            <a:srgbClr val="007BA4"/>
           </a:solidFill>
           <a:ln>
             <a:noFill/>
@@ -33073,7 +33073,7 @@
             <a:avLst/>
           </a:prstGeom>
           <a:solidFill>
-            <a:srgbClr val="C8102E"/>
+            <a:srgbClr val="C41F3E"/>
           </a:solidFill>
           <a:ln>
             <a:noFill/>
@@ -33135,7 +33135,7 @@
             <a:r>
               <a:rPr sz="1050" b="1" i="0">
                 <a:solidFill>
-                  <a:srgbClr val="006D77"/>
+                  <a:srgbClr val="007BA4"/>
                 </a:solidFill>
                 <a:latin typeface="Segoe UI"/>
               </a:rPr>
@@ -33229,7 +33229,7 @@
                   </a:txBody>
                   <a:tcPr anchor="ctr" marL="91440">
                     <a:solidFill>
-                      <a:srgbClr val="006D77"/>
+                      <a:srgbClr val="007BA4"/>
                     </a:solidFill>
                   </a:tcPr>
                 </a:tc>
@@ -33251,7 +33251,7 @@
                   </a:txBody>
                   <a:tcPr anchor="ctr" marL="91440">
                     <a:solidFill>
-                      <a:srgbClr val="006D77"/>
+                      <a:srgbClr val="007BA4"/>
                     </a:solidFill>
                   </a:tcPr>
                 </a:tc>
@@ -33273,7 +33273,7 @@
                   </a:txBody>
                   <a:tcPr anchor="ctr" marL="91440">
                     <a:solidFill>
-                      <a:srgbClr val="006D77"/>
+                      <a:srgbClr val="007BA4"/>
                     </a:solidFill>
                   </a:tcPr>
                 </a:tc>
@@ -33295,7 +33295,7 @@
                   </a:txBody>
                   <a:tcPr anchor="ctr" marL="91440">
                     <a:solidFill>
-                      <a:srgbClr val="006D77"/>
+                      <a:srgbClr val="007BA4"/>
                     </a:solidFill>
                   </a:tcPr>
                 </a:tc>
@@ -33993,7 +33993,7 @@
             <a:avLst/>
           </a:prstGeom>
           <a:solidFill>
-            <a:srgbClr val="006D77"/>
+            <a:srgbClr val="007BA4"/>
           </a:solidFill>
           <a:ln>
             <a:noFill/>
@@ -34139,7 +34139,7 @@
             <a:avLst/>
           </a:prstGeom>
           <a:solidFill>
-            <a:srgbClr val="C8102E"/>
+            <a:srgbClr val="C41F3E"/>
           </a:solidFill>
           <a:ln>
             <a:noFill/>
@@ -34201,7 +34201,7 @@
             <a:r>
               <a:rPr sz="1050" b="1" i="0">
                 <a:solidFill>
-                  <a:srgbClr val="006D77"/>
+                  <a:srgbClr val="007BA4"/>
                 </a:solidFill>
                 <a:latin typeface="Segoe UI"/>
               </a:rPr>
@@ -34295,7 +34295,7 @@
                   </a:txBody>
                   <a:tcPr anchor="ctr" marL="91440">
                     <a:solidFill>
-                      <a:srgbClr val="006D77"/>
+                      <a:srgbClr val="007BA4"/>
                     </a:solidFill>
                   </a:tcPr>
                 </a:tc>
@@ -34317,7 +34317,7 @@
                   </a:txBody>
                   <a:tcPr anchor="ctr" marL="91440">
                     <a:solidFill>
-                      <a:srgbClr val="006D77"/>
+                      <a:srgbClr val="007BA4"/>
                     </a:solidFill>
                   </a:tcPr>
                 </a:tc>
@@ -34339,7 +34339,7 @@
                   </a:txBody>
                   <a:tcPr anchor="ctr" marL="91440">
                     <a:solidFill>
-                      <a:srgbClr val="006D77"/>
+                      <a:srgbClr val="007BA4"/>
                     </a:solidFill>
                   </a:tcPr>
                 </a:tc>
@@ -34361,7 +34361,7 @@
                   </a:txBody>
                   <a:tcPr anchor="ctr" marL="91440">
                     <a:solidFill>
-                      <a:srgbClr val="006D77"/>
+                      <a:srgbClr val="007BA4"/>
                     </a:solidFill>
                   </a:tcPr>
                 </a:tc>
@@ -35205,7 +35205,7 @@
             <a:avLst/>
           </a:prstGeom>
           <a:solidFill>
-            <a:srgbClr val="006D77"/>
+            <a:srgbClr val="005377"/>
           </a:solidFill>
           <a:ln>
             <a:noFill/>
@@ -35249,7 +35249,7 @@
             <a:avLst/>
           </a:prstGeom>
           <a:solidFill>
-            <a:srgbClr val="C8102E"/>
+            <a:srgbClr val="C41F3E"/>
           </a:solidFill>
           <a:ln>
             <a:noFill/>
@@ -35311,7 +35311,7 @@
             <a:r>
               <a:rPr sz="6400" b="1" i="0">
                 <a:solidFill>
-                  <a:srgbClr val="7FC4CB"/>
+                  <a:srgbClr val="A0D3E8"/>
                 </a:solidFill>
                 <a:latin typeface="Segoe UI"/>
               </a:rPr>
@@ -35395,7 +35395,7 @@
             <a:r>
               <a:rPr sz="1450" b="0" i="0">
                 <a:solidFill>
-                  <a:srgbClr val="D6ECEE"/>
+                  <a:srgbClr val="D3EDEE"/>
                 </a:solidFill>
                 <a:latin typeface="Segoe UI"/>
               </a:rPr>
@@ -35479,7 +35479,7 @@
             <a:avLst/>
           </a:prstGeom>
           <a:solidFill>
-            <a:srgbClr val="C8102E"/>
+            <a:srgbClr val="C41F3E"/>
           </a:solidFill>
           <a:ln>
             <a:noFill/>
@@ -35541,7 +35541,7 @@
             <a:r>
               <a:rPr sz="1050" b="1" i="0">
                 <a:solidFill>
-                  <a:srgbClr val="006D77"/>
+                  <a:srgbClr val="007BA4"/>
                 </a:solidFill>
                 <a:latin typeface="Segoe UI"/>
               </a:rPr>
@@ -35788,7 +35788,7 @@
             <a:avLst/>
           </a:prstGeom>
           <a:solidFill>
-            <a:srgbClr val="006D77"/>
+            <a:srgbClr val="007BA4"/>
           </a:solidFill>
           <a:ln>
             <a:noFill/>
@@ -35934,7 +35934,7 @@
             <a:avLst/>
           </a:prstGeom>
           <a:solidFill>
-            <a:srgbClr val="C8102E"/>
+            <a:srgbClr val="C41F3E"/>
           </a:solidFill>
           <a:ln>
             <a:noFill/>
@@ -35996,7 +35996,7 @@
             <a:r>
               <a:rPr sz="1050" b="1" i="0">
                 <a:solidFill>
-                  <a:srgbClr val="006D77"/>
+                  <a:srgbClr val="007BA4"/>
                 </a:solidFill>
                 <a:latin typeface="Segoe UI"/>
               </a:rPr>
@@ -36090,7 +36090,7 @@
                   </a:txBody>
                   <a:tcPr anchor="ctr" marL="91440">
                     <a:solidFill>
-                      <a:srgbClr val="006D77"/>
+                      <a:srgbClr val="007BA4"/>
                     </a:solidFill>
                   </a:tcPr>
                 </a:tc>
@@ -36112,7 +36112,7 @@
                   </a:txBody>
                   <a:tcPr anchor="ctr" marL="91440">
                     <a:solidFill>
-                      <a:srgbClr val="006D77"/>
+                      <a:srgbClr val="007BA4"/>
                     </a:solidFill>
                   </a:tcPr>
                 </a:tc>
@@ -36134,7 +36134,7 @@
                   </a:txBody>
                   <a:tcPr anchor="ctr" marL="91440">
                     <a:solidFill>
-                      <a:srgbClr val="006D77"/>
+                      <a:srgbClr val="007BA4"/>
                     </a:solidFill>
                   </a:tcPr>
                 </a:tc>
@@ -36156,7 +36156,7 @@
                   </a:txBody>
                   <a:tcPr anchor="ctr" marL="91440">
                     <a:solidFill>
-                      <a:srgbClr val="006D77"/>
+                      <a:srgbClr val="007BA4"/>
                     </a:solidFill>
                   </a:tcPr>
                 </a:tc>
@@ -36764,7 +36764,7 @@
             <a:avLst/>
           </a:prstGeom>
           <a:solidFill>
-            <a:srgbClr val="006D77"/>
+            <a:srgbClr val="007BA4"/>
           </a:solidFill>
           <a:ln>
             <a:noFill/>
@@ -36910,7 +36910,7 @@
             <a:avLst/>
           </a:prstGeom>
           <a:solidFill>
-            <a:srgbClr val="C8102E"/>
+            <a:srgbClr val="C41F3E"/>
           </a:solidFill>
           <a:ln>
             <a:noFill/>
@@ -36972,7 +36972,7 @@
             <a:r>
               <a:rPr sz="1050" b="1" i="0">
                 <a:solidFill>
-                  <a:srgbClr val="006D77"/>
+                  <a:srgbClr val="007BA4"/>
                 </a:solidFill>
                 <a:latin typeface="Segoe UI"/>
               </a:rPr>
@@ -37065,7 +37065,7 @@
                   </a:txBody>
                   <a:tcPr anchor="ctr" marL="91440">
                     <a:solidFill>
-                      <a:srgbClr val="006D77"/>
+                      <a:srgbClr val="007BA4"/>
                     </a:solidFill>
                   </a:tcPr>
                 </a:tc>
@@ -37087,7 +37087,7 @@
                   </a:txBody>
                   <a:tcPr anchor="ctr" marL="91440">
                     <a:solidFill>
-                      <a:srgbClr val="006D77"/>
+                      <a:srgbClr val="007BA4"/>
                     </a:solidFill>
                   </a:tcPr>
                 </a:tc>
@@ -37109,7 +37109,7 @@
                   </a:txBody>
                   <a:tcPr anchor="ctr" marL="91440">
                     <a:solidFill>
-                      <a:srgbClr val="006D77"/>
+                      <a:srgbClr val="007BA4"/>
                     </a:solidFill>
                   </a:tcPr>
                 </a:tc>
@@ -37700,7 +37700,7 @@
             <a:avLst/>
           </a:prstGeom>
           <a:solidFill>
-            <a:srgbClr val="C8102E"/>
+            <a:srgbClr val="C41F3E"/>
           </a:solidFill>
           <a:ln>
             <a:noFill/>
@@ -37762,7 +37762,7 @@
             <a:r>
               <a:rPr sz="1050" b="1" i="0">
                 <a:solidFill>
-                  <a:srgbClr val="006D77"/>
+                  <a:srgbClr val="007BA4"/>
                 </a:solidFill>
                 <a:latin typeface="Segoe UI"/>
               </a:rPr>
@@ -37854,7 +37854,7 @@
                   </a:txBody>
                   <a:tcPr anchor="ctr" marL="91440">
                     <a:solidFill>
-                      <a:srgbClr val="006D77"/>
+                      <a:srgbClr val="007BA4"/>
                     </a:solidFill>
                   </a:tcPr>
                 </a:tc>
@@ -37876,7 +37876,7 @@
                   </a:txBody>
                   <a:tcPr anchor="ctr" marL="91440">
                     <a:solidFill>
-                      <a:srgbClr val="006D77"/>
+                      <a:srgbClr val="007BA4"/>
                     </a:solidFill>
                   </a:tcPr>
                 </a:tc>
@@ -38312,7 +38312,7 @@
             <a:avLst/>
           </a:prstGeom>
           <a:solidFill>
-            <a:srgbClr val="006D77"/>
+            <a:srgbClr val="007BA4"/>
           </a:solidFill>
           <a:ln>
             <a:noFill/>
@@ -38458,7 +38458,7 @@
             <a:avLst/>
           </a:prstGeom>
           <a:solidFill>
-            <a:srgbClr val="C8102E"/>
+            <a:srgbClr val="C41F3E"/>
           </a:solidFill>
           <a:ln>
             <a:noFill/>
@@ -38520,7 +38520,7 @@
             <a:r>
               <a:rPr sz="1050" b="1" i="0">
                 <a:solidFill>
-                  <a:srgbClr val="006D77"/>
+                  <a:srgbClr val="007BA4"/>
                 </a:solidFill>
                 <a:latin typeface="Segoe UI"/>
               </a:rPr>
@@ -38824,7 +38824,7 @@
             <a:avLst/>
           </a:prstGeom>
           <a:solidFill>
-            <a:srgbClr val="006D77"/>
+            <a:srgbClr val="007BA4"/>
           </a:solidFill>
           <a:ln>
             <a:noFill/>
@@ -38970,7 +38970,7 @@
             <a:avLst/>
           </a:prstGeom>
           <a:solidFill>
-            <a:srgbClr val="006D77"/>
+            <a:srgbClr val="005377"/>
           </a:solidFill>
           <a:ln>
             <a:noFill/>
@@ -39014,7 +39014,7 @@
             <a:avLst/>
           </a:prstGeom>
           <a:solidFill>
-            <a:srgbClr val="C8102E"/>
+            <a:srgbClr val="C41F3E"/>
           </a:solidFill>
           <a:ln>
             <a:noFill/>
@@ -39076,7 +39076,7 @@
             <a:r>
               <a:rPr sz="6400" b="1" i="0">
                 <a:solidFill>
-                  <a:srgbClr val="7FC4CB"/>
+                  <a:srgbClr val="A0D3E8"/>
                 </a:solidFill>
                 <a:latin typeface="Segoe UI"/>
               </a:rPr>
@@ -39160,7 +39160,7 @@
             <a:r>
               <a:rPr sz="1450" b="0" i="0">
                 <a:solidFill>
-                  <a:srgbClr val="D6ECEE"/>
+                  <a:srgbClr val="D3EDEE"/>
                 </a:solidFill>
                 <a:latin typeface="Segoe UI"/>
               </a:rPr>
@@ -39244,7 +39244,7 @@
             <a:avLst/>
           </a:prstGeom>
           <a:solidFill>
-            <a:srgbClr val="C8102E"/>
+            <a:srgbClr val="C41F3E"/>
           </a:solidFill>
           <a:ln>
             <a:noFill/>
@@ -39306,7 +39306,7 @@
             <a:r>
               <a:rPr sz="1050" b="1" i="0">
                 <a:solidFill>
-                  <a:srgbClr val="006D77"/>
+                  <a:srgbClr val="007BA4"/>
                 </a:solidFill>
                 <a:latin typeface="Segoe UI"/>
               </a:rPr>
@@ -39497,7 +39497,7 @@
                   </a:txBody>
                   <a:tcPr anchor="ctr" marL="91440">
                     <a:solidFill>
-                      <a:srgbClr val="006D77"/>
+                      <a:srgbClr val="007BA4"/>
                     </a:solidFill>
                   </a:tcPr>
                 </a:tc>
@@ -39519,7 +39519,7 @@
                   </a:txBody>
                   <a:tcPr anchor="ctr" marL="91440">
                     <a:solidFill>
-                      <a:srgbClr val="006D77"/>
+                      <a:srgbClr val="007BA4"/>
                     </a:solidFill>
                   </a:tcPr>
                 </a:tc>
@@ -39863,7 +39863,7 @@
             <a:avLst/>
           </a:prstGeom>
           <a:solidFill>
-            <a:srgbClr val="006D77"/>
+            <a:srgbClr val="007BA4"/>
           </a:solidFill>
           <a:ln>
             <a:noFill/>
@@ -40009,7 +40009,7 @@
             <a:avLst/>
           </a:prstGeom>
           <a:solidFill>
-            <a:srgbClr val="C8102E"/>
+            <a:srgbClr val="C41F3E"/>
           </a:solidFill>
           <a:ln>
             <a:noFill/>
@@ -40071,7 +40071,7 @@
             <a:r>
               <a:rPr sz="1050" b="1" i="0">
                 <a:solidFill>
-                  <a:srgbClr val="006D77"/>
+                  <a:srgbClr val="007BA4"/>
                 </a:solidFill>
                 <a:latin typeface="Segoe UI"/>
               </a:rPr>
@@ -40166,7 +40166,7 @@
                   </a:txBody>
                   <a:tcPr anchor="ctr" marL="91440">
                     <a:solidFill>
-                      <a:srgbClr val="006D77"/>
+                      <a:srgbClr val="007BA4"/>
                     </a:solidFill>
                   </a:tcPr>
                 </a:tc>
@@ -40188,7 +40188,7 @@
                   </a:txBody>
                   <a:tcPr anchor="ctr" marL="91440">
                     <a:solidFill>
-                      <a:srgbClr val="006D77"/>
+                      <a:srgbClr val="007BA4"/>
                     </a:solidFill>
                   </a:tcPr>
                 </a:tc>
@@ -40210,7 +40210,7 @@
                   </a:txBody>
                   <a:tcPr anchor="ctr" marL="91440">
                     <a:solidFill>
-                      <a:srgbClr val="006D77"/>
+                      <a:srgbClr val="007BA4"/>
                     </a:solidFill>
                   </a:tcPr>
                 </a:tc>
@@ -40232,7 +40232,7 @@
                   </a:txBody>
                   <a:tcPr anchor="ctr" marL="91440">
                     <a:solidFill>
-                      <a:srgbClr val="006D77"/>
+                      <a:srgbClr val="007BA4"/>
                     </a:solidFill>
                   </a:tcPr>
                 </a:tc>
@@ -40254,7 +40254,7 @@
                   </a:txBody>
                   <a:tcPr anchor="ctr" marL="91440">
                     <a:solidFill>
-                      <a:srgbClr val="006D77"/>
+                      <a:srgbClr val="007BA4"/>
                     </a:solidFill>
                   </a:tcPr>
                 </a:tc>
@@ -41442,7 +41442,7 @@
             <a:avLst/>
           </a:prstGeom>
           <a:solidFill>
-            <a:srgbClr val="006D77"/>
+            <a:srgbClr val="007BA4"/>
           </a:solidFill>
           <a:ln>
             <a:noFill/>
@@ -41588,7 +41588,7 @@
             <a:avLst/>
           </a:prstGeom>
           <a:solidFill>
-            <a:srgbClr val="C8102E"/>
+            <a:srgbClr val="C41F3E"/>
           </a:solidFill>
           <a:ln>
             <a:noFill/>
@@ -41650,7 +41650,7 @@
             <a:r>
               <a:rPr sz="1050" b="1" i="0">
                 <a:solidFill>
-                  <a:srgbClr val="006D77"/>
+                  <a:srgbClr val="007BA4"/>
                 </a:solidFill>
                 <a:latin typeface="Segoe UI"/>
               </a:rPr>
@@ -41745,7 +41745,7 @@
                   </a:txBody>
                   <a:tcPr anchor="ctr" marL="91440">
                     <a:solidFill>
-                      <a:srgbClr val="006D77"/>
+                      <a:srgbClr val="007BA4"/>
                     </a:solidFill>
                   </a:tcPr>
                 </a:tc>
@@ -41767,7 +41767,7 @@
                   </a:txBody>
                   <a:tcPr anchor="ctr" marL="91440">
                     <a:solidFill>
-                      <a:srgbClr val="006D77"/>
+                      <a:srgbClr val="007BA4"/>
                     </a:solidFill>
                   </a:tcPr>
                 </a:tc>
@@ -41789,7 +41789,7 @@
                   </a:txBody>
                   <a:tcPr anchor="ctr" marL="91440">
                     <a:solidFill>
-                      <a:srgbClr val="006D77"/>
+                      <a:srgbClr val="007BA4"/>
                     </a:solidFill>
                   </a:tcPr>
                 </a:tc>
@@ -41811,7 +41811,7 @@
                   </a:txBody>
                   <a:tcPr anchor="ctr" marL="91440">
                     <a:solidFill>
-                      <a:srgbClr val="006D77"/>
+                      <a:srgbClr val="007BA4"/>
                     </a:solidFill>
                   </a:tcPr>
                 </a:tc>
@@ -41833,7 +41833,7 @@
                   </a:txBody>
                   <a:tcPr anchor="ctr" marL="91440">
                     <a:solidFill>
-                      <a:srgbClr val="006D77"/>
+                      <a:srgbClr val="007BA4"/>
                     </a:solidFill>
                   </a:tcPr>
                 </a:tc>
@@ -42502,7 +42502,7 @@
             <a:avLst/>
           </a:prstGeom>
           <a:solidFill>
-            <a:srgbClr val="C8102E"/>
+            <a:srgbClr val="C41F3E"/>
           </a:solidFill>
           <a:ln>
             <a:noFill/>
@@ -42564,7 +42564,7 @@
             <a:r>
               <a:rPr sz="1050" b="1" i="0">
                 <a:solidFill>
-                  <a:srgbClr val="006D77"/>
+                  <a:srgbClr val="007BA4"/>
                 </a:solidFill>
                 <a:latin typeface="Segoe UI"/>
               </a:rPr>
@@ -42657,7 +42657,7 @@
                   </a:txBody>
                   <a:tcPr anchor="ctr" marL="91440">
                     <a:solidFill>
-                      <a:srgbClr val="006D77"/>
+                      <a:srgbClr val="007BA4"/>
                     </a:solidFill>
                   </a:tcPr>
                 </a:tc>
@@ -42679,7 +42679,7 @@
                   </a:txBody>
                   <a:tcPr anchor="ctr" marL="91440">
                     <a:solidFill>
-                      <a:srgbClr val="006D77"/>
+                      <a:srgbClr val="007BA4"/>
                     </a:solidFill>
                   </a:tcPr>
                 </a:tc>
@@ -42701,7 +42701,7 @@
                   </a:txBody>
                   <a:tcPr anchor="ctr" marL="91440">
                     <a:solidFill>
-                      <a:srgbClr val="006D77"/>
+                      <a:srgbClr val="007BA4"/>
                     </a:solidFill>
                   </a:tcPr>
                 </a:tc>
@@ -43526,7 +43526,7 @@
             <a:avLst/>
           </a:prstGeom>
           <a:solidFill>
-            <a:srgbClr val="C8102E"/>
+            <a:srgbClr val="C41F3E"/>
           </a:solidFill>
           <a:ln>
             <a:noFill/>
@@ -43588,7 +43588,7 @@
             <a:r>
               <a:rPr sz="1050" b="1" i="0">
                 <a:solidFill>
-                  <a:srgbClr val="006D77"/>
+                  <a:srgbClr val="007BA4"/>
                 </a:solidFill>
                 <a:latin typeface="Segoe UI"/>
               </a:rPr>
@@ -43681,7 +43681,7 @@
                   </a:txBody>
                   <a:tcPr anchor="ctr" marL="91440">
                     <a:solidFill>
-                      <a:srgbClr val="006D77"/>
+                      <a:srgbClr val="007BA4"/>
                     </a:solidFill>
                   </a:tcPr>
                 </a:tc>
@@ -43703,7 +43703,7 @@
                   </a:txBody>
                   <a:tcPr anchor="ctr" marL="91440">
                     <a:solidFill>
-                      <a:srgbClr val="006D77"/>
+                      <a:srgbClr val="007BA4"/>
                     </a:solidFill>
                   </a:tcPr>
                 </a:tc>
@@ -43725,7 +43725,7 @@
                   </a:txBody>
                   <a:tcPr anchor="ctr" marL="91440">
                     <a:solidFill>
-                      <a:srgbClr val="006D77"/>
+                      <a:srgbClr val="007BA4"/>
                     </a:solidFill>
                   </a:tcPr>
                 </a:tc>
@@ -44353,7 +44353,7 @@
             <a:avLst/>
           </a:prstGeom>
           <a:solidFill>
-            <a:srgbClr val="006D77"/>
+            <a:srgbClr val="005377"/>
           </a:solidFill>
           <a:ln>
             <a:noFill/>
@@ -44397,7 +44397,7 @@
             <a:avLst/>
           </a:prstGeom>
           <a:solidFill>
-            <a:srgbClr val="C8102E"/>
+            <a:srgbClr val="C41F3E"/>
           </a:solidFill>
           <a:ln>
             <a:noFill/>
@@ -44501,7 +44501,7 @@
             <a:r>
               <a:rPr sz="1500" b="0" i="0">
                 <a:solidFill>
-                  <a:srgbClr val="D6ECEE"/>
+                  <a:srgbClr val="D3EDEE"/>
                 </a:solidFill>
                 <a:latin typeface="Segoe UI"/>
               </a:rPr>
@@ -44520,7 +44520,7 @@
             <a:r>
               <a:rPr sz="1300" b="0" i="0">
                 <a:solidFill>
-                  <a:srgbClr val="BFDFE3"/>
+                  <a:srgbClr val="A0D3E8"/>
                 </a:solidFill>
                 <a:latin typeface="Segoe UI"/>
               </a:rPr>
@@ -44604,7 +44604,7 @@
             <a:avLst/>
           </a:prstGeom>
           <a:solidFill>
-            <a:srgbClr val="C8102E"/>
+            <a:srgbClr val="C41F3E"/>
           </a:solidFill>
           <a:ln>
             <a:noFill/>
@@ -44666,7 +44666,7 @@
             <a:r>
               <a:rPr sz="1050" b="1" i="0">
                 <a:solidFill>
-                  <a:srgbClr val="006D77"/>
+                  <a:srgbClr val="007BA4"/>
                 </a:solidFill>
                 <a:latin typeface="Segoe UI"/>
               </a:rPr>
@@ -44759,7 +44759,7 @@
                   </a:txBody>
                   <a:tcPr anchor="ctr" marL="91440">
                     <a:solidFill>
-                      <a:srgbClr val="006D77"/>
+                      <a:srgbClr val="007BA4"/>
                     </a:solidFill>
                   </a:tcPr>
                 </a:tc>
@@ -44781,7 +44781,7 @@
                   </a:txBody>
                   <a:tcPr anchor="ctr" marL="91440">
                     <a:solidFill>
-                      <a:srgbClr val="006D77"/>
+                      <a:srgbClr val="007BA4"/>
                     </a:solidFill>
                   </a:tcPr>
                 </a:tc>
@@ -44803,7 +44803,7 @@
                   </a:txBody>
                   <a:tcPr anchor="ctr" marL="91440">
                     <a:solidFill>
-                      <a:srgbClr val="006D77"/>
+                      <a:srgbClr val="007BA4"/>
                     </a:solidFill>
                   </a:tcPr>
                 </a:tc>
@@ -45279,7 +45279,7 @@
             <a:avLst/>
           </a:prstGeom>
           <a:solidFill>
-            <a:srgbClr val="006D77"/>
+            <a:srgbClr val="007BA4"/>
           </a:solidFill>
           <a:ln>
             <a:noFill/>
@@ -45425,7 +45425,7 @@
             <a:avLst/>
           </a:prstGeom>
           <a:solidFill>
-            <a:srgbClr val="C8102E"/>
+            <a:srgbClr val="C41F3E"/>
           </a:solidFill>
           <a:ln>
             <a:noFill/>
@@ -45487,7 +45487,7 @@
             <a:r>
               <a:rPr sz="1050" b="1" i="0">
                 <a:solidFill>
-                  <a:srgbClr val="006D77"/>
+                  <a:srgbClr val="007BA4"/>
                 </a:solidFill>
                 <a:latin typeface="Segoe UI"/>
               </a:rPr>
@@ -45864,7 +45864,7 @@
             <a:avLst/>
           </a:prstGeom>
           <a:solidFill>
-            <a:srgbClr val="006D77"/>
+            <a:srgbClr val="005377"/>
           </a:solidFill>
           <a:ln>
             <a:noFill/>
@@ -45908,7 +45908,7 @@
             <a:avLst/>
           </a:prstGeom>
           <a:solidFill>
-            <a:srgbClr val="C8102E"/>
+            <a:srgbClr val="C41F3E"/>
           </a:solidFill>
           <a:ln>
             <a:noFill/>
@@ -45970,7 +45970,7 @@
             <a:r>
               <a:rPr sz="6400" b="1" i="0">
                 <a:solidFill>
-                  <a:srgbClr val="7FC4CB"/>
+                  <a:srgbClr val="A0D3E8"/>
                 </a:solidFill>
                 <a:latin typeface="Segoe UI"/>
               </a:rPr>
@@ -46054,7 +46054,7 @@
             <a:r>
               <a:rPr sz="1450" b="0" i="0">
                 <a:solidFill>
-                  <a:srgbClr val="D6ECEE"/>
+                  <a:srgbClr val="D3EDEE"/>
                 </a:solidFill>
                 <a:latin typeface="Segoe UI"/>
               </a:rPr>
@@ -46138,7 +46138,7 @@
             <a:avLst/>
           </a:prstGeom>
           <a:solidFill>
-            <a:srgbClr val="C8102E"/>
+            <a:srgbClr val="C41F3E"/>
           </a:solidFill>
           <a:ln>
             <a:noFill/>
@@ -46200,7 +46200,7 @@
             <a:r>
               <a:rPr sz="1050" b="1" i="0">
                 <a:solidFill>
-                  <a:srgbClr val="006D77"/>
+                  <a:srgbClr val="007BA4"/>
                 </a:solidFill>
                 <a:latin typeface="Segoe UI"/>
               </a:rPr>
@@ -46310,7 +46310,7 @@
             <a:avLst/>
           </a:prstGeom>
           <a:solidFill>
-            <a:srgbClr val="006D77"/>
+            <a:srgbClr val="007BA4"/>
           </a:solidFill>
           <a:ln>
             <a:noFill/>
@@ -46372,7 +46372,7 @@
             <a:r>
               <a:rPr sz="3000" b="1" i="0">
                 <a:solidFill>
-                  <a:srgbClr val="006D77"/>
+                  <a:srgbClr val="007BA4"/>
                 </a:solidFill>
                 <a:latin typeface="Segoe UI"/>
               </a:rPr>
@@ -46483,7 +46483,7 @@
             <a:avLst/>
           </a:prstGeom>
           <a:solidFill>
-            <a:srgbClr val="006D77"/>
+            <a:srgbClr val="007BA4"/>
           </a:solidFill>
           <a:ln>
             <a:noFill/>
@@ -46545,7 +46545,7 @@
             <a:r>
               <a:rPr sz="3000" b="1" i="0">
                 <a:solidFill>
-                  <a:srgbClr val="006D77"/>
+                  <a:srgbClr val="007BA4"/>
                 </a:solidFill>
                 <a:latin typeface="Segoe UI"/>
               </a:rPr>
@@ -46655,7 +46655,7 @@
             <a:avLst/>
           </a:prstGeom>
           <a:solidFill>
-            <a:srgbClr val="006D77"/>
+            <a:srgbClr val="007BA4"/>
           </a:solidFill>
           <a:ln>
             <a:noFill/>
@@ -46717,7 +46717,7 @@
             <a:r>
               <a:rPr sz="3000" b="1" i="0">
                 <a:solidFill>
-                  <a:srgbClr val="006D77"/>
+                  <a:srgbClr val="007BA4"/>
                 </a:solidFill>
                 <a:latin typeface="Segoe UI"/>
               </a:rPr>
@@ -46827,7 +46827,7 @@
             <a:avLst/>
           </a:prstGeom>
           <a:solidFill>
-            <a:srgbClr val="006D77"/>
+            <a:srgbClr val="007BA4"/>
           </a:solidFill>
           <a:ln>
             <a:noFill/>
@@ -46889,7 +46889,7 @@
             <a:r>
               <a:rPr sz="3000" b="1" i="0">
                 <a:solidFill>
-                  <a:srgbClr val="006D77"/>
+                  <a:srgbClr val="007BA4"/>
                 </a:solidFill>
                 <a:latin typeface="Segoe UI"/>
               </a:rPr>
@@ -47000,7 +47000,7 @@
             <a:avLst/>
           </a:prstGeom>
           <a:solidFill>
-            <a:srgbClr val="006D77"/>
+            <a:srgbClr val="007BA4"/>
           </a:solidFill>
           <a:ln>
             <a:noFill/>
@@ -47062,7 +47062,7 @@
             <a:r>
               <a:rPr sz="3000" b="1" i="0">
                 <a:solidFill>
-                  <a:srgbClr val="006D77"/>
+                  <a:srgbClr val="007BA4"/>
                 </a:solidFill>
                 <a:latin typeface="Segoe UI"/>
               </a:rPr>
@@ -47155,7 +47155,7 @@
                   </a:txBody>
                   <a:tcPr anchor="ctr" marL="91440">
                     <a:solidFill>
-                      <a:srgbClr val="006D77"/>
+                      <a:srgbClr val="007BA4"/>
                     </a:solidFill>
                   </a:tcPr>
                 </a:tc>
@@ -47177,7 +47177,7 @@
                   </a:txBody>
                   <a:tcPr anchor="ctr" marL="91440">
                     <a:solidFill>
-                      <a:srgbClr val="006D77"/>
+                      <a:srgbClr val="007BA4"/>
                     </a:solidFill>
                   </a:tcPr>
                 </a:tc>
@@ -47199,7 +47199,7 @@
                   </a:txBody>
                   <a:tcPr anchor="ctr" marL="91440">
                     <a:solidFill>
-                      <a:srgbClr val="006D77"/>
+                      <a:srgbClr val="007BA4"/>
                     </a:solidFill>
                   </a:tcPr>
                 </a:tc>

--- a/lending-due-diligence-app/docs/Pega-to-PowerPlatform-Migration-PoC.pptx
+++ b/lending-due-diligence-app/docs/Pega-to-PowerPlatform-Migration-PoC.pptx
@@ -5999,7 +5999,7 @@
                 </a:solidFill>
                 <a:latin typeface="Segoe UI"/>
               </a:rPr>
-              <a:t>•  Data transforms, correspondence bodies and notification templates are engine-executed and have no exportable representation.</a:t>
+              <a:t>•  Screen layouts, dashboards and any customised AI prompt text have no exportable representation. Correspondence bodies do - all 27 were recovered in full.</a:t>
             </a:r>
           </a:p>
           <a:p>
@@ -15686,13 +15686,13 @@
                     <a:lstStyle/>
                     <a:p>
                       <a:r>
-                        <a:rPr sz="1150" b="0">
-                          <a:solidFill>
-                            <a:srgbClr val="3C3C3C"/>
-                          </a:solidFill>
-                          <a:latin typeface="Segoe UI"/>
-                        </a:rPr>
-                        <a:t>Effort increases if exact templates are mandatory</a:t>
+                        <a:rPr sz="1150" b="1">
+                          <a:solidFill>
+                            <a:srgbClr val="1A1A1A"/>
+                          </a:solidFill>
+                          <a:latin typeface="Segoe UI"/>
+                        </a:rPr>
+                        <a:t>Superseded - all 27 bodies were recovered verbatim</a:t>
                       </a:r>
                     </a:p>
                   </a:txBody>

--- a/lending-due-diligence-app/docs/Pega-to-PowerPlatform-Migration-PoC.pptx
+++ b/lending-due-diligence-app/docs/Pega-to-PowerPlatform-Migration-PoC.pptx
@@ -4390,7 +4390,7 @@
             <a:avLst/>
           </a:prstGeom>
           <a:solidFill>
-            <a:srgbClr val="C41F3E"/>
+            <a:srgbClr val="A100FF"/>
           </a:solidFill>
           <a:ln>
             <a:noFill/>
@@ -4434,7 +4434,7 @@
             <a:avLst/>
           </a:prstGeom>
           <a:solidFill>
-            <a:srgbClr val="005377"/>
+            <a:srgbClr val="001D54"/>
           </a:solidFill>
           <a:ln>
             <a:noFill/>
@@ -4496,7 +4496,7 @@
             <a:r>
               <a:rPr sz="1300" b="1" i="0">
                 <a:solidFill>
-                  <a:srgbClr val="007BA4"/>
+                  <a:srgbClr val="3F57E4"/>
                 </a:solidFill>
                 <a:latin typeface="Segoe UI"/>
               </a:rPr>
@@ -4557,7 +4557,7 @@
             <a:r>
               <a:rPr sz="4400" b="1" i="0">
                 <a:solidFill>
-                  <a:srgbClr val="C41F3E"/>
+                  <a:srgbClr val="A100FF"/>
                 </a:solidFill>
                 <a:latin typeface="Segoe UI"/>
               </a:rPr>
@@ -4581,7 +4581,7 @@
             <a:avLst/>
           </a:prstGeom>
           <a:solidFill>
-            <a:srgbClr val="007BA4"/>
+            <a:srgbClr val="3F57E4"/>
           </a:solidFill>
           <a:ln>
             <a:noFill/>
@@ -4788,7 +4788,7 @@
             <a:avLst/>
           </a:prstGeom>
           <a:solidFill>
-            <a:srgbClr val="C41F3E"/>
+            <a:srgbClr val="A100FF"/>
           </a:solidFill>
           <a:ln>
             <a:noFill/>
@@ -4850,7 +4850,7 @@
             <a:r>
               <a:rPr sz="1050" b="1" i="0">
                 <a:solidFill>
-                  <a:srgbClr val="007BA4"/>
+                  <a:srgbClr val="3F57E4"/>
                 </a:solidFill>
                 <a:latin typeface="Segoe UI"/>
               </a:rPr>
@@ -4944,7 +4944,7 @@
                   </a:txBody>
                   <a:tcPr anchor="ctr" marL="91440">
                     <a:solidFill>
-                      <a:srgbClr val="007BA4"/>
+                      <a:srgbClr val="3F57E4"/>
                     </a:solidFill>
                   </a:tcPr>
                 </a:tc>
@@ -4966,7 +4966,7 @@
                   </a:txBody>
                   <a:tcPr anchor="ctr" marL="91440">
                     <a:solidFill>
-                      <a:srgbClr val="007BA4"/>
+                      <a:srgbClr val="3F57E4"/>
                     </a:solidFill>
                   </a:tcPr>
                 </a:tc>
@@ -4988,7 +4988,7 @@
                   </a:txBody>
                   <a:tcPr anchor="ctr" marL="91440">
                     <a:solidFill>
-                      <a:srgbClr val="007BA4"/>
+                      <a:srgbClr val="3F57E4"/>
                     </a:solidFill>
                   </a:tcPr>
                 </a:tc>
@@ -5010,7 +5010,7 @@
                   </a:txBody>
                   <a:tcPr anchor="ctr" marL="91440">
                     <a:solidFill>
-                      <a:srgbClr val="007BA4"/>
+                      <a:srgbClr val="3F57E4"/>
                     </a:solidFill>
                   </a:tcPr>
                 </a:tc>
@@ -5754,7 +5754,7 @@
             <a:avLst/>
           </a:prstGeom>
           <a:solidFill>
-            <a:srgbClr val="C41F3E"/>
+            <a:srgbClr val="A100FF"/>
           </a:solidFill>
           <a:ln>
             <a:noFill/>
@@ -5816,7 +5816,7 @@
             <a:r>
               <a:rPr sz="1050" b="1" i="0">
                 <a:solidFill>
-                  <a:srgbClr val="007BA4"/>
+                  <a:srgbClr val="3F57E4"/>
                 </a:solidFill>
                 <a:latin typeface="Segoe UI"/>
               </a:rPr>
@@ -6247,7 +6247,7 @@
             <a:avLst/>
           </a:prstGeom>
           <a:solidFill>
-            <a:srgbClr val="005377"/>
+            <a:srgbClr val="001D54"/>
           </a:solidFill>
           <a:ln>
             <a:noFill/>
@@ -6291,7 +6291,7 @@
             <a:avLst/>
           </a:prstGeom>
           <a:solidFill>
-            <a:srgbClr val="C41F3E"/>
+            <a:srgbClr val="A100FF"/>
           </a:solidFill>
           <a:ln>
             <a:noFill/>
@@ -6353,7 +6353,7 @@
             <a:r>
               <a:rPr sz="6400" b="1" i="0">
                 <a:solidFill>
-                  <a:srgbClr val="A0D3E8"/>
+                  <a:srgbClr val="A9B5F2"/>
                 </a:solidFill>
                 <a:latin typeface="Segoe UI"/>
               </a:rPr>
@@ -6437,7 +6437,7 @@
             <a:r>
               <a:rPr sz="1450" b="0" i="0">
                 <a:solidFill>
-                  <a:srgbClr val="D3EDEE"/>
+                  <a:srgbClr val="DCE1F7"/>
                 </a:solidFill>
                 <a:latin typeface="Segoe UI"/>
               </a:rPr>
@@ -6521,7 +6521,7 @@
             <a:avLst/>
           </a:prstGeom>
           <a:solidFill>
-            <a:srgbClr val="C41F3E"/>
+            <a:srgbClr val="A100FF"/>
           </a:solidFill>
           <a:ln>
             <a:noFill/>
@@ -6583,7 +6583,7 @@
             <a:r>
               <a:rPr sz="1050" b="1" i="0">
                 <a:solidFill>
-                  <a:srgbClr val="007BA4"/>
+                  <a:srgbClr val="3F57E4"/>
                 </a:solidFill>
                 <a:latin typeface="Segoe UI"/>
               </a:rPr>
@@ -6737,7 +6737,7 @@
                   </a:txBody>
                   <a:tcPr anchor="ctr" marL="91440">
                     <a:solidFill>
-                      <a:srgbClr val="007BA4"/>
+                      <a:srgbClr val="3F57E4"/>
                     </a:solidFill>
                   </a:tcPr>
                 </a:tc>
@@ -6759,7 +6759,7 @@
                   </a:txBody>
                   <a:tcPr anchor="ctr" marL="91440">
                     <a:solidFill>
-                      <a:srgbClr val="007BA4"/>
+                      <a:srgbClr val="3F57E4"/>
                     </a:solidFill>
                   </a:tcPr>
                 </a:tc>
@@ -6781,7 +6781,7 @@
                   </a:txBody>
                   <a:tcPr anchor="ctr" marL="91440">
                     <a:solidFill>
-                      <a:srgbClr val="007BA4"/>
+                      <a:srgbClr val="3F57E4"/>
                     </a:solidFill>
                   </a:tcPr>
                 </a:tc>
@@ -7257,7 +7257,7 @@
             <a:avLst/>
           </a:prstGeom>
           <a:solidFill>
-            <a:srgbClr val="007BA4"/>
+            <a:srgbClr val="3F57E4"/>
           </a:solidFill>
           <a:ln>
             <a:noFill/>
@@ -7403,7 +7403,7 @@
             <a:avLst/>
           </a:prstGeom>
           <a:solidFill>
-            <a:srgbClr val="C41F3E"/>
+            <a:srgbClr val="A100FF"/>
           </a:solidFill>
           <a:ln>
             <a:noFill/>
@@ -7465,7 +7465,7 @@
             <a:r>
               <a:rPr sz="1050" b="1" i="0">
                 <a:solidFill>
-                  <a:srgbClr val="007BA4"/>
+                  <a:srgbClr val="3F57E4"/>
                 </a:solidFill>
                 <a:latin typeface="Segoe UI"/>
               </a:rPr>
@@ -7558,7 +7558,7 @@
                   </a:txBody>
                   <a:tcPr anchor="ctr" marL="91440">
                     <a:solidFill>
-                      <a:srgbClr val="007BA4"/>
+                      <a:srgbClr val="3F57E4"/>
                     </a:solidFill>
                   </a:tcPr>
                 </a:tc>
@@ -7580,7 +7580,7 @@
                   </a:txBody>
                   <a:tcPr anchor="ctr" marL="91440">
                     <a:solidFill>
-                      <a:srgbClr val="007BA4"/>
+                      <a:srgbClr val="3F57E4"/>
                     </a:solidFill>
                   </a:tcPr>
                 </a:tc>
@@ -7602,7 +7602,7 @@
                   </a:txBody>
                   <a:tcPr anchor="ctr" marL="91440">
                     <a:solidFill>
-                      <a:srgbClr val="007BA4"/>
+                      <a:srgbClr val="3F57E4"/>
                     </a:solidFill>
                   </a:tcPr>
                 </a:tc>
@@ -8041,7 +8041,7 @@
             <a:avLst/>
           </a:prstGeom>
           <a:solidFill>
-            <a:srgbClr val="007BA4"/>
+            <a:srgbClr val="3F57E4"/>
           </a:solidFill>
           <a:ln>
             <a:noFill/>
@@ -8187,7 +8187,7 @@
             <a:avLst/>
           </a:prstGeom>
           <a:solidFill>
-            <a:srgbClr val="C41F3E"/>
+            <a:srgbClr val="A100FF"/>
           </a:solidFill>
           <a:ln>
             <a:noFill/>
@@ -8249,7 +8249,7 @@
             <a:r>
               <a:rPr sz="1050" b="1" i="0">
                 <a:solidFill>
-                  <a:srgbClr val="007BA4"/>
+                  <a:srgbClr val="3F57E4"/>
                 </a:solidFill>
                 <a:latin typeface="Segoe UI"/>
               </a:rPr>
@@ -8342,7 +8342,7 @@
                   </a:txBody>
                   <a:tcPr anchor="ctr" marL="91440">
                     <a:solidFill>
-                      <a:srgbClr val="007BA4"/>
+                      <a:srgbClr val="3F57E4"/>
                     </a:solidFill>
                   </a:tcPr>
                 </a:tc>
@@ -8364,7 +8364,7 @@
                   </a:txBody>
                   <a:tcPr anchor="ctr" marL="91440">
                     <a:solidFill>
-                      <a:srgbClr val="007BA4"/>
+                      <a:srgbClr val="3F57E4"/>
                     </a:solidFill>
                   </a:tcPr>
                 </a:tc>
@@ -8386,7 +8386,7 @@
                   </a:txBody>
                   <a:tcPr anchor="ctr" marL="91440">
                     <a:solidFill>
-                      <a:srgbClr val="007BA4"/>
+                      <a:srgbClr val="3F57E4"/>
                     </a:solidFill>
                   </a:tcPr>
                 </a:tc>
@@ -9066,7 +9066,7 @@
             <a:avLst/>
           </a:prstGeom>
           <a:solidFill>
-            <a:srgbClr val="007BA4"/>
+            <a:srgbClr val="3F57E4"/>
           </a:solidFill>
           <a:ln>
             <a:noFill/>
@@ -9212,7 +9212,7 @@
             <a:avLst/>
           </a:prstGeom>
           <a:solidFill>
-            <a:srgbClr val="005377"/>
+            <a:srgbClr val="001D54"/>
           </a:solidFill>
           <a:ln>
             <a:noFill/>
@@ -9256,7 +9256,7 @@
             <a:avLst/>
           </a:prstGeom>
           <a:solidFill>
-            <a:srgbClr val="C41F3E"/>
+            <a:srgbClr val="A100FF"/>
           </a:solidFill>
           <a:ln>
             <a:noFill/>
@@ -9318,7 +9318,7 @@
             <a:r>
               <a:rPr sz="6400" b="1" i="0">
                 <a:solidFill>
-                  <a:srgbClr val="A0D3E8"/>
+                  <a:srgbClr val="A9B5F2"/>
                 </a:solidFill>
                 <a:latin typeface="Segoe UI"/>
               </a:rPr>
@@ -9402,7 +9402,7 @@
             <a:r>
               <a:rPr sz="1450" b="0" i="0">
                 <a:solidFill>
-                  <a:srgbClr val="D3EDEE"/>
+                  <a:srgbClr val="DCE1F7"/>
                 </a:solidFill>
                 <a:latin typeface="Segoe UI"/>
               </a:rPr>
@@ -9486,7 +9486,7 @@
             <a:avLst/>
           </a:prstGeom>
           <a:solidFill>
-            <a:srgbClr val="C41F3E"/>
+            <a:srgbClr val="A100FF"/>
           </a:solidFill>
           <a:ln>
             <a:noFill/>
@@ -9548,7 +9548,7 @@
             <a:r>
               <a:rPr sz="1050" b="1" i="0">
                 <a:solidFill>
-                  <a:srgbClr val="007BA4"/>
+                  <a:srgbClr val="3F57E4"/>
                 </a:solidFill>
                 <a:latin typeface="Segoe UI"/>
               </a:rPr>
@@ -9703,7 +9703,7 @@
                   </a:txBody>
                   <a:tcPr anchor="ctr" marL="91440">
                     <a:solidFill>
-                      <a:srgbClr val="007BA4"/>
+                      <a:srgbClr val="3F57E4"/>
                     </a:solidFill>
                   </a:tcPr>
                 </a:tc>
@@ -9725,7 +9725,7 @@
                   </a:txBody>
                   <a:tcPr anchor="ctr" marL="91440">
                     <a:solidFill>
-                      <a:srgbClr val="007BA4"/>
+                      <a:srgbClr val="3F57E4"/>
                     </a:solidFill>
                   </a:tcPr>
                 </a:tc>
@@ -9747,7 +9747,7 @@
                   </a:txBody>
                   <a:tcPr anchor="ctr" marL="91440">
                     <a:solidFill>
-                      <a:srgbClr val="007BA4"/>
+                      <a:srgbClr val="3F57E4"/>
                     </a:solidFill>
                   </a:tcPr>
                 </a:tc>
@@ -9769,7 +9769,7 @@
                   </a:txBody>
                   <a:tcPr anchor="ctr" marL="91440">
                     <a:solidFill>
-                      <a:srgbClr val="007BA4"/>
+                      <a:srgbClr val="3F57E4"/>
                     </a:solidFill>
                   </a:tcPr>
                 </a:tc>
@@ -10197,7 +10197,7 @@
             <a:avLst/>
           </a:prstGeom>
           <a:solidFill>
-            <a:srgbClr val="007BA4"/>
+            <a:srgbClr val="3F57E4"/>
           </a:solidFill>
           <a:ln>
             <a:noFill/>
@@ -10343,7 +10343,7 @@
             <a:avLst/>
           </a:prstGeom>
           <a:solidFill>
-            <a:srgbClr val="C41F3E"/>
+            <a:srgbClr val="A100FF"/>
           </a:solidFill>
           <a:ln>
             <a:noFill/>
@@ -10405,7 +10405,7 @@
             <a:r>
               <a:rPr sz="1050" b="1" i="0">
                 <a:solidFill>
-                  <a:srgbClr val="007BA4"/>
+                  <a:srgbClr val="3F57E4"/>
                 </a:solidFill>
                 <a:latin typeface="Segoe UI"/>
               </a:rPr>
@@ -10540,7 +10540,7 @@
                   </a:txBody>
                   <a:tcPr anchor="ctr" marL="91440">
                     <a:solidFill>
-                      <a:srgbClr val="007BA4"/>
+                      <a:srgbClr val="3F57E4"/>
                     </a:solidFill>
                   </a:tcPr>
                 </a:tc>
@@ -10562,7 +10562,7 @@
                   </a:txBody>
                   <a:tcPr anchor="ctr" marL="91440">
                     <a:solidFill>
-                      <a:srgbClr val="007BA4"/>
+                      <a:srgbClr val="3F57E4"/>
                     </a:solidFill>
                   </a:tcPr>
                 </a:tc>
@@ -10584,7 +10584,7 @@
                   </a:txBody>
                   <a:tcPr anchor="ctr" marL="91440">
                     <a:solidFill>
-                      <a:srgbClr val="007BA4"/>
+                      <a:srgbClr val="3F57E4"/>
                     </a:solidFill>
                   </a:tcPr>
                 </a:tc>
@@ -11139,7 +11139,7 @@
             <a:avLst/>
           </a:prstGeom>
           <a:solidFill>
-            <a:srgbClr val="C41F3E"/>
+            <a:srgbClr val="A100FF"/>
           </a:solidFill>
           <a:ln>
             <a:noFill/>
@@ -11201,7 +11201,7 @@
             <a:r>
               <a:rPr sz="1050" b="1" i="0">
                 <a:solidFill>
-                  <a:srgbClr val="007BA4"/>
+                  <a:srgbClr val="3F57E4"/>
                 </a:solidFill>
                 <a:latin typeface="Segoe UI"/>
               </a:rPr>
@@ -11295,7 +11295,7 @@
                   </a:txBody>
                   <a:tcPr anchor="ctr" marL="91440">
                     <a:solidFill>
-                      <a:srgbClr val="007BA4"/>
+                      <a:srgbClr val="3F57E4"/>
                     </a:solidFill>
                   </a:tcPr>
                 </a:tc>
@@ -11317,7 +11317,7 @@
                   </a:txBody>
                   <a:tcPr anchor="ctr" marL="91440">
                     <a:solidFill>
-                      <a:srgbClr val="007BA4"/>
+                      <a:srgbClr val="3F57E4"/>
                     </a:solidFill>
                   </a:tcPr>
                 </a:tc>
@@ -11339,7 +11339,7 @@
                   </a:txBody>
                   <a:tcPr anchor="ctr" marL="91440">
                     <a:solidFill>
-                      <a:srgbClr val="007BA4"/>
+                      <a:srgbClr val="3F57E4"/>
                     </a:solidFill>
                   </a:tcPr>
                 </a:tc>
@@ -11361,7 +11361,7 @@
                   </a:txBody>
                   <a:tcPr anchor="ctr" marL="91440">
                     <a:solidFill>
-                      <a:srgbClr val="007BA4"/>
+                      <a:srgbClr val="3F57E4"/>
                     </a:solidFill>
                   </a:tcPr>
                 </a:tc>
@@ -12329,7 +12329,7 @@
             <a:avLst/>
           </a:prstGeom>
           <a:solidFill>
-            <a:srgbClr val="007BA4"/>
+            <a:srgbClr val="3F57E4"/>
           </a:solidFill>
           <a:ln>
             <a:noFill/>
@@ -12475,7 +12475,7 @@
             <a:avLst/>
           </a:prstGeom>
           <a:solidFill>
-            <a:srgbClr val="C41F3E"/>
+            <a:srgbClr val="A100FF"/>
           </a:solidFill>
           <a:ln>
             <a:noFill/>
@@ -12860,7 +12860,7 @@
             <a:avLst/>
           </a:prstGeom>
           <a:solidFill>
-            <a:srgbClr val="007BA4"/>
+            <a:srgbClr val="3F57E4"/>
           </a:solidFill>
           <a:ln>
             <a:noFill/>
@@ -13006,7 +13006,7 @@
             <a:avLst/>
           </a:prstGeom>
           <a:solidFill>
-            <a:srgbClr val="C41F3E"/>
+            <a:srgbClr val="A100FF"/>
           </a:solidFill>
           <a:ln>
             <a:noFill/>
@@ -13068,7 +13068,7 @@
             <a:r>
               <a:rPr sz="1050" b="1" i="0">
                 <a:solidFill>
-                  <a:srgbClr val="007BA4"/>
+                  <a:srgbClr val="3F57E4"/>
                 </a:solidFill>
                 <a:latin typeface="Segoe UI"/>
               </a:rPr>
@@ -13161,7 +13161,7 @@
                   </a:txBody>
                   <a:tcPr anchor="ctr" marL="91440">
                     <a:solidFill>
-                      <a:srgbClr val="007BA4"/>
+                      <a:srgbClr val="3F57E4"/>
                     </a:solidFill>
                   </a:tcPr>
                 </a:tc>
@@ -13183,7 +13183,7 @@
                   </a:txBody>
                   <a:tcPr anchor="ctr" marL="91440">
                     <a:solidFill>
-                      <a:srgbClr val="007BA4"/>
+                      <a:srgbClr val="3F57E4"/>
                     </a:solidFill>
                   </a:tcPr>
                 </a:tc>
@@ -13205,7 +13205,7 @@
                   </a:txBody>
                   <a:tcPr anchor="ctr" marL="91440">
                     <a:solidFill>
-                      <a:srgbClr val="007BA4"/>
+                      <a:srgbClr val="3F57E4"/>
                     </a:solidFill>
                   </a:tcPr>
                 </a:tc>
@@ -14235,7 +14235,7 @@
             <a:avLst/>
           </a:prstGeom>
           <a:solidFill>
-            <a:srgbClr val="005377"/>
+            <a:srgbClr val="001D54"/>
           </a:solidFill>
           <a:ln>
             <a:noFill/>
@@ -14279,7 +14279,7 @@
             <a:avLst/>
           </a:prstGeom>
           <a:solidFill>
-            <a:srgbClr val="C41F3E"/>
+            <a:srgbClr val="A100FF"/>
           </a:solidFill>
           <a:ln>
             <a:noFill/>
@@ -14341,7 +14341,7 @@
             <a:r>
               <a:rPr sz="6400" b="1" i="0">
                 <a:solidFill>
-                  <a:srgbClr val="A0D3E8"/>
+                  <a:srgbClr val="A9B5F2"/>
                 </a:solidFill>
                 <a:latin typeface="Segoe UI"/>
               </a:rPr>
@@ -14425,7 +14425,7 @@
             <a:r>
               <a:rPr sz="1450" b="0" i="0">
                 <a:solidFill>
-                  <a:srgbClr val="D3EDEE"/>
+                  <a:srgbClr val="DCE1F7"/>
                 </a:solidFill>
                 <a:latin typeface="Segoe UI"/>
               </a:rPr>
@@ -14509,7 +14509,7 @@
             <a:avLst/>
           </a:prstGeom>
           <a:solidFill>
-            <a:srgbClr val="C41F3E"/>
+            <a:srgbClr val="A100FF"/>
           </a:solidFill>
           <a:ln>
             <a:noFill/>
@@ -14571,7 +14571,7 @@
             <a:r>
               <a:rPr sz="1050" b="1" i="0">
                 <a:solidFill>
-                  <a:srgbClr val="007BA4"/>
+                  <a:srgbClr val="3F57E4"/>
                 </a:solidFill>
                 <a:latin typeface="Segoe UI"/>
               </a:rPr>
@@ -15295,7 +15295,7 @@
             <a:avLst/>
           </a:prstGeom>
           <a:solidFill>
-            <a:srgbClr val="C41F3E"/>
+            <a:srgbClr val="A100FF"/>
           </a:solidFill>
           <a:ln>
             <a:noFill/>
@@ -15357,7 +15357,7 @@
             <a:r>
               <a:rPr sz="1050" b="1" i="0">
                 <a:solidFill>
-                  <a:srgbClr val="007BA4"/>
+                  <a:srgbClr val="3F57E4"/>
                 </a:solidFill>
                 <a:latin typeface="Segoe UI"/>
               </a:rPr>
@@ -15450,7 +15450,7 @@
                   </a:txBody>
                   <a:tcPr anchor="ctr" marL="91440">
                     <a:solidFill>
-                      <a:srgbClr val="007BA4"/>
+                      <a:srgbClr val="3F57E4"/>
                     </a:solidFill>
                   </a:tcPr>
                 </a:tc>
@@ -15472,7 +15472,7 @@
                   </a:txBody>
                   <a:tcPr anchor="ctr" marL="91440">
                     <a:solidFill>
-                      <a:srgbClr val="007BA4"/>
+                      <a:srgbClr val="3F57E4"/>
                     </a:solidFill>
                   </a:tcPr>
                 </a:tc>
@@ -15494,7 +15494,7 @@
                   </a:txBody>
                   <a:tcPr anchor="ctr" marL="91440">
                     <a:solidFill>
-                      <a:srgbClr val="007BA4"/>
+                      <a:srgbClr val="3F57E4"/>
                     </a:solidFill>
                   </a:tcPr>
                 </a:tc>
@@ -16116,7 +16116,7 @@
             <a:avLst/>
           </a:prstGeom>
           <a:solidFill>
-            <a:srgbClr val="005377"/>
+            <a:srgbClr val="001D54"/>
           </a:solidFill>
           <a:ln>
             <a:noFill/>
@@ -16160,7 +16160,7 @@
             <a:avLst/>
           </a:prstGeom>
           <a:solidFill>
-            <a:srgbClr val="C41F3E"/>
+            <a:srgbClr val="A100FF"/>
           </a:solidFill>
           <a:ln>
             <a:noFill/>
@@ -16222,7 +16222,7 @@
             <a:r>
               <a:rPr sz="6400" b="1" i="0">
                 <a:solidFill>
-                  <a:srgbClr val="A0D3E8"/>
+                  <a:srgbClr val="A9B5F2"/>
                 </a:solidFill>
                 <a:latin typeface="Segoe UI"/>
               </a:rPr>
@@ -16306,7 +16306,7 @@
             <a:r>
               <a:rPr sz="1450" b="0" i="0">
                 <a:solidFill>
-                  <a:srgbClr val="D3EDEE"/>
+                  <a:srgbClr val="DCE1F7"/>
                 </a:solidFill>
                 <a:latin typeface="Segoe UI"/>
               </a:rPr>
@@ -16390,7 +16390,7 @@
             <a:avLst/>
           </a:prstGeom>
           <a:solidFill>
-            <a:srgbClr val="C41F3E"/>
+            <a:srgbClr val="A100FF"/>
           </a:solidFill>
           <a:ln>
             <a:noFill/>
@@ -16452,7 +16452,7 @@
             <a:r>
               <a:rPr sz="1050" b="1" i="0">
                 <a:solidFill>
-                  <a:srgbClr val="007BA4"/>
+                  <a:srgbClr val="3F57E4"/>
                 </a:solidFill>
                 <a:latin typeface="Segoe UI"/>
               </a:rPr>
@@ -16545,7 +16545,7 @@
                   </a:txBody>
                   <a:tcPr anchor="ctr" marL="91440">
                     <a:solidFill>
-                      <a:srgbClr val="007BA4"/>
+                      <a:srgbClr val="3F57E4"/>
                     </a:solidFill>
                   </a:tcPr>
                 </a:tc>
@@ -16567,7 +16567,7 @@
                   </a:txBody>
                   <a:tcPr anchor="ctr" marL="91440">
                     <a:solidFill>
-                      <a:srgbClr val="007BA4"/>
+                      <a:srgbClr val="3F57E4"/>
                     </a:solidFill>
                   </a:tcPr>
                 </a:tc>
@@ -16589,7 +16589,7 @@
                   </a:txBody>
                   <a:tcPr anchor="ctr" marL="91440">
                     <a:solidFill>
-                      <a:srgbClr val="007BA4"/>
+                      <a:srgbClr val="3F57E4"/>
                     </a:solidFill>
                   </a:tcPr>
                 </a:tc>
@@ -17201,7 +17201,7 @@
             <a:avLst/>
           </a:prstGeom>
           <a:solidFill>
-            <a:srgbClr val="007BA4"/>
+            <a:srgbClr val="3F57E4"/>
           </a:solidFill>
           <a:ln>
             <a:noFill/>
@@ -17347,7 +17347,7 @@
             <a:avLst/>
           </a:prstGeom>
           <a:solidFill>
-            <a:srgbClr val="C41F3E"/>
+            <a:srgbClr val="A100FF"/>
           </a:solidFill>
           <a:ln>
             <a:noFill/>
@@ -17409,7 +17409,7 @@
             <a:r>
               <a:rPr sz="1050" b="1" i="0">
                 <a:solidFill>
-                  <a:srgbClr val="007BA4"/>
+                  <a:srgbClr val="3F57E4"/>
                 </a:solidFill>
                 <a:latin typeface="Segoe UI"/>
               </a:rPr>
@@ -17502,7 +17502,7 @@
                   </a:txBody>
                   <a:tcPr anchor="ctr" marL="91440">
                     <a:solidFill>
-                      <a:srgbClr val="007BA4"/>
+                      <a:srgbClr val="3F57E4"/>
                     </a:solidFill>
                   </a:tcPr>
                 </a:tc>
@@ -17524,7 +17524,7 @@
                   </a:txBody>
                   <a:tcPr anchor="ctr" marL="91440">
                     <a:solidFill>
-                      <a:srgbClr val="007BA4"/>
+                      <a:srgbClr val="3F57E4"/>
                     </a:solidFill>
                   </a:tcPr>
                 </a:tc>
@@ -17546,7 +17546,7 @@
                   </a:txBody>
                   <a:tcPr anchor="ctr" marL="91440">
                     <a:solidFill>
-                      <a:srgbClr val="007BA4"/>
+                      <a:srgbClr val="3F57E4"/>
                     </a:solidFill>
                   </a:tcPr>
                 </a:tc>
@@ -18158,7 +18158,7 @@
             <a:avLst/>
           </a:prstGeom>
           <a:solidFill>
-            <a:srgbClr val="007BA4"/>
+            <a:srgbClr val="3F57E4"/>
           </a:solidFill>
           <a:ln>
             <a:noFill/>
@@ -18304,7 +18304,7 @@
             <a:avLst/>
           </a:prstGeom>
           <a:solidFill>
-            <a:srgbClr val="005377"/>
+            <a:srgbClr val="001D54"/>
           </a:solidFill>
           <a:ln>
             <a:noFill/>
@@ -18348,7 +18348,7 @@
             <a:avLst/>
           </a:prstGeom>
           <a:solidFill>
-            <a:srgbClr val="C41F3E"/>
+            <a:srgbClr val="A100FF"/>
           </a:solidFill>
           <a:ln>
             <a:noFill/>
@@ -18410,7 +18410,7 @@
             <a:r>
               <a:rPr sz="6400" b="1" i="0">
                 <a:solidFill>
-                  <a:srgbClr val="A0D3E8"/>
+                  <a:srgbClr val="A9B5F2"/>
                 </a:solidFill>
                 <a:latin typeface="Segoe UI"/>
               </a:rPr>
@@ -18494,7 +18494,7 @@
             <a:r>
               <a:rPr sz="1450" b="0" i="0">
                 <a:solidFill>
-                  <a:srgbClr val="D3EDEE"/>
+                  <a:srgbClr val="DCE1F7"/>
                 </a:solidFill>
                 <a:latin typeface="Segoe UI"/>
               </a:rPr>
@@ -18578,7 +18578,7 @@
             <a:avLst/>
           </a:prstGeom>
           <a:solidFill>
-            <a:srgbClr val="C41F3E"/>
+            <a:srgbClr val="A100FF"/>
           </a:solidFill>
           <a:ln>
             <a:noFill/>
@@ -18640,7 +18640,7 @@
             <a:r>
               <a:rPr sz="1050" b="1" i="0">
                 <a:solidFill>
-                  <a:srgbClr val="007BA4"/>
+                  <a:srgbClr val="3F57E4"/>
                 </a:solidFill>
                 <a:latin typeface="Segoe UI"/>
               </a:rPr>
@@ -18733,7 +18733,7 @@
                   </a:txBody>
                   <a:tcPr anchor="ctr" marL="91440">
                     <a:solidFill>
-                      <a:srgbClr val="007BA4"/>
+                      <a:srgbClr val="3F57E4"/>
                     </a:solidFill>
                   </a:tcPr>
                 </a:tc>
@@ -18755,7 +18755,7 @@
                   </a:txBody>
                   <a:tcPr anchor="ctr" marL="91440">
                     <a:solidFill>
-                      <a:srgbClr val="007BA4"/>
+                      <a:srgbClr val="3F57E4"/>
                     </a:solidFill>
                   </a:tcPr>
                 </a:tc>
@@ -18777,7 +18777,7 @@
                   </a:txBody>
                   <a:tcPr anchor="ctr" marL="91440">
                     <a:solidFill>
-                      <a:srgbClr val="007BA4"/>
+                      <a:srgbClr val="3F57E4"/>
                     </a:solidFill>
                   </a:tcPr>
                 </a:tc>
@@ -19634,7 +19634,7 @@
             <a:avLst/>
           </a:prstGeom>
           <a:solidFill>
-            <a:srgbClr val="C41F3E"/>
+            <a:srgbClr val="A100FF"/>
           </a:solidFill>
           <a:ln>
             <a:noFill/>
@@ -19696,7 +19696,7 @@
             <a:r>
               <a:rPr sz="1050" b="1" i="0">
                 <a:solidFill>
-                  <a:srgbClr val="007BA4"/>
+                  <a:srgbClr val="3F57E4"/>
                 </a:solidFill>
                 <a:latin typeface="Segoe UI"/>
               </a:rPr>
@@ -19806,7 +19806,7 @@
             <a:avLst/>
           </a:prstGeom>
           <a:solidFill>
-            <a:srgbClr val="007BA4"/>
+            <a:srgbClr val="3F57E4"/>
           </a:solidFill>
           <a:ln>
             <a:noFill/>
@@ -19868,7 +19868,7 @@
             <a:r>
               <a:rPr sz="3000" b="1" i="0">
                 <a:solidFill>
-                  <a:srgbClr val="007BA4"/>
+                  <a:srgbClr val="3F57E4"/>
                 </a:solidFill>
                 <a:latin typeface="Segoe UI"/>
               </a:rPr>
@@ -19979,7 +19979,7 @@
             <a:avLst/>
           </a:prstGeom>
           <a:solidFill>
-            <a:srgbClr val="007BA4"/>
+            <a:srgbClr val="3F57E4"/>
           </a:solidFill>
           <a:ln>
             <a:noFill/>
@@ -20041,7 +20041,7 @@
             <a:r>
               <a:rPr sz="3000" b="1" i="0">
                 <a:solidFill>
-                  <a:srgbClr val="007BA4"/>
+                  <a:srgbClr val="3F57E4"/>
                 </a:solidFill>
                 <a:latin typeface="Segoe UI"/>
               </a:rPr>
@@ -20152,7 +20152,7 @@
             <a:avLst/>
           </a:prstGeom>
           <a:solidFill>
-            <a:srgbClr val="007BA4"/>
+            <a:srgbClr val="3F57E4"/>
           </a:solidFill>
           <a:ln>
             <a:noFill/>
@@ -20214,7 +20214,7 @@
             <a:r>
               <a:rPr sz="3000" b="1" i="0">
                 <a:solidFill>
-                  <a:srgbClr val="007BA4"/>
+                  <a:srgbClr val="3F57E4"/>
                 </a:solidFill>
                 <a:latin typeface="Segoe UI"/>
               </a:rPr>
@@ -20325,7 +20325,7 @@
             <a:avLst/>
           </a:prstGeom>
           <a:solidFill>
-            <a:srgbClr val="007BA4"/>
+            <a:srgbClr val="3F57E4"/>
           </a:solidFill>
           <a:ln>
             <a:noFill/>
@@ -20387,7 +20387,7 @@
             <a:r>
               <a:rPr sz="3000" b="1" i="0">
                 <a:solidFill>
-                  <a:srgbClr val="007BA4"/>
+                  <a:srgbClr val="3F57E4"/>
                 </a:solidFill>
                 <a:latin typeface="Segoe UI"/>
               </a:rPr>
@@ -20498,7 +20498,7 @@
             <a:avLst/>
           </a:prstGeom>
           <a:solidFill>
-            <a:srgbClr val="007BA4"/>
+            <a:srgbClr val="3F57E4"/>
           </a:solidFill>
           <a:ln>
             <a:noFill/>
@@ -20560,7 +20560,7 @@
             <a:r>
               <a:rPr sz="3000" b="1" i="0">
                 <a:solidFill>
-                  <a:srgbClr val="007BA4"/>
+                  <a:srgbClr val="3F57E4"/>
                 </a:solidFill>
                 <a:latin typeface="Segoe UI"/>
               </a:rPr>
@@ -20654,7 +20654,7 @@
                   </a:txBody>
                   <a:tcPr anchor="ctr" marL="91440">
                     <a:solidFill>
-                      <a:srgbClr val="007BA4"/>
+                      <a:srgbClr val="3F57E4"/>
                     </a:solidFill>
                   </a:tcPr>
                 </a:tc>
@@ -20676,7 +20676,7 @@
                   </a:txBody>
                   <a:tcPr anchor="ctr" marL="91440">
                     <a:solidFill>
-                      <a:srgbClr val="007BA4"/>
+                      <a:srgbClr val="3F57E4"/>
                     </a:solidFill>
                   </a:tcPr>
                 </a:tc>
@@ -20698,7 +20698,7 @@
                   </a:txBody>
                   <a:tcPr anchor="ctr" marL="91440">
                     <a:solidFill>
-                      <a:srgbClr val="007BA4"/>
+                      <a:srgbClr val="3F57E4"/>
                     </a:solidFill>
                   </a:tcPr>
                 </a:tc>
@@ -21252,7 +21252,7 @@
             <a:avLst/>
           </a:prstGeom>
           <a:solidFill>
-            <a:srgbClr val="005377"/>
+            <a:srgbClr val="001D54"/>
           </a:solidFill>
           <a:ln>
             <a:noFill/>
@@ -21296,7 +21296,7 @@
             <a:avLst/>
           </a:prstGeom>
           <a:solidFill>
-            <a:srgbClr val="C41F3E"/>
+            <a:srgbClr val="A100FF"/>
           </a:solidFill>
           <a:ln>
             <a:noFill/>
@@ -21358,7 +21358,7 @@
             <a:r>
               <a:rPr sz="6400" b="1" i="0">
                 <a:solidFill>
-                  <a:srgbClr val="A0D3E8"/>
+                  <a:srgbClr val="A9B5F2"/>
                 </a:solidFill>
                 <a:latin typeface="Segoe UI"/>
               </a:rPr>
@@ -21442,7 +21442,7 @@
             <a:r>
               <a:rPr sz="1450" b="0" i="0">
                 <a:solidFill>
-                  <a:srgbClr val="D3EDEE"/>
+                  <a:srgbClr val="DCE1F7"/>
                 </a:solidFill>
                 <a:latin typeface="Segoe UI"/>
               </a:rPr>
@@ -21526,7 +21526,7 @@
             <a:avLst/>
           </a:prstGeom>
           <a:solidFill>
-            <a:srgbClr val="C41F3E"/>
+            <a:srgbClr val="A100FF"/>
           </a:solidFill>
           <a:ln>
             <a:noFill/>
@@ -21588,7 +21588,7 @@
             <a:r>
               <a:rPr sz="1050" b="1" i="0">
                 <a:solidFill>
-                  <a:srgbClr val="007BA4"/>
+                  <a:srgbClr val="3F57E4"/>
                 </a:solidFill>
                 <a:latin typeface="Segoe UI"/>
               </a:rPr>
@@ -22019,7 +22019,7 @@
             <a:avLst/>
           </a:prstGeom>
           <a:solidFill>
-            <a:srgbClr val="C41F3E"/>
+            <a:srgbClr val="A100FF"/>
           </a:solidFill>
           <a:ln>
             <a:noFill/>
@@ -22081,7 +22081,7 @@
             <a:r>
               <a:rPr sz="1050" b="1" i="0">
                 <a:solidFill>
-                  <a:srgbClr val="007BA4"/>
+                  <a:srgbClr val="3F57E4"/>
                 </a:solidFill>
                 <a:latin typeface="Segoe UI"/>
               </a:rPr>
@@ -22191,7 +22191,7 @@
             <a:avLst/>
           </a:prstGeom>
           <a:solidFill>
-            <a:srgbClr val="007BA4"/>
+            <a:srgbClr val="3F57E4"/>
           </a:solidFill>
           <a:ln>
             <a:noFill/>
@@ -22253,7 +22253,7 @@
             <a:r>
               <a:rPr sz="3000" b="1" i="0">
                 <a:solidFill>
-                  <a:srgbClr val="007BA4"/>
+                  <a:srgbClr val="3F57E4"/>
                 </a:solidFill>
                 <a:latin typeface="Segoe UI"/>
               </a:rPr>
@@ -22364,7 +22364,7 @@
             <a:avLst/>
           </a:prstGeom>
           <a:solidFill>
-            <a:srgbClr val="007BA4"/>
+            <a:srgbClr val="3F57E4"/>
           </a:solidFill>
           <a:ln>
             <a:noFill/>
@@ -22426,7 +22426,7 @@
             <a:r>
               <a:rPr sz="3000" b="1" i="0">
                 <a:solidFill>
-                  <a:srgbClr val="007BA4"/>
+                  <a:srgbClr val="3F57E4"/>
                 </a:solidFill>
                 <a:latin typeface="Segoe UI"/>
               </a:rPr>
@@ -22537,7 +22537,7 @@
             <a:avLst/>
           </a:prstGeom>
           <a:solidFill>
-            <a:srgbClr val="007BA4"/>
+            <a:srgbClr val="3F57E4"/>
           </a:solidFill>
           <a:ln>
             <a:noFill/>
@@ -22599,7 +22599,7 @@
             <a:r>
               <a:rPr sz="3000" b="1" i="0">
                 <a:solidFill>
-                  <a:srgbClr val="007BA4"/>
+                  <a:srgbClr val="3F57E4"/>
                 </a:solidFill>
                 <a:latin typeface="Segoe UI"/>
               </a:rPr>
@@ -22710,7 +22710,7 @@
             <a:avLst/>
           </a:prstGeom>
           <a:solidFill>
-            <a:srgbClr val="007BA4"/>
+            <a:srgbClr val="3F57E4"/>
           </a:solidFill>
           <a:ln>
             <a:noFill/>
@@ -22772,7 +22772,7 @@
             <a:r>
               <a:rPr sz="3000" b="1" i="0">
                 <a:solidFill>
-                  <a:srgbClr val="007BA4"/>
+                  <a:srgbClr val="3F57E4"/>
                 </a:solidFill>
                 <a:latin typeface="Segoe UI"/>
               </a:rPr>
@@ -22866,7 +22866,7 @@
                   </a:txBody>
                   <a:tcPr anchor="ctr" marL="91440">
                     <a:solidFill>
-                      <a:srgbClr val="007BA4"/>
+                      <a:srgbClr val="3F57E4"/>
                     </a:solidFill>
                   </a:tcPr>
                 </a:tc>
@@ -22888,7 +22888,7 @@
                   </a:txBody>
                   <a:tcPr anchor="ctr" marL="91440">
                     <a:solidFill>
-                      <a:srgbClr val="007BA4"/>
+                      <a:srgbClr val="3F57E4"/>
                     </a:solidFill>
                   </a:tcPr>
                 </a:tc>
@@ -22910,7 +22910,7 @@
                   </a:txBody>
                   <a:tcPr anchor="ctr" marL="91440">
                     <a:solidFill>
-                      <a:srgbClr val="007BA4"/>
+                      <a:srgbClr val="3F57E4"/>
                     </a:solidFill>
                   </a:tcPr>
                 </a:tc>
@@ -23658,7 +23658,7 @@
             <a:avLst/>
           </a:prstGeom>
           <a:solidFill>
-            <a:srgbClr val="007BA4"/>
+            <a:srgbClr val="3F57E4"/>
           </a:solidFill>
           <a:ln>
             <a:noFill/>
@@ -23804,7 +23804,7 @@
             <a:avLst/>
           </a:prstGeom>
           <a:solidFill>
-            <a:srgbClr val="C41F3E"/>
+            <a:srgbClr val="A100FF"/>
           </a:solidFill>
           <a:ln>
             <a:noFill/>
@@ -23866,7 +23866,7 @@
             <a:r>
               <a:rPr sz="1050" b="1" i="0">
                 <a:solidFill>
-                  <a:srgbClr val="007BA4"/>
+                  <a:srgbClr val="3F57E4"/>
                 </a:solidFill>
                 <a:latin typeface="Segoe UI"/>
               </a:rPr>
@@ -24019,7 +24019,7 @@
                   </a:txBody>
                   <a:tcPr anchor="ctr" marL="91440">
                     <a:solidFill>
-                      <a:srgbClr val="007BA4"/>
+                      <a:srgbClr val="3F57E4"/>
                     </a:solidFill>
                   </a:tcPr>
                 </a:tc>
@@ -24041,7 +24041,7 @@
                   </a:txBody>
                   <a:tcPr anchor="ctr" marL="91440">
                     <a:solidFill>
-                      <a:srgbClr val="007BA4"/>
+                      <a:srgbClr val="3F57E4"/>
                     </a:solidFill>
                   </a:tcPr>
                 </a:tc>
@@ -24485,7 +24485,7 @@
             <a:avLst/>
           </a:prstGeom>
           <a:solidFill>
-            <a:srgbClr val="C41F3E"/>
+            <a:srgbClr val="A100FF"/>
           </a:solidFill>
           <a:ln>
             <a:noFill/>
@@ -24547,7 +24547,7 @@
             <a:r>
               <a:rPr sz="1050" b="1" i="0">
                 <a:solidFill>
-                  <a:srgbClr val="007BA4"/>
+                  <a:srgbClr val="3F57E4"/>
                 </a:solidFill>
                 <a:latin typeface="Segoe UI"/>
               </a:rPr>
@@ -24700,7 +24700,7 @@
                   </a:txBody>
                   <a:tcPr anchor="ctr" marL="91440">
                     <a:solidFill>
-                      <a:srgbClr val="007BA4"/>
+                      <a:srgbClr val="3F57E4"/>
                     </a:solidFill>
                   </a:tcPr>
                 </a:tc>
@@ -24722,7 +24722,7 @@
                   </a:txBody>
                   <a:tcPr anchor="ctr" marL="91440">
                     <a:solidFill>
-                      <a:srgbClr val="007BA4"/>
+                      <a:srgbClr val="3F57E4"/>
                     </a:solidFill>
                   </a:tcPr>
                 </a:tc>
@@ -25120,7 +25120,7 @@
             <a:avLst/>
           </a:prstGeom>
           <a:solidFill>
-            <a:srgbClr val="C41F3E"/>
+            <a:srgbClr val="A100FF"/>
           </a:solidFill>
           <a:ln>
             <a:noFill/>
@@ -25182,7 +25182,7 @@
             <a:r>
               <a:rPr sz="1050" b="1" i="0">
                 <a:solidFill>
-                  <a:srgbClr val="007BA4"/>
+                  <a:srgbClr val="3F57E4"/>
                 </a:solidFill>
                 <a:latin typeface="Segoe UI"/>
               </a:rPr>
@@ -25275,7 +25275,7 @@
                   </a:txBody>
                   <a:tcPr anchor="ctr" marL="91440">
                     <a:solidFill>
-                      <a:srgbClr val="007BA4"/>
+                      <a:srgbClr val="3F57E4"/>
                     </a:solidFill>
                   </a:tcPr>
                 </a:tc>
@@ -25297,7 +25297,7 @@
                   </a:txBody>
                   <a:tcPr anchor="ctr" marL="91440">
                     <a:solidFill>
-                      <a:srgbClr val="007BA4"/>
+                      <a:srgbClr val="3F57E4"/>
                     </a:solidFill>
                   </a:tcPr>
                 </a:tc>
@@ -25319,7 +25319,7 @@
                   </a:txBody>
                   <a:tcPr anchor="ctr" marL="91440">
                     <a:solidFill>
-                      <a:srgbClr val="007BA4"/>
+                      <a:srgbClr val="3F57E4"/>
                     </a:solidFill>
                   </a:tcPr>
                 </a:tc>
@@ -26077,7 +26077,7 @@
             <a:avLst/>
           </a:prstGeom>
           <a:solidFill>
-            <a:srgbClr val="005377"/>
+            <a:srgbClr val="001D54"/>
           </a:solidFill>
           <a:ln>
             <a:noFill/>
@@ -26121,7 +26121,7 @@
             <a:avLst/>
           </a:prstGeom>
           <a:solidFill>
-            <a:srgbClr val="C41F3E"/>
+            <a:srgbClr val="A100FF"/>
           </a:solidFill>
           <a:ln>
             <a:noFill/>
@@ -26183,7 +26183,7 @@
             <a:r>
               <a:rPr sz="6400" b="1" i="0">
                 <a:solidFill>
-                  <a:srgbClr val="A0D3E8"/>
+                  <a:srgbClr val="A9B5F2"/>
                 </a:solidFill>
                 <a:latin typeface="Segoe UI"/>
               </a:rPr>
@@ -26267,7 +26267,7 @@
             <a:r>
               <a:rPr sz="1450" b="0" i="0">
                 <a:solidFill>
-                  <a:srgbClr val="D3EDEE"/>
+                  <a:srgbClr val="DCE1F7"/>
                 </a:solidFill>
                 <a:latin typeface="Segoe UI"/>
               </a:rPr>
@@ -26351,7 +26351,7 @@
             <a:avLst/>
           </a:prstGeom>
           <a:solidFill>
-            <a:srgbClr val="C41F3E"/>
+            <a:srgbClr val="A100FF"/>
           </a:solidFill>
           <a:ln>
             <a:noFill/>
@@ -26413,7 +26413,7 @@
             <a:r>
               <a:rPr sz="1050" b="1" i="0">
                 <a:solidFill>
-                  <a:srgbClr val="007BA4"/>
+                  <a:srgbClr val="3F57E4"/>
                 </a:solidFill>
                 <a:latin typeface="Segoe UI"/>
               </a:rPr>
@@ -26523,7 +26523,7 @@
             <a:avLst/>
           </a:prstGeom>
           <a:solidFill>
-            <a:srgbClr val="007BA4"/>
+            <a:srgbClr val="3F57E4"/>
           </a:solidFill>
           <a:ln>
             <a:noFill/>
@@ -26585,7 +26585,7 @@
             <a:r>
               <a:rPr sz="3000" b="1" i="0">
                 <a:solidFill>
-                  <a:srgbClr val="007BA4"/>
+                  <a:srgbClr val="3F57E4"/>
                 </a:solidFill>
                 <a:latin typeface="Segoe UI"/>
               </a:rPr>
@@ -26695,7 +26695,7 @@
             <a:avLst/>
           </a:prstGeom>
           <a:solidFill>
-            <a:srgbClr val="007BA4"/>
+            <a:srgbClr val="3F57E4"/>
           </a:solidFill>
           <a:ln>
             <a:noFill/>
@@ -26757,7 +26757,7 @@
             <a:r>
               <a:rPr sz="3000" b="1" i="0">
                 <a:solidFill>
-                  <a:srgbClr val="007BA4"/>
+                  <a:srgbClr val="3F57E4"/>
                 </a:solidFill>
                 <a:latin typeface="Segoe UI"/>
               </a:rPr>
@@ -26867,7 +26867,7 @@
             <a:avLst/>
           </a:prstGeom>
           <a:solidFill>
-            <a:srgbClr val="007BA4"/>
+            <a:srgbClr val="3F57E4"/>
           </a:solidFill>
           <a:ln>
             <a:noFill/>
@@ -26929,7 +26929,7 @@
             <a:r>
               <a:rPr sz="3000" b="1" i="0">
                 <a:solidFill>
-                  <a:srgbClr val="007BA4"/>
+                  <a:srgbClr val="3F57E4"/>
                 </a:solidFill>
                 <a:latin typeface="Segoe UI"/>
               </a:rPr>
@@ -27039,7 +27039,7 @@
             <a:avLst/>
           </a:prstGeom>
           <a:solidFill>
-            <a:srgbClr val="007BA4"/>
+            <a:srgbClr val="3F57E4"/>
           </a:solidFill>
           <a:ln>
             <a:noFill/>
@@ -27101,7 +27101,7 @@
             <a:r>
               <a:rPr sz="3000" b="1" i="0">
                 <a:solidFill>
-                  <a:srgbClr val="007BA4"/>
+                  <a:srgbClr val="3F57E4"/>
                 </a:solidFill>
                 <a:latin typeface="Segoe UI"/>
               </a:rPr>
@@ -27198,7 +27198,7 @@
                   </a:txBody>
                   <a:tcPr anchor="ctr" marL="91440">
                     <a:solidFill>
-                      <a:srgbClr val="007BA4"/>
+                      <a:srgbClr val="3F57E4"/>
                     </a:solidFill>
                   </a:tcPr>
                 </a:tc>
@@ -27220,7 +27220,7 @@
                   </a:txBody>
                   <a:tcPr anchor="ctr" marL="91440">
                     <a:solidFill>
-                      <a:srgbClr val="007BA4"/>
+                      <a:srgbClr val="3F57E4"/>
                     </a:solidFill>
                   </a:tcPr>
                 </a:tc>
@@ -27242,7 +27242,7 @@
                   </a:txBody>
                   <a:tcPr anchor="ctr" marL="91440">
                     <a:solidFill>
-                      <a:srgbClr val="007BA4"/>
+                      <a:srgbClr val="3F57E4"/>
                     </a:solidFill>
                   </a:tcPr>
                 </a:tc>
@@ -27264,7 +27264,7 @@
                   </a:txBody>
                   <a:tcPr anchor="ctr" marL="91440">
                     <a:solidFill>
-                      <a:srgbClr val="007BA4"/>
+                      <a:srgbClr val="3F57E4"/>
                     </a:solidFill>
                   </a:tcPr>
                 </a:tc>
@@ -27286,7 +27286,7 @@
                   </a:txBody>
                   <a:tcPr anchor="ctr" marL="91440">
                     <a:solidFill>
-                      <a:srgbClr val="007BA4"/>
+                      <a:srgbClr val="3F57E4"/>
                     </a:solidFill>
                   </a:tcPr>
                 </a:tc>
@@ -27308,7 +27308,7 @@
                   </a:txBody>
                   <a:tcPr anchor="ctr" marL="91440">
                     <a:solidFill>
-                      <a:srgbClr val="007BA4"/>
+                      <a:srgbClr val="3F57E4"/>
                     </a:solidFill>
                   </a:tcPr>
                 </a:tc>
@@ -27330,7 +27330,7 @@
                   </a:txBody>
                   <a:tcPr anchor="ctr" marL="91440">
                     <a:solidFill>
-                      <a:srgbClr val="007BA4"/>
+                      <a:srgbClr val="3F57E4"/>
                     </a:solidFill>
                   </a:tcPr>
                 </a:tc>
@@ -28220,7 +28220,7 @@
             <a:avLst/>
           </a:prstGeom>
           <a:solidFill>
-            <a:srgbClr val="007BA4"/>
+            <a:srgbClr val="3F57E4"/>
           </a:solidFill>
           <a:ln>
             <a:noFill/>
@@ -28366,7 +28366,7 @@
             <a:avLst/>
           </a:prstGeom>
           <a:solidFill>
-            <a:srgbClr val="C41F3E"/>
+            <a:srgbClr val="A100FF"/>
           </a:solidFill>
           <a:ln>
             <a:noFill/>
@@ -28428,7 +28428,7 @@
             <a:r>
               <a:rPr sz="1050" b="1" i="0">
                 <a:solidFill>
-                  <a:srgbClr val="007BA4"/>
+                  <a:srgbClr val="3F57E4"/>
                 </a:solidFill>
                 <a:latin typeface="Segoe UI"/>
               </a:rPr>
@@ -28521,7 +28521,7 @@
                   </a:txBody>
                   <a:tcPr anchor="ctr" marL="91440">
                     <a:solidFill>
-                      <a:srgbClr val="007BA4"/>
+                      <a:srgbClr val="3F57E4"/>
                     </a:solidFill>
                   </a:tcPr>
                 </a:tc>
@@ -28543,7 +28543,7 @@
                   </a:txBody>
                   <a:tcPr anchor="ctr" marL="91440">
                     <a:solidFill>
-                      <a:srgbClr val="007BA4"/>
+                      <a:srgbClr val="3F57E4"/>
                     </a:solidFill>
                   </a:tcPr>
                 </a:tc>
@@ -28565,7 +28565,7 @@
                   </a:txBody>
                   <a:tcPr anchor="ctr" marL="91440">
                     <a:solidFill>
-                      <a:srgbClr val="007BA4"/>
+                      <a:srgbClr val="3F57E4"/>
                     </a:solidFill>
                   </a:tcPr>
                 </a:tc>
@@ -29316,7 +29316,7 @@
             <a:avLst/>
           </a:prstGeom>
           <a:solidFill>
-            <a:srgbClr val="C41F3E"/>
+            <a:srgbClr val="A100FF"/>
           </a:solidFill>
           <a:ln>
             <a:noFill/>
@@ -29378,7 +29378,7 @@
             <a:r>
               <a:rPr sz="1050" b="1" i="0">
                 <a:solidFill>
-                  <a:srgbClr val="007BA4"/>
+                  <a:srgbClr val="3F57E4"/>
                 </a:solidFill>
                 <a:latin typeface="Segoe UI"/>
               </a:rPr>
@@ -29471,7 +29471,7 @@
                   </a:txBody>
                   <a:tcPr anchor="ctr" marL="91440">
                     <a:solidFill>
-                      <a:srgbClr val="007BA4"/>
+                      <a:srgbClr val="3F57E4"/>
                     </a:solidFill>
                   </a:tcPr>
                 </a:tc>
@@ -29493,7 +29493,7 @@
                   </a:txBody>
                   <a:tcPr anchor="ctr" marL="91440">
                     <a:solidFill>
-                      <a:srgbClr val="007BA4"/>
+                      <a:srgbClr val="3F57E4"/>
                     </a:solidFill>
                   </a:tcPr>
                 </a:tc>
@@ -29515,7 +29515,7 @@
                   </a:txBody>
                   <a:tcPr anchor="ctr" marL="91440">
                     <a:solidFill>
-                      <a:srgbClr val="007BA4"/>
+                      <a:srgbClr val="3F57E4"/>
                     </a:solidFill>
                   </a:tcPr>
                 </a:tc>
@@ -30273,7 +30273,7 @@
             <a:avLst/>
           </a:prstGeom>
           <a:solidFill>
-            <a:srgbClr val="005377"/>
+            <a:srgbClr val="001D54"/>
           </a:solidFill>
           <a:ln>
             <a:noFill/>
@@ -30317,7 +30317,7 @@
             <a:avLst/>
           </a:prstGeom>
           <a:solidFill>
-            <a:srgbClr val="C41F3E"/>
+            <a:srgbClr val="A100FF"/>
           </a:solidFill>
           <a:ln>
             <a:noFill/>
@@ -30379,7 +30379,7 @@
             <a:r>
               <a:rPr sz="6400" b="1" i="0">
                 <a:solidFill>
-                  <a:srgbClr val="A0D3E8"/>
+                  <a:srgbClr val="A9B5F2"/>
                 </a:solidFill>
                 <a:latin typeface="Segoe UI"/>
               </a:rPr>
@@ -30463,7 +30463,7 @@
             <a:r>
               <a:rPr sz="1450" b="0" i="0">
                 <a:solidFill>
-                  <a:srgbClr val="D3EDEE"/>
+                  <a:srgbClr val="DCE1F7"/>
                 </a:solidFill>
                 <a:latin typeface="Segoe UI"/>
               </a:rPr>
@@ -30547,7 +30547,7 @@
             <a:avLst/>
           </a:prstGeom>
           <a:solidFill>
-            <a:srgbClr val="C41F3E"/>
+            <a:srgbClr val="A100FF"/>
           </a:solidFill>
           <a:ln>
             <a:noFill/>
@@ -30609,7 +30609,7 @@
             <a:r>
               <a:rPr sz="1050" b="1" i="0">
                 <a:solidFill>
-                  <a:srgbClr val="007BA4"/>
+                  <a:srgbClr val="3F57E4"/>
                 </a:solidFill>
                 <a:latin typeface="Segoe UI"/>
               </a:rPr>
@@ -30719,7 +30719,7 @@
             <a:avLst/>
           </a:prstGeom>
           <a:solidFill>
-            <a:srgbClr val="007BA4"/>
+            <a:srgbClr val="3F57E4"/>
           </a:solidFill>
           <a:ln>
             <a:noFill/>
@@ -30781,7 +30781,7 @@
             <a:r>
               <a:rPr sz="3000" b="1" i="0">
                 <a:solidFill>
-                  <a:srgbClr val="007BA4"/>
+                  <a:srgbClr val="3F57E4"/>
                 </a:solidFill>
                 <a:latin typeface="Segoe UI"/>
               </a:rPr>
@@ -30892,7 +30892,7 @@
             <a:avLst/>
           </a:prstGeom>
           <a:solidFill>
-            <a:srgbClr val="007BA4"/>
+            <a:srgbClr val="3F57E4"/>
           </a:solidFill>
           <a:ln>
             <a:noFill/>
@@ -30954,7 +30954,7 @@
             <a:r>
               <a:rPr sz="3000" b="1" i="0">
                 <a:solidFill>
-                  <a:srgbClr val="007BA4"/>
+                  <a:srgbClr val="3F57E4"/>
                 </a:solidFill>
                 <a:latin typeface="Segoe UI"/>
               </a:rPr>
@@ -31065,7 +31065,7 @@
             <a:avLst/>
           </a:prstGeom>
           <a:solidFill>
-            <a:srgbClr val="007BA4"/>
+            <a:srgbClr val="3F57E4"/>
           </a:solidFill>
           <a:ln>
             <a:noFill/>
@@ -31127,7 +31127,7 @@
             <a:r>
               <a:rPr sz="3000" b="1" i="0">
                 <a:solidFill>
-                  <a:srgbClr val="007BA4"/>
+                  <a:srgbClr val="3F57E4"/>
                 </a:solidFill>
                 <a:latin typeface="Segoe UI"/>
               </a:rPr>
@@ -31238,7 +31238,7 @@
             <a:avLst/>
           </a:prstGeom>
           <a:solidFill>
-            <a:srgbClr val="007BA4"/>
+            <a:srgbClr val="3F57E4"/>
           </a:solidFill>
           <a:ln>
             <a:noFill/>
@@ -31300,7 +31300,7 @@
             <a:r>
               <a:rPr sz="3000" b="1" i="0">
                 <a:solidFill>
-                  <a:srgbClr val="007BA4"/>
+                  <a:srgbClr val="3F57E4"/>
                 </a:solidFill>
                 <a:latin typeface="Segoe UI"/>
               </a:rPr>
@@ -31411,7 +31411,7 @@
             <a:avLst/>
           </a:prstGeom>
           <a:solidFill>
-            <a:srgbClr val="007BA4"/>
+            <a:srgbClr val="3F57E4"/>
           </a:solidFill>
           <a:ln>
             <a:noFill/>
@@ -31473,7 +31473,7 @@
             <a:r>
               <a:rPr sz="3000" b="1" i="0">
                 <a:solidFill>
-                  <a:srgbClr val="007BA4"/>
+                  <a:srgbClr val="3F57E4"/>
                 </a:solidFill>
                 <a:latin typeface="Segoe UI"/>
               </a:rPr>
@@ -31737,7 +31737,7 @@
             <a:avLst/>
           </a:prstGeom>
           <a:solidFill>
-            <a:srgbClr val="C41F3E"/>
+            <a:srgbClr val="A100FF"/>
           </a:solidFill>
           <a:ln>
             <a:noFill/>
@@ -31799,7 +31799,7 @@
             <a:r>
               <a:rPr sz="1050" b="1" i="0">
                 <a:solidFill>
-                  <a:srgbClr val="007BA4"/>
+                  <a:srgbClr val="3F57E4"/>
                 </a:solidFill>
                 <a:latin typeface="Segoe UI"/>
               </a:rPr>
@@ -31892,7 +31892,7 @@
                   </a:txBody>
                   <a:tcPr anchor="ctr" marL="91440">
                     <a:solidFill>
-                      <a:srgbClr val="007BA4"/>
+                      <a:srgbClr val="3F57E4"/>
                     </a:solidFill>
                   </a:tcPr>
                 </a:tc>
@@ -31914,7 +31914,7 @@
                   </a:txBody>
                   <a:tcPr anchor="ctr" marL="91440">
                     <a:solidFill>
-                      <a:srgbClr val="007BA4"/>
+                      <a:srgbClr val="3F57E4"/>
                     </a:solidFill>
                   </a:tcPr>
                 </a:tc>
@@ -31936,7 +31936,7 @@
                   </a:txBody>
                   <a:tcPr anchor="ctr" marL="91440">
                     <a:solidFill>
-                      <a:srgbClr val="007BA4"/>
+                      <a:srgbClr val="3F57E4"/>
                     </a:solidFill>
                   </a:tcPr>
                 </a:tc>
@@ -32927,7 +32927,7 @@
             <a:avLst/>
           </a:prstGeom>
           <a:solidFill>
-            <a:srgbClr val="007BA4"/>
+            <a:srgbClr val="3F57E4"/>
           </a:solidFill>
           <a:ln>
             <a:noFill/>
@@ -33073,7 +33073,7 @@
             <a:avLst/>
           </a:prstGeom>
           <a:solidFill>
-            <a:srgbClr val="C41F3E"/>
+            <a:srgbClr val="A100FF"/>
           </a:solidFill>
           <a:ln>
             <a:noFill/>
@@ -33135,7 +33135,7 @@
             <a:r>
               <a:rPr sz="1050" b="1" i="0">
                 <a:solidFill>
-                  <a:srgbClr val="007BA4"/>
+                  <a:srgbClr val="3F57E4"/>
                 </a:solidFill>
                 <a:latin typeface="Segoe UI"/>
               </a:rPr>
@@ -33229,7 +33229,7 @@
                   </a:txBody>
                   <a:tcPr anchor="ctr" marL="91440">
                     <a:solidFill>
-                      <a:srgbClr val="007BA4"/>
+                      <a:srgbClr val="3F57E4"/>
                     </a:solidFill>
                   </a:tcPr>
                 </a:tc>
@@ -33251,7 +33251,7 @@
                   </a:txBody>
                   <a:tcPr anchor="ctr" marL="91440">
                     <a:solidFill>
-                      <a:srgbClr val="007BA4"/>
+                      <a:srgbClr val="3F57E4"/>
                     </a:solidFill>
                   </a:tcPr>
                 </a:tc>
@@ -33273,7 +33273,7 @@
                   </a:txBody>
                   <a:tcPr anchor="ctr" marL="91440">
                     <a:solidFill>
-                      <a:srgbClr val="007BA4"/>
+                      <a:srgbClr val="3F57E4"/>
                     </a:solidFill>
                   </a:tcPr>
                 </a:tc>
@@ -33295,7 +33295,7 @@
                   </a:txBody>
                   <a:tcPr anchor="ctr" marL="91440">
                     <a:solidFill>
-                      <a:srgbClr val="007BA4"/>
+                      <a:srgbClr val="3F57E4"/>
                     </a:solidFill>
                   </a:tcPr>
                 </a:tc>
@@ -33993,7 +33993,7 @@
             <a:avLst/>
           </a:prstGeom>
           <a:solidFill>
-            <a:srgbClr val="007BA4"/>
+            <a:srgbClr val="3F57E4"/>
           </a:solidFill>
           <a:ln>
             <a:noFill/>
@@ -34139,7 +34139,7 @@
             <a:avLst/>
           </a:prstGeom>
           <a:solidFill>
-            <a:srgbClr val="C41F3E"/>
+            <a:srgbClr val="A100FF"/>
           </a:solidFill>
           <a:ln>
             <a:noFill/>
@@ -34201,7 +34201,7 @@
             <a:r>
               <a:rPr sz="1050" b="1" i="0">
                 <a:solidFill>
-                  <a:srgbClr val="007BA4"/>
+                  <a:srgbClr val="3F57E4"/>
                 </a:solidFill>
                 <a:latin typeface="Segoe UI"/>
               </a:rPr>
@@ -34295,7 +34295,7 @@
                   </a:txBody>
                   <a:tcPr anchor="ctr" marL="91440">
                     <a:solidFill>
-                      <a:srgbClr val="007BA4"/>
+                      <a:srgbClr val="3F57E4"/>
                     </a:solidFill>
                   </a:tcPr>
                 </a:tc>
@@ -34317,7 +34317,7 @@
                   </a:txBody>
                   <a:tcPr anchor="ctr" marL="91440">
                     <a:solidFill>
-                      <a:srgbClr val="007BA4"/>
+                      <a:srgbClr val="3F57E4"/>
                     </a:solidFill>
                   </a:tcPr>
                 </a:tc>
@@ -34339,7 +34339,7 @@
                   </a:txBody>
                   <a:tcPr anchor="ctr" marL="91440">
                     <a:solidFill>
-                      <a:srgbClr val="007BA4"/>
+                      <a:srgbClr val="3F57E4"/>
                     </a:solidFill>
                   </a:tcPr>
                 </a:tc>
@@ -34361,7 +34361,7 @@
                   </a:txBody>
                   <a:tcPr anchor="ctr" marL="91440">
                     <a:solidFill>
-                      <a:srgbClr val="007BA4"/>
+                      <a:srgbClr val="3F57E4"/>
                     </a:solidFill>
                   </a:tcPr>
                 </a:tc>
@@ -35205,7 +35205,7 @@
             <a:avLst/>
           </a:prstGeom>
           <a:solidFill>
-            <a:srgbClr val="005377"/>
+            <a:srgbClr val="001D54"/>
           </a:solidFill>
           <a:ln>
             <a:noFill/>
@@ -35249,7 +35249,7 @@
             <a:avLst/>
           </a:prstGeom>
           <a:solidFill>
-            <a:srgbClr val="C41F3E"/>
+            <a:srgbClr val="A100FF"/>
           </a:solidFill>
           <a:ln>
             <a:noFill/>
@@ -35311,7 +35311,7 @@
             <a:r>
               <a:rPr sz="6400" b="1" i="0">
                 <a:solidFill>
-                  <a:srgbClr val="A0D3E8"/>
+                  <a:srgbClr val="A9B5F2"/>
                 </a:solidFill>
                 <a:latin typeface="Segoe UI"/>
               </a:rPr>
@@ -35395,7 +35395,7 @@
             <a:r>
               <a:rPr sz="1450" b="0" i="0">
                 <a:solidFill>
-                  <a:srgbClr val="D3EDEE"/>
+                  <a:srgbClr val="DCE1F7"/>
                 </a:solidFill>
                 <a:latin typeface="Segoe UI"/>
               </a:rPr>
@@ -35479,7 +35479,7 @@
             <a:avLst/>
           </a:prstGeom>
           <a:solidFill>
-            <a:srgbClr val="C41F3E"/>
+            <a:srgbClr val="A100FF"/>
           </a:solidFill>
           <a:ln>
             <a:noFill/>
@@ -35541,7 +35541,7 @@
             <a:r>
               <a:rPr sz="1050" b="1" i="0">
                 <a:solidFill>
-                  <a:srgbClr val="007BA4"/>
+                  <a:srgbClr val="3F57E4"/>
                 </a:solidFill>
                 <a:latin typeface="Segoe UI"/>
               </a:rPr>
@@ -35788,7 +35788,7 @@
             <a:avLst/>
           </a:prstGeom>
           <a:solidFill>
-            <a:srgbClr val="007BA4"/>
+            <a:srgbClr val="3F57E4"/>
           </a:solidFill>
           <a:ln>
             <a:noFill/>
@@ -35934,7 +35934,7 @@
             <a:avLst/>
           </a:prstGeom>
           <a:solidFill>
-            <a:srgbClr val="C41F3E"/>
+            <a:srgbClr val="A100FF"/>
           </a:solidFill>
           <a:ln>
             <a:noFill/>
@@ -35996,7 +35996,7 @@
             <a:r>
               <a:rPr sz="1050" b="1" i="0">
                 <a:solidFill>
-                  <a:srgbClr val="007BA4"/>
+                  <a:srgbClr val="3F57E4"/>
                 </a:solidFill>
                 <a:latin typeface="Segoe UI"/>
               </a:rPr>
@@ -36090,7 +36090,7 @@
                   </a:txBody>
                   <a:tcPr anchor="ctr" marL="91440">
                     <a:solidFill>
-                      <a:srgbClr val="007BA4"/>
+                      <a:srgbClr val="3F57E4"/>
                     </a:solidFill>
                   </a:tcPr>
                 </a:tc>
@@ -36112,7 +36112,7 @@
                   </a:txBody>
                   <a:tcPr anchor="ctr" marL="91440">
                     <a:solidFill>
-                      <a:srgbClr val="007BA4"/>
+                      <a:srgbClr val="3F57E4"/>
                     </a:solidFill>
                   </a:tcPr>
                 </a:tc>
@@ -36134,7 +36134,7 @@
                   </a:txBody>
                   <a:tcPr anchor="ctr" marL="91440">
                     <a:solidFill>
-                      <a:srgbClr val="007BA4"/>
+                      <a:srgbClr val="3F57E4"/>
                     </a:solidFill>
                   </a:tcPr>
                 </a:tc>
@@ -36156,7 +36156,7 @@
                   </a:txBody>
                   <a:tcPr anchor="ctr" marL="91440">
                     <a:solidFill>
-                      <a:srgbClr val="007BA4"/>
+                      <a:srgbClr val="3F57E4"/>
                     </a:solidFill>
                   </a:tcPr>
                 </a:tc>
@@ -36764,7 +36764,7 @@
             <a:avLst/>
           </a:prstGeom>
           <a:solidFill>
-            <a:srgbClr val="007BA4"/>
+            <a:srgbClr val="3F57E4"/>
           </a:solidFill>
           <a:ln>
             <a:noFill/>
@@ -36910,7 +36910,7 @@
             <a:avLst/>
           </a:prstGeom>
           <a:solidFill>
-            <a:srgbClr val="C41F3E"/>
+            <a:srgbClr val="A100FF"/>
           </a:solidFill>
           <a:ln>
             <a:noFill/>
@@ -36972,7 +36972,7 @@
             <a:r>
               <a:rPr sz="1050" b="1" i="0">
                 <a:solidFill>
-                  <a:srgbClr val="007BA4"/>
+                  <a:srgbClr val="3F57E4"/>
                 </a:solidFill>
                 <a:latin typeface="Segoe UI"/>
               </a:rPr>
@@ -37065,7 +37065,7 @@
                   </a:txBody>
                   <a:tcPr anchor="ctr" marL="91440">
                     <a:solidFill>
-                      <a:srgbClr val="007BA4"/>
+                      <a:srgbClr val="3F57E4"/>
                     </a:solidFill>
                   </a:tcPr>
                 </a:tc>
@@ -37087,7 +37087,7 @@
                   </a:txBody>
                   <a:tcPr anchor="ctr" marL="91440">
                     <a:solidFill>
-                      <a:srgbClr val="007BA4"/>
+                      <a:srgbClr val="3F57E4"/>
                     </a:solidFill>
                   </a:tcPr>
                 </a:tc>
@@ -37109,7 +37109,7 @@
                   </a:txBody>
                   <a:tcPr anchor="ctr" marL="91440">
                     <a:solidFill>
-                      <a:srgbClr val="007BA4"/>
+                      <a:srgbClr val="3F57E4"/>
                     </a:solidFill>
                   </a:tcPr>
                 </a:tc>
@@ -37700,7 +37700,7 @@
             <a:avLst/>
           </a:prstGeom>
           <a:solidFill>
-            <a:srgbClr val="C41F3E"/>
+            <a:srgbClr val="A100FF"/>
           </a:solidFill>
           <a:ln>
             <a:noFill/>
@@ -37762,7 +37762,7 @@
             <a:r>
               <a:rPr sz="1050" b="1" i="0">
                 <a:solidFill>
-                  <a:srgbClr val="007BA4"/>
+                  <a:srgbClr val="3F57E4"/>
                 </a:solidFill>
                 <a:latin typeface="Segoe UI"/>
               </a:rPr>
@@ -37854,7 +37854,7 @@
                   </a:txBody>
                   <a:tcPr anchor="ctr" marL="91440">
                     <a:solidFill>
-                      <a:srgbClr val="007BA4"/>
+                      <a:srgbClr val="3F57E4"/>
                     </a:solidFill>
                   </a:tcPr>
                 </a:tc>
@@ -37876,7 +37876,7 @@
                   </a:txBody>
                   <a:tcPr anchor="ctr" marL="91440">
                     <a:solidFill>
-                      <a:srgbClr val="007BA4"/>
+                      <a:srgbClr val="3F57E4"/>
                     </a:solidFill>
                   </a:tcPr>
                 </a:tc>
@@ -38312,7 +38312,7 @@
             <a:avLst/>
           </a:prstGeom>
           <a:solidFill>
-            <a:srgbClr val="007BA4"/>
+            <a:srgbClr val="3F57E4"/>
           </a:solidFill>
           <a:ln>
             <a:noFill/>
@@ -38458,7 +38458,7 @@
             <a:avLst/>
           </a:prstGeom>
           <a:solidFill>
-            <a:srgbClr val="C41F3E"/>
+            <a:srgbClr val="A100FF"/>
           </a:solidFill>
           <a:ln>
             <a:noFill/>
@@ -38520,7 +38520,7 @@
             <a:r>
               <a:rPr sz="1050" b="1" i="0">
                 <a:solidFill>
-                  <a:srgbClr val="007BA4"/>
+                  <a:srgbClr val="3F57E4"/>
                 </a:solidFill>
                 <a:latin typeface="Segoe UI"/>
               </a:rPr>
@@ -38824,7 +38824,7 @@
             <a:avLst/>
           </a:prstGeom>
           <a:solidFill>
-            <a:srgbClr val="007BA4"/>
+            <a:srgbClr val="3F57E4"/>
           </a:solidFill>
           <a:ln>
             <a:noFill/>
@@ -38970,7 +38970,7 @@
             <a:avLst/>
           </a:prstGeom>
           <a:solidFill>
-            <a:srgbClr val="005377"/>
+            <a:srgbClr val="001D54"/>
           </a:solidFill>
           <a:ln>
             <a:noFill/>
@@ -39014,7 +39014,7 @@
             <a:avLst/>
           </a:prstGeom>
           <a:solidFill>
-            <a:srgbClr val="C41F3E"/>
+            <a:srgbClr val="A100FF"/>
           </a:solidFill>
           <a:ln>
             <a:noFill/>
@@ -39076,7 +39076,7 @@
             <a:r>
               <a:rPr sz="6400" b="1" i="0">
                 <a:solidFill>
-                  <a:srgbClr val="A0D3E8"/>
+                  <a:srgbClr val="A9B5F2"/>
                 </a:solidFill>
                 <a:latin typeface="Segoe UI"/>
               </a:rPr>
@@ -39160,7 +39160,7 @@
             <a:r>
               <a:rPr sz="1450" b="0" i="0">
                 <a:solidFill>
-                  <a:srgbClr val="D3EDEE"/>
+                  <a:srgbClr val="DCE1F7"/>
                 </a:solidFill>
                 <a:latin typeface="Segoe UI"/>
               </a:rPr>
@@ -39244,7 +39244,7 @@
             <a:avLst/>
           </a:prstGeom>
           <a:solidFill>
-            <a:srgbClr val="C41F3E"/>
+            <a:srgbClr val="A100FF"/>
           </a:solidFill>
           <a:ln>
             <a:noFill/>
@@ -39306,7 +39306,7 @@
             <a:r>
               <a:rPr sz="1050" b="1" i="0">
                 <a:solidFill>
-                  <a:srgbClr val="007BA4"/>
+                  <a:srgbClr val="3F57E4"/>
                 </a:solidFill>
                 <a:latin typeface="Segoe UI"/>
               </a:rPr>
@@ -39497,7 +39497,7 @@
                   </a:txBody>
                   <a:tcPr anchor="ctr" marL="91440">
                     <a:solidFill>
-                      <a:srgbClr val="007BA4"/>
+                      <a:srgbClr val="3F57E4"/>
                     </a:solidFill>
                   </a:tcPr>
                 </a:tc>
@@ -39519,7 +39519,7 @@
                   </a:txBody>
                   <a:tcPr anchor="ctr" marL="91440">
                     <a:solidFill>
-                      <a:srgbClr val="007BA4"/>
+                      <a:srgbClr val="3F57E4"/>
                     </a:solidFill>
                   </a:tcPr>
                 </a:tc>
@@ -39863,7 +39863,7 @@
             <a:avLst/>
           </a:prstGeom>
           <a:solidFill>
-            <a:srgbClr val="007BA4"/>
+            <a:srgbClr val="3F57E4"/>
           </a:solidFill>
           <a:ln>
             <a:noFill/>
@@ -40009,7 +40009,7 @@
             <a:avLst/>
           </a:prstGeom>
           <a:solidFill>
-            <a:srgbClr val="C41F3E"/>
+            <a:srgbClr val="A100FF"/>
           </a:solidFill>
           <a:ln>
             <a:noFill/>
@@ -40071,7 +40071,7 @@
             <a:r>
               <a:rPr sz="1050" b="1" i="0">
                 <a:solidFill>
-                  <a:srgbClr val="007BA4"/>
+                  <a:srgbClr val="3F57E4"/>
                 </a:solidFill>
                 <a:latin typeface="Segoe UI"/>
               </a:rPr>
@@ -40166,7 +40166,7 @@
                   </a:txBody>
                   <a:tcPr anchor="ctr" marL="91440">
                     <a:solidFill>
-                      <a:srgbClr val="007BA4"/>
+                      <a:srgbClr val="3F57E4"/>
                     </a:solidFill>
                   </a:tcPr>
                 </a:tc>
@@ -40188,7 +40188,7 @@
                   </a:txBody>
                   <a:tcPr anchor="ctr" marL="91440">
                     <a:solidFill>
-                      <a:srgbClr val="007BA4"/>
+                      <a:srgbClr val="3F57E4"/>
                     </a:solidFill>
                   </a:tcPr>
                 </a:tc>
@@ -40210,7 +40210,7 @@
                   </a:txBody>
                   <a:tcPr anchor="ctr" marL="91440">
                     <a:solidFill>
-                      <a:srgbClr val="007BA4"/>
+                      <a:srgbClr val="3F57E4"/>
                     </a:solidFill>
                   </a:tcPr>
                 </a:tc>
@@ -40232,7 +40232,7 @@
                   </a:txBody>
                   <a:tcPr anchor="ctr" marL="91440">
                     <a:solidFill>
-                      <a:srgbClr val="007BA4"/>
+                      <a:srgbClr val="3F57E4"/>
                     </a:solidFill>
                   </a:tcPr>
                 </a:tc>
@@ -40254,7 +40254,7 @@
                   </a:txBody>
                   <a:tcPr anchor="ctr" marL="91440">
                     <a:solidFill>
-                      <a:srgbClr val="007BA4"/>
+                      <a:srgbClr val="3F57E4"/>
                     </a:solidFill>
                   </a:tcPr>
                 </a:tc>
@@ -41442,7 +41442,7 @@
             <a:avLst/>
           </a:prstGeom>
           <a:solidFill>
-            <a:srgbClr val="007BA4"/>
+            <a:srgbClr val="3F57E4"/>
           </a:solidFill>
           <a:ln>
             <a:noFill/>
@@ -41588,7 +41588,7 @@
             <a:avLst/>
           </a:prstGeom>
           <a:solidFill>
-            <a:srgbClr val="C41F3E"/>
+            <a:srgbClr val="A100FF"/>
           </a:solidFill>
           <a:ln>
             <a:noFill/>
@@ -41650,7 +41650,7 @@
             <a:r>
               <a:rPr sz="1050" b="1" i="0">
                 <a:solidFill>
-                  <a:srgbClr val="007BA4"/>
+                  <a:srgbClr val="3F57E4"/>
                 </a:solidFill>
                 <a:latin typeface="Segoe UI"/>
               </a:rPr>
@@ -41745,7 +41745,7 @@
                   </a:txBody>
                   <a:tcPr anchor="ctr" marL="91440">
                     <a:solidFill>
-                      <a:srgbClr val="007BA4"/>
+                      <a:srgbClr val="3F57E4"/>
                     </a:solidFill>
                   </a:tcPr>
                 </a:tc>
@@ -41767,7 +41767,7 @@
                   </a:txBody>
                   <a:tcPr anchor="ctr" marL="91440">
                     <a:solidFill>
-                      <a:srgbClr val="007BA4"/>
+                      <a:srgbClr val="3F57E4"/>
                     </a:solidFill>
                   </a:tcPr>
                 </a:tc>
@@ -41789,7 +41789,7 @@
                   </a:txBody>
                   <a:tcPr anchor="ctr" marL="91440">
                     <a:solidFill>
-                      <a:srgbClr val="007BA4"/>
+                      <a:srgbClr val="3F57E4"/>
                     </a:solidFill>
                   </a:tcPr>
                 </a:tc>
@@ -41811,7 +41811,7 @@
                   </a:txBody>
                   <a:tcPr anchor="ctr" marL="91440">
                     <a:solidFill>
-                      <a:srgbClr val="007BA4"/>
+                      <a:srgbClr val="3F57E4"/>
                     </a:solidFill>
                   </a:tcPr>
                 </a:tc>
@@ -41833,7 +41833,7 @@
                   </a:txBody>
                   <a:tcPr anchor="ctr" marL="91440">
                     <a:solidFill>
-                      <a:srgbClr val="007BA4"/>
+                      <a:srgbClr val="3F57E4"/>
                     </a:solidFill>
                   </a:tcPr>
                 </a:tc>
@@ -42502,7 +42502,7 @@
             <a:avLst/>
           </a:prstGeom>
           <a:solidFill>
-            <a:srgbClr val="C41F3E"/>
+            <a:srgbClr val="A100FF"/>
           </a:solidFill>
           <a:ln>
             <a:noFill/>
@@ -42564,7 +42564,7 @@
             <a:r>
               <a:rPr sz="1050" b="1" i="0">
                 <a:solidFill>
-                  <a:srgbClr val="007BA4"/>
+                  <a:srgbClr val="3F57E4"/>
                 </a:solidFill>
                 <a:latin typeface="Segoe UI"/>
               </a:rPr>
@@ -42657,7 +42657,7 @@
                   </a:txBody>
                   <a:tcPr anchor="ctr" marL="91440">
                     <a:solidFill>
-                      <a:srgbClr val="007BA4"/>
+                      <a:srgbClr val="3F57E4"/>
                     </a:solidFill>
                   </a:tcPr>
                 </a:tc>
@@ -42679,7 +42679,7 @@
                   </a:txBody>
                   <a:tcPr anchor="ctr" marL="91440">
                     <a:solidFill>
-                      <a:srgbClr val="007BA4"/>
+                      <a:srgbClr val="3F57E4"/>
                     </a:solidFill>
                   </a:tcPr>
                 </a:tc>
@@ -42701,7 +42701,7 @@
                   </a:txBody>
                   <a:tcPr anchor="ctr" marL="91440">
                     <a:solidFill>
-                      <a:srgbClr val="007BA4"/>
+                      <a:srgbClr val="3F57E4"/>
                     </a:solidFill>
                   </a:tcPr>
                 </a:tc>
@@ -43526,7 +43526,7 @@
             <a:avLst/>
           </a:prstGeom>
           <a:solidFill>
-            <a:srgbClr val="C41F3E"/>
+            <a:srgbClr val="A100FF"/>
           </a:solidFill>
           <a:ln>
             <a:noFill/>
@@ -43588,7 +43588,7 @@
             <a:r>
               <a:rPr sz="1050" b="1" i="0">
                 <a:solidFill>
-                  <a:srgbClr val="007BA4"/>
+                  <a:srgbClr val="3F57E4"/>
                 </a:solidFill>
                 <a:latin typeface="Segoe UI"/>
               </a:rPr>
@@ -43681,7 +43681,7 @@
                   </a:txBody>
                   <a:tcPr anchor="ctr" marL="91440">
                     <a:solidFill>
-                      <a:srgbClr val="007BA4"/>
+                      <a:srgbClr val="3F57E4"/>
                     </a:solidFill>
                   </a:tcPr>
                 </a:tc>
@@ -43703,7 +43703,7 @@
                   </a:txBody>
                   <a:tcPr anchor="ctr" marL="91440">
                     <a:solidFill>
-                      <a:srgbClr val="007BA4"/>
+                      <a:srgbClr val="3F57E4"/>
                     </a:solidFill>
                   </a:tcPr>
                 </a:tc>
@@ -43725,7 +43725,7 @@
                   </a:txBody>
                   <a:tcPr anchor="ctr" marL="91440">
                     <a:solidFill>
-                      <a:srgbClr val="007BA4"/>
+                      <a:srgbClr val="3F57E4"/>
                     </a:solidFill>
                   </a:tcPr>
                 </a:tc>
@@ -44353,7 +44353,7 @@
             <a:avLst/>
           </a:prstGeom>
           <a:solidFill>
-            <a:srgbClr val="005377"/>
+            <a:srgbClr val="001D54"/>
           </a:solidFill>
           <a:ln>
             <a:noFill/>
@@ -44397,7 +44397,7 @@
             <a:avLst/>
           </a:prstGeom>
           <a:solidFill>
-            <a:srgbClr val="C41F3E"/>
+            <a:srgbClr val="A100FF"/>
           </a:solidFill>
           <a:ln>
             <a:noFill/>
@@ -44501,7 +44501,7 @@
             <a:r>
               <a:rPr sz="1500" b="0" i="0">
                 <a:solidFill>
-                  <a:srgbClr val="D3EDEE"/>
+                  <a:srgbClr val="DCE1F7"/>
                 </a:solidFill>
                 <a:latin typeface="Segoe UI"/>
               </a:rPr>
@@ -44520,7 +44520,7 @@
             <a:r>
               <a:rPr sz="1300" b="0" i="0">
                 <a:solidFill>
-                  <a:srgbClr val="A0D3E8"/>
+                  <a:srgbClr val="A9B5F2"/>
                 </a:solidFill>
                 <a:latin typeface="Segoe UI"/>
               </a:rPr>
@@ -44604,7 +44604,7 @@
             <a:avLst/>
           </a:prstGeom>
           <a:solidFill>
-            <a:srgbClr val="C41F3E"/>
+            <a:srgbClr val="A100FF"/>
           </a:solidFill>
           <a:ln>
             <a:noFill/>
@@ -44666,7 +44666,7 @@
             <a:r>
               <a:rPr sz="1050" b="1" i="0">
                 <a:solidFill>
-                  <a:srgbClr val="007BA4"/>
+                  <a:srgbClr val="3F57E4"/>
                 </a:solidFill>
                 <a:latin typeface="Segoe UI"/>
               </a:rPr>
@@ -44759,7 +44759,7 @@
                   </a:txBody>
                   <a:tcPr anchor="ctr" marL="91440">
                     <a:solidFill>
-                      <a:srgbClr val="007BA4"/>
+                      <a:srgbClr val="3F57E4"/>
                     </a:solidFill>
                   </a:tcPr>
                 </a:tc>
@@ -44781,7 +44781,7 @@
                   </a:txBody>
                   <a:tcPr anchor="ctr" marL="91440">
                     <a:solidFill>
-                      <a:srgbClr val="007BA4"/>
+                      <a:srgbClr val="3F57E4"/>
                     </a:solidFill>
                   </a:tcPr>
                 </a:tc>
@@ -44803,7 +44803,7 @@
                   </a:txBody>
                   <a:tcPr anchor="ctr" marL="91440">
                     <a:solidFill>
-                      <a:srgbClr val="007BA4"/>
+                      <a:srgbClr val="3F57E4"/>
                     </a:solidFill>
                   </a:tcPr>
                 </a:tc>
@@ -45279,7 +45279,7 @@
             <a:avLst/>
           </a:prstGeom>
           <a:solidFill>
-            <a:srgbClr val="007BA4"/>
+            <a:srgbClr val="3F57E4"/>
           </a:solidFill>
           <a:ln>
             <a:noFill/>
@@ -45425,7 +45425,7 @@
             <a:avLst/>
           </a:prstGeom>
           <a:solidFill>
-            <a:srgbClr val="C41F3E"/>
+            <a:srgbClr val="A100FF"/>
           </a:solidFill>
           <a:ln>
             <a:noFill/>
@@ -45487,7 +45487,7 @@
             <a:r>
               <a:rPr sz="1050" b="1" i="0">
                 <a:solidFill>
-                  <a:srgbClr val="007BA4"/>
+                  <a:srgbClr val="3F57E4"/>
                 </a:solidFill>
                 <a:latin typeface="Segoe UI"/>
               </a:rPr>
@@ -45864,7 +45864,7 @@
             <a:avLst/>
           </a:prstGeom>
           <a:solidFill>
-            <a:srgbClr val="005377"/>
+            <a:srgbClr val="001D54"/>
           </a:solidFill>
           <a:ln>
             <a:noFill/>
@@ -45908,7 +45908,7 @@
             <a:avLst/>
           </a:prstGeom>
           <a:solidFill>
-            <a:srgbClr val="C41F3E"/>
+            <a:srgbClr val="A100FF"/>
           </a:solidFill>
           <a:ln>
             <a:noFill/>
@@ -45970,7 +45970,7 @@
             <a:r>
               <a:rPr sz="6400" b="1" i="0">
                 <a:solidFill>
-                  <a:srgbClr val="A0D3E8"/>
+                  <a:srgbClr val="A9B5F2"/>
                 </a:solidFill>
                 <a:latin typeface="Segoe UI"/>
               </a:rPr>
@@ -46054,7 +46054,7 @@
             <a:r>
               <a:rPr sz="1450" b="0" i="0">
                 <a:solidFill>
-                  <a:srgbClr val="D3EDEE"/>
+                  <a:srgbClr val="DCE1F7"/>
                 </a:solidFill>
                 <a:latin typeface="Segoe UI"/>
               </a:rPr>
@@ -46138,7 +46138,7 @@
             <a:avLst/>
           </a:prstGeom>
           <a:solidFill>
-            <a:srgbClr val="C41F3E"/>
+            <a:srgbClr val="A100FF"/>
           </a:solidFill>
           <a:ln>
             <a:noFill/>
@@ -46200,7 +46200,7 @@
             <a:r>
               <a:rPr sz="1050" b="1" i="0">
                 <a:solidFill>
-                  <a:srgbClr val="007BA4"/>
+                  <a:srgbClr val="3F57E4"/>
                 </a:solidFill>
                 <a:latin typeface="Segoe UI"/>
               </a:rPr>
@@ -46310,7 +46310,7 @@
             <a:avLst/>
           </a:prstGeom>
           <a:solidFill>
-            <a:srgbClr val="007BA4"/>
+            <a:srgbClr val="3F57E4"/>
           </a:solidFill>
           <a:ln>
             <a:noFill/>
@@ -46372,7 +46372,7 @@
             <a:r>
               <a:rPr sz="3000" b="1" i="0">
                 <a:solidFill>
-                  <a:srgbClr val="007BA4"/>
+                  <a:srgbClr val="3F57E4"/>
                 </a:solidFill>
                 <a:latin typeface="Segoe UI"/>
               </a:rPr>
@@ -46483,7 +46483,7 @@
             <a:avLst/>
           </a:prstGeom>
           <a:solidFill>
-            <a:srgbClr val="007BA4"/>
+            <a:srgbClr val="3F57E4"/>
           </a:solidFill>
           <a:ln>
             <a:noFill/>
@@ -46545,7 +46545,7 @@
             <a:r>
               <a:rPr sz="3000" b="1" i="0">
                 <a:solidFill>
-                  <a:srgbClr val="007BA4"/>
+                  <a:srgbClr val="3F57E4"/>
                 </a:solidFill>
                 <a:latin typeface="Segoe UI"/>
               </a:rPr>
@@ -46655,7 +46655,7 @@
             <a:avLst/>
           </a:prstGeom>
           <a:solidFill>
-            <a:srgbClr val="007BA4"/>
+            <a:srgbClr val="3F57E4"/>
           </a:solidFill>
           <a:ln>
             <a:noFill/>
@@ -46717,7 +46717,7 @@
             <a:r>
               <a:rPr sz="3000" b="1" i="0">
                 <a:solidFill>
-                  <a:srgbClr val="007BA4"/>
+                  <a:srgbClr val="3F57E4"/>
                 </a:solidFill>
                 <a:latin typeface="Segoe UI"/>
               </a:rPr>
@@ -46827,7 +46827,7 @@
             <a:avLst/>
           </a:prstGeom>
           <a:solidFill>
-            <a:srgbClr val="007BA4"/>
+            <a:srgbClr val="3F57E4"/>
           </a:solidFill>
           <a:ln>
             <a:noFill/>
@@ -46889,7 +46889,7 @@
             <a:r>
               <a:rPr sz="3000" b="1" i="0">
                 <a:solidFill>
-                  <a:srgbClr val="007BA4"/>
+                  <a:srgbClr val="3F57E4"/>
                 </a:solidFill>
                 <a:latin typeface="Segoe UI"/>
               </a:rPr>
@@ -47000,7 +47000,7 @@
             <a:avLst/>
           </a:prstGeom>
           <a:solidFill>
-            <a:srgbClr val="007BA4"/>
+            <a:srgbClr val="3F57E4"/>
           </a:solidFill>
           <a:ln>
             <a:noFill/>
@@ -47062,7 +47062,7 @@
             <a:r>
               <a:rPr sz="3000" b="1" i="0">
                 <a:solidFill>
-                  <a:srgbClr val="007BA4"/>
+                  <a:srgbClr val="3F57E4"/>
                 </a:solidFill>
                 <a:latin typeface="Segoe UI"/>
               </a:rPr>
@@ -47155,7 +47155,7 @@
                   </a:txBody>
                   <a:tcPr anchor="ctr" marL="91440">
                     <a:solidFill>
-                      <a:srgbClr val="007BA4"/>
+                      <a:srgbClr val="3F57E4"/>
                     </a:solidFill>
                   </a:tcPr>
                 </a:tc>
@@ -47177,7 +47177,7 @@
                   </a:txBody>
                   <a:tcPr anchor="ctr" marL="91440">
                     <a:solidFill>
-                      <a:srgbClr val="007BA4"/>
+                      <a:srgbClr val="3F57E4"/>
                     </a:solidFill>
                   </a:tcPr>
                 </a:tc>
@@ -47199,7 +47199,7 @@
                   </a:txBody>
                   <a:tcPr anchor="ctr" marL="91440">
                     <a:solidFill>
-                      <a:srgbClr val="007BA4"/>
+                      <a:srgbClr val="3F57E4"/>
                     </a:solidFill>
                   </a:tcPr>
                 </a:tc>
